--- a/고객제안서_자산배분.pptx
+++ b/고객제안서_자산배분.pptx
@@ -205,6 +205,16 @@
             <c:bubble3D val="0"/>
             <c:spPr>
               <a:solidFill>
+                <a:srgbClr val="00A9CE"/>
+              </a:solidFill>
+              <a:effectLst/>
+            </c:spPr>
+          </c:dPt>
+          <c:dPt>
+            <c:idx val="6"/>
+            <c:bubble3D val="0"/>
+            <c:spPr>
+              <a:solidFill>
                 <a:srgbClr val="84888B"/>
               </a:solidFill>
               <a:effectLst/>
@@ -338,6 +348,31 @@
             </c:dLbl>
             <c:dLbl>
               <c:idx val="5"/>
+              <c:numFmt formatCode="0.0&quot;%&quot;" sourceLinked="0"/>
+              <c:spPr/>
+              <c:txPr>
+                <a:bodyPr/>
+                <a:lstStyle/>
+                <a:p>
+                  <a:pPr>
+                    <a:defRPr sz="1000" b="0" i="0" u="none" strike="noStrike">
+                      <a:solidFill>
+                        <a:srgbClr val="FFFFFF"/>
+                      </a:solidFill>
+                      <a:latin typeface="Spoqa Han Sans Neo"/>
+                    </a:defRPr>
+                  </a:pPr>
+                </a:p>
+              </c:txPr>
+              <c:showLegendKey val="0"/>
+              <c:showVal val="1"/>
+              <c:showCatName val="0"/>
+              <c:showSerName val="0"/>
+              <c:showPercent val="0"/>
+              <c:showBubbleSize val="0"/>
+            </c:dLbl>
+            <c:dLbl>
+              <c:idx val="6"/>
               <c:numFmt formatCode="0.0&quot;%&quot;" sourceLinked="0"/>
               <c:spPr/>
               <c:txPr>
@@ -386,9 +421,9 @@
           </c:dLbls>
           <c:cat>
             <c:strRef>
-              <c:f>Sheet1!$A$2:$A$7</c:f>
+              <c:f>Sheet1!$A$2:$A$8</c:f>
               <c:strCache>
-                <c:ptCount val="6"/>
+                <c:ptCount val="7"/>
                 <c:pt idx="0">
                   <c:v>국내주식</c:v>
                 </c:pt>
@@ -399,12 +434,15 @@
                   <c:v>국내ETF</c:v>
                 </c:pt>
                 <c:pt idx="3">
+                  <c:v>해외ETF</c:v>
+                </c:pt>
+                <c:pt idx="4">
                   <c:v>국내펀드</c:v>
                 </c:pt>
-                <c:pt idx="4">
+                <c:pt idx="5">
                   <c:v>해외펀드</c:v>
                 </c:pt>
-                <c:pt idx="5">
+                <c:pt idx="6">
                   <c:v>현금</c:v>
                 </c:pt>
               </c:strCache>
@@ -412,9 +450,9 @@
           </c:cat>
           <c:val>
             <c:numRef>
-              <c:f>Sheet1!$B$2:$B$7</c:f>
+              <c:f>Sheet1!$B$2:$B$8</c:f>
               <c:numCache>
-                <c:ptCount val="6"/>
+                <c:ptCount val="7"/>
                 <c:pt idx="0">
                   <c:v>5</c:v>
                 </c:pt>
@@ -425,12 +463,15 @@
                   <c:v>15</c:v>
                 </c:pt>
                 <c:pt idx="3">
+                  <c:v>15</c:v>
+                </c:pt>
+                <c:pt idx="4">
                   <c:v>20</c:v>
                 </c:pt>
-                <c:pt idx="4">
-                  <c:v>35</c:v>
+                <c:pt idx="5">
+                  <c:v>20</c:v>
                 </c:pt>
-                <c:pt idx="5">
+                <c:pt idx="6">
                   <c:v>15</c:v>
                 </c:pt>
               </c:numCache>
@@ -572,9 +613,9 @@
           </c:dLbls>
           <c:cat>
             <c:multiLvlStrRef>
-              <c:f>Sheet1!$A$2:$A$4</c:f>
+              <c:f>Sheet1!$A$2:$A$5</c:f>
               <c:multiLvlStrCache>
-                <c:ptCount val="3"/>
+                <c:ptCount val="4"/>
                 <c:lvl>
                   <c:pt idx="0">
                     <c:v>국내ETF</c:v>
@@ -583,6 +624,9 @@
                     <c:v>국내주식</c:v>
                   </c:pt>
                   <c:pt idx="2">
+                    <c:v>해외ETF</c:v>
+                  </c:pt>
+                  <c:pt idx="3">
                     <c:v>해외주식</c:v>
                   </c:pt>
                 </c:lvl>
@@ -591,10 +635,10 @@
           </c:cat>
           <c:val>
             <c:numRef>
-              <c:f>Sheet1!$B$2:$B$4</c:f>
+              <c:f>Sheet1!$B$2:$B$5</c:f>
               <c:numCache>
                 <c:formatCode>General</c:formatCode>
-                <c:ptCount val="3"/>
+                <c:ptCount val="4"/>
                 <c:pt idx="0">
                   <c:v>16.4</c:v>
                 </c:pt>
@@ -602,6 +646,9 @@
                   <c:v>57.3</c:v>
                 </c:pt>
                 <c:pt idx="2">
+                  <c:v>15.4</c:v>
+                </c:pt>
+                <c:pt idx="3">
                   <c:v>29.1</c:v>
                 </c:pt>
               </c:numCache>
@@ -2238,7 +2285,7 @@
                 <a:ea typeface="Spoqa Han Sans Neo" pitchFamily="34" charset="-122"/>
                 <a:cs typeface="Spoqa Han Sans Neo" pitchFamily="34" charset="-120"/>
               </a:rPr>
-              <a:t>2026-09-19 08:55</a:t>
+              <a:t>2026-09-19 10:14</a:t>
             </a:r>
             <a:endParaRPr lang="en-US" sz="1200" dirty="0"/>
           </a:p>
@@ -3756,7 +3803,7 @@
                           <a:ea typeface="Spoqa Han Sans Neo" pitchFamily="34" charset="-122"/>
                           <a:cs typeface="Spoqa Han Sans Neo" pitchFamily="34" charset="-120"/>
                         </a:rPr>
-                        <a:t>국내펀드</a:t>
+                        <a:t>해외ETF</a:t>
                       </a:r>
                       <a:endParaRPr lang="en-US" sz="1100" dirty="0">
                         <a:latin typeface="Spoqa Han Sans Neo" charset="0"/>
@@ -3821,7 +3868,7 @@
                           <a:ea typeface="Spoqa Han Sans Neo" pitchFamily="34" charset="-122"/>
                           <a:cs typeface="Spoqa Han Sans Neo" pitchFamily="34" charset="-120"/>
                         </a:rPr>
-                        <a:t>20.0%</a:t>
+                        <a:t>15.0%</a:t>
                       </a:r>
                       <a:endParaRPr lang="en-US" sz="1100" dirty="0">
                         <a:latin typeface="Spoqa Han Sans Neo" charset="0"/>
@@ -3886,7 +3933,7 @@
                           <a:ea typeface="Spoqa Han Sans Neo" pitchFamily="34" charset="-122"/>
                           <a:cs typeface="Spoqa Han Sans Neo" pitchFamily="34" charset="-120"/>
                         </a:rPr>
-                        <a:t>2,000만원</a:t>
+                        <a:t>1,500만원</a:t>
                       </a:r>
                       <a:endParaRPr lang="en-US" sz="1100" dirty="0">
                         <a:latin typeface="Spoqa Han Sans Neo" charset="0"/>
@@ -3951,7 +3998,7 @@
                           <a:ea typeface="Spoqa Han Sans Neo" pitchFamily="34" charset="-122"/>
                           <a:cs typeface="Spoqa Han Sans Neo" pitchFamily="34" charset="-120"/>
                         </a:rPr>
-                        <a:t>20.7%</a:t>
+                        <a:t>16.8%</a:t>
                       </a:r>
                       <a:endParaRPr lang="en-US" sz="1100" dirty="0">
                         <a:latin typeface="Spoqa Han Sans Neo" charset="0"/>
@@ -4010,13 +4057,13 @@
                       <a:r>
                         <a:rPr lang="en-US" sz="1100" dirty="0">
                           <a:solidFill>
-                            <a:srgbClr val="6C6C6C"/>
-                          </a:solidFill>
-                          <a:latin typeface="Spoqa Han Sans Neo" pitchFamily="34" charset="0"/>
-                          <a:ea typeface="Spoqa Han Sans Neo" pitchFamily="34" charset="-122"/>
-                          <a:cs typeface="Spoqa Han Sans Neo" pitchFamily="34" charset="-120"/>
-                        </a:rPr>
-                        <a:t>—</a:t>
+                            <a:srgbClr val="3D3D3D"/>
+                          </a:solidFill>
+                          <a:latin typeface="Spoqa Han Sans Neo" pitchFamily="34" charset="0"/>
+                          <a:ea typeface="Spoqa Han Sans Neo" pitchFamily="34" charset="-122"/>
+                          <a:cs typeface="Spoqa Han Sans Neo" pitchFamily="34" charset="-120"/>
+                        </a:rPr>
+                        <a:t>15.4%</a:t>
                       </a:r>
                       <a:endParaRPr lang="en-US" sz="1100" dirty="0">
                         <a:latin typeface="Spoqa Han Sans Neo" charset="0"/>
@@ -4083,6 +4130,333 @@
                           <a:ea typeface="Spoqa Han Sans Neo" pitchFamily="34" charset="-122"/>
                           <a:cs typeface="Spoqa Han Sans Neo" pitchFamily="34" charset="-120"/>
                         </a:rPr>
+                        <a:t>국내펀드</a:t>
+                      </a:r>
+                      <a:endParaRPr lang="en-US" sz="1100" dirty="0">
+                        <a:latin typeface="Spoqa Han Sans Neo" charset="0"/>
+                        <a:ea typeface="Spoqa Han Sans Neo" charset="0"/>
+                        <a:cs typeface="Spoqa Han Sans Neo" charset="0"/>
+                      </a:endParaRPr>
+                    </a:p>
+                  </a:txBody>
+                  <a:tcPr marL="91440" marR="91440" marT="45720" marB="45720" anchor="ctr">
+                    <a:lnL w="6350" cap="flat" cmpd="sng" algn="ctr">
+                      <a:solidFill>
+                        <a:srgbClr val="CDCECB"/>
+                      </a:solidFill>
+                      <a:prstDash val="solid"/>
+                      <a:round/>
+                      <a:headEnd type="none" w="med" len="med"/>
+                      <a:tailEnd type="none" w="med" len="med"/>
+                    </a:lnL>
+                    <a:lnR w="6350" cap="flat" cmpd="sng" algn="ctr">
+                      <a:solidFill>
+                        <a:srgbClr val="CDCECB"/>
+                      </a:solidFill>
+                      <a:prstDash val="solid"/>
+                      <a:round/>
+                      <a:headEnd type="none" w="med" len="med"/>
+                      <a:tailEnd type="none" w="med" len="med"/>
+                    </a:lnR>
+                    <a:lnT w="6350" cap="flat" cmpd="sng" algn="ctr">
+                      <a:solidFill>
+                        <a:srgbClr val="CDCECB"/>
+                      </a:solidFill>
+                      <a:prstDash val="solid"/>
+                      <a:round/>
+                      <a:headEnd type="none" w="med" len="med"/>
+                      <a:tailEnd type="none" w="med" len="med"/>
+                    </a:lnT>
+                    <a:lnB w="6350" cap="flat" cmpd="sng" algn="ctr">
+                      <a:solidFill>
+                        <a:srgbClr val="CDCECB"/>
+                      </a:solidFill>
+                      <a:prstDash val="solid"/>
+                      <a:round/>
+                      <a:headEnd type="none" w="med" len="med"/>
+                      <a:tailEnd type="none" w="med" len="med"/>
+                    </a:lnB>
+                  </a:tcPr>
+                </a:tc>
+                <a:tc>
+                  <a:txBody>
+                    <a:bodyPr/>
+                    <a:lstStyle/>
+                    <a:p>
+                      <a:pPr algn="r" indent="0" marL="0">
+                        <a:buNone/>
+                      </a:pPr>
+                      <a:r>
+                        <a:rPr lang="en-US" sz="1100" dirty="0">
+                          <a:solidFill>
+                            <a:srgbClr val="3D3D3D"/>
+                          </a:solidFill>
+                          <a:latin typeface="Spoqa Han Sans Neo" pitchFamily="34" charset="0"/>
+                          <a:ea typeface="Spoqa Han Sans Neo" pitchFamily="34" charset="-122"/>
+                          <a:cs typeface="Spoqa Han Sans Neo" pitchFamily="34" charset="-120"/>
+                        </a:rPr>
+                        <a:t>20.0%</a:t>
+                      </a:r>
+                      <a:endParaRPr lang="en-US" sz="1100" dirty="0">
+                        <a:latin typeface="Spoqa Han Sans Neo" charset="0"/>
+                        <a:ea typeface="Spoqa Han Sans Neo" charset="0"/>
+                        <a:cs typeface="Spoqa Han Sans Neo" charset="0"/>
+                      </a:endParaRPr>
+                    </a:p>
+                  </a:txBody>
+                  <a:tcPr marL="91440" marR="91440" marT="45720" marB="45720" anchor="ctr">
+                    <a:lnL w="6350" cap="flat" cmpd="sng" algn="ctr">
+                      <a:solidFill>
+                        <a:srgbClr val="CDCECB"/>
+                      </a:solidFill>
+                      <a:prstDash val="solid"/>
+                      <a:round/>
+                      <a:headEnd type="none" w="med" len="med"/>
+                      <a:tailEnd type="none" w="med" len="med"/>
+                    </a:lnL>
+                    <a:lnR w="6350" cap="flat" cmpd="sng" algn="ctr">
+                      <a:solidFill>
+                        <a:srgbClr val="CDCECB"/>
+                      </a:solidFill>
+                      <a:prstDash val="solid"/>
+                      <a:round/>
+                      <a:headEnd type="none" w="med" len="med"/>
+                      <a:tailEnd type="none" w="med" len="med"/>
+                    </a:lnR>
+                    <a:lnT w="6350" cap="flat" cmpd="sng" algn="ctr">
+                      <a:solidFill>
+                        <a:srgbClr val="CDCECB"/>
+                      </a:solidFill>
+                      <a:prstDash val="solid"/>
+                      <a:round/>
+                      <a:headEnd type="none" w="med" len="med"/>
+                      <a:tailEnd type="none" w="med" len="med"/>
+                    </a:lnT>
+                    <a:lnB w="6350" cap="flat" cmpd="sng" algn="ctr">
+                      <a:solidFill>
+                        <a:srgbClr val="CDCECB"/>
+                      </a:solidFill>
+                      <a:prstDash val="solid"/>
+                      <a:round/>
+                      <a:headEnd type="none" w="med" len="med"/>
+                      <a:tailEnd type="none" w="med" len="med"/>
+                    </a:lnB>
+                  </a:tcPr>
+                </a:tc>
+                <a:tc>
+                  <a:txBody>
+                    <a:bodyPr/>
+                    <a:lstStyle/>
+                    <a:p>
+                      <a:pPr algn="r" indent="0" marL="0">
+                        <a:buNone/>
+                      </a:pPr>
+                      <a:r>
+                        <a:rPr lang="en-US" sz="1100" dirty="0">
+                          <a:solidFill>
+                            <a:srgbClr val="3D3D3D"/>
+                          </a:solidFill>
+                          <a:latin typeface="Spoqa Han Sans Neo" pitchFamily="34" charset="0"/>
+                          <a:ea typeface="Spoqa Han Sans Neo" pitchFamily="34" charset="-122"/>
+                          <a:cs typeface="Spoqa Han Sans Neo" pitchFamily="34" charset="-120"/>
+                        </a:rPr>
+                        <a:t>2,000만원</a:t>
+                      </a:r>
+                      <a:endParaRPr lang="en-US" sz="1100" dirty="0">
+                        <a:latin typeface="Spoqa Han Sans Neo" charset="0"/>
+                        <a:ea typeface="Spoqa Han Sans Neo" charset="0"/>
+                        <a:cs typeface="Spoqa Han Sans Neo" charset="0"/>
+                      </a:endParaRPr>
+                    </a:p>
+                  </a:txBody>
+                  <a:tcPr marL="91440" marR="91440" marT="45720" marB="45720" anchor="ctr">
+                    <a:lnL w="6350" cap="flat" cmpd="sng" algn="ctr">
+                      <a:solidFill>
+                        <a:srgbClr val="CDCECB"/>
+                      </a:solidFill>
+                      <a:prstDash val="solid"/>
+                      <a:round/>
+                      <a:headEnd type="none" w="med" len="med"/>
+                      <a:tailEnd type="none" w="med" len="med"/>
+                    </a:lnL>
+                    <a:lnR w="6350" cap="flat" cmpd="sng" algn="ctr">
+                      <a:solidFill>
+                        <a:srgbClr val="CDCECB"/>
+                      </a:solidFill>
+                      <a:prstDash val="solid"/>
+                      <a:round/>
+                      <a:headEnd type="none" w="med" len="med"/>
+                      <a:tailEnd type="none" w="med" len="med"/>
+                    </a:lnR>
+                    <a:lnT w="6350" cap="flat" cmpd="sng" algn="ctr">
+                      <a:solidFill>
+                        <a:srgbClr val="CDCECB"/>
+                      </a:solidFill>
+                      <a:prstDash val="solid"/>
+                      <a:round/>
+                      <a:headEnd type="none" w="med" len="med"/>
+                      <a:tailEnd type="none" w="med" len="med"/>
+                    </a:lnT>
+                    <a:lnB w="6350" cap="flat" cmpd="sng" algn="ctr">
+                      <a:solidFill>
+                        <a:srgbClr val="CDCECB"/>
+                      </a:solidFill>
+                      <a:prstDash val="solid"/>
+                      <a:round/>
+                      <a:headEnd type="none" w="med" len="med"/>
+                      <a:tailEnd type="none" w="med" len="med"/>
+                    </a:lnB>
+                  </a:tcPr>
+                </a:tc>
+                <a:tc>
+                  <a:txBody>
+                    <a:bodyPr/>
+                    <a:lstStyle/>
+                    <a:p>
+                      <a:pPr algn="r" indent="0" marL="0">
+                        <a:buNone/>
+                      </a:pPr>
+                      <a:r>
+                        <a:rPr lang="en-US" sz="1100" dirty="0">
+                          <a:solidFill>
+                            <a:srgbClr val="3D3D3D"/>
+                          </a:solidFill>
+                          <a:latin typeface="Spoqa Han Sans Neo" pitchFamily="34" charset="0"/>
+                          <a:ea typeface="Spoqa Han Sans Neo" pitchFamily="34" charset="-122"/>
+                          <a:cs typeface="Spoqa Han Sans Neo" pitchFamily="34" charset="-120"/>
+                        </a:rPr>
+                        <a:t>20.7%</a:t>
+                      </a:r>
+                      <a:endParaRPr lang="en-US" sz="1100" dirty="0">
+                        <a:latin typeface="Spoqa Han Sans Neo" charset="0"/>
+                        <a:ea typeface="Spoqa Han Sans Neo" charset="0"/>
+                        <a:cs typeface="Spoqa Han Sans Neo" charset="0"/>
+                      </a:endParaRPr>
+                    </a:p>
+                  </a:txBody>
+                  <a:tcPr marL="91440" marR="91440" marT="45720" marB="45720" anchor="ctr">
+                    <a:lnL w="6350" cap="flat" cmpd="sng" algn="ctr">
+                      <a:solidFill>
+                        <a:srgbClr val="CDCECB"/>
+                      </a:solidFill>
+                      <a:prstDash val="solid"/>
+                      <a:round/>
+                      <a:headEnd type="none" w="med" len="med"/>
+                      <a:tailEnd type="none" w="med" len="med"/>
+                    </a:lnL>
+                    <a:lnR w="6350" cap="flat" cmpd="sng" algn="ctr">
+                      <a:solidFill>
+                        <a:srgbClr val="CDCECB"/>
+                      </a:solidFill>
+                      <a:prstDash val="solid"/>
+                      <a:round/>
+                      <a:headEnd type="none" w="med" len="med"/>
+                      <a:tailEnd type="none" w="med" len="med"/>
+                    </a:lnR>
+                    <a:lnT w="6350" cap="flat" cmpd="sng" algn="ctr">
+                      <a:solidFill>
+                        <a:srgbClr val="CDCECB"/>
+                      </a:solidFill>
+                      <a:prstDash val="solid"/>
+                      <a:round/>
+                      <a:headEnd type="none" w="med" len="med"/>
+                      <a:tailEnd type="none" w="med" len="med"/>
+                    </a:lnT>
+                    <a:lnB w="6350" cap="flat" cmpd="sng" algn="ctr">
+                      <a:solidFill>
+                        <a:srgbClr val="CDCECB"/>
+                      </a:solidFill>
+                      <a:prstDash val="solid"/>
+                      <a:round/>
+                      <a:headEnd type="none" w="med" len="med"/>
+                      <a:tailEnd type="none" w="med" len="med"/>
+                    </a:lnB>
+                  </a:tcPr>
+                </a:tc>
+                <a:tc>
+                  <a:txBody>
+                    <a:bodyPr/>
+                    <a:lstStyle/>
+                    <a:p>
+                      <a:pPr algn="r" indent="0" marL="0">
+                        <a:buNone/>
+                      </a:pPr>
+                      <a:r>
+                        <a:rPr lang="en-US" sz="1100" dirty="0">
+                          <a:solidFill>
+                            <a:srgbClr val="6C6C6C"/>
+                          </a:solidFill>
+                          <a:latin typeface="Spoqa Han Sans Neo" pitchFamily="34" charset="0"/>
+                          <a:ea typeface="Spoqa Han Sans Neo" pitchFamily="34" charset="-122"/>
+                          <a:cs typeface="Spoqa Han Sans Neo" pitchFamily="34" charset="-120"/>
+                        </a:rPr>
+                        <a:t>—</a:t>
+                      </a:r>
+                      <a:endParaRPr lang="en-US" sz="1100" dirty="0">
+                        <a:latin typeface="Spoqa Han Sans Neo" charset="0"/>
+                        <a:ea typeface="Spoqa Han Sans Neo" charset="0"/>
+                        <a:cs typeface="Spoqa Han Sans Neo" charset="0"/>
+                      </a:endParaRPr>
+                    </a:p>
+                  </a:txBody>
+                  <a:tcPr marL="91440" marR="91440" marT="45720" marB="45720" anchor="ctr">
+                    <a:lnL w="6350" cap="flat" cmpd="sng" algn="ctr">
+                      <a:solidFill>
+                        <a:srgbClr val="CDCECB"/>
+                      </a:solidFill>
+                      <a:prstDash val="solid"/>
+                      <a:round/>
+                      <a:headEnd type="none" w="med" len="med"/>
+                      <a:tailEnd type="none" w="med" len="med"/>
+                    </a:lnL>
+                    <a:lnR w="6350" cap="flat" cmpd="sng" algn="ctr">
+                      <a:solidFill>
+                        <a:srgbClr val="CDCECB"/>
+                      </a:solidFill>
+                      <a:prstDash val="solid"/>
+                      <a:round/>
+                      <a:headEnd type="none" w="med" len="med"/>
+                      <a:tailEnd type="none" w="med" len="med"/>
+                    </a:lnR>
+                    <a:lnT w="6350" cap="flat" cmpd="sng" algn="ctr">
+                      <a:solidFill>
+                        <a:srgbClr val="CDCECB"/>
+                      </a:solidFill>
+                      <a:prstDash val="solid"/>
+                      <a:round/>
+                      <a:headEnd type="none" w="med" len="med"/>
+                      <a:tailEnd type="none" w="med" len="med"/>
+                    </a:lnT>
+                    <a:lnB w="6350" cap="flat" cmpd="sng" algn="ctr">
+                      <a:solidFill>
+                        <a:srgbClr val="CDCECB"/>
+                      </a:solidFill>
+                      <a:prstDash val="solid"/>
+                      <a:round/>
+                      <a:headEnd type="none" w="med" len="med"/>
+                      <a:tailEnd type="none" w="med" len="med"/>
+                    </a:lnB>
+                  </a:tcPr>
+                </a:tc>
+              </a:tr>
+              <a:tr h="310896">
+                <a:tc>
+                  <a:txBody>
+                    <a:bodyPr/>
+                    <a:lstStyle/>
+                    <a:p>
+                      <a:pPr indent="0" marL="0">
+                        <a:buNone/>
+                      </a:pPr>
+                      <a:r>
+                        <a:rPr lang="en-US" sz="1100" dirty="0">
+                          <a:solidFill>
+                            <a:srgbClr val="3D3D3D"/>
+                          </a:solidFill>
+                          <a:latin typeface="Spoqa Han Sans Neo" pitchFamily="34" charset="0"/>
+                          <a:ea typeface="Spoqa Han Sans Neo" pitchFamily="34" charset="-122"/>
+                          <a:cs typeface="Spoqa Han Sans Neo" pitchFamily="34" charset="-120"/>
+                        </a:rPr>
                         <a:t>해외펀드</a:t>
                       </a:r>
                       <a:endParaRPr lang="en-US" sz="1100" dirty="0">
@@ -4148,7 +4522,7 @@
                           <a:ea typeface="Spoqa Han Sans Neo" pitchFamily="34" charset="-122"/>
                           <a:cs typeface="Spoqa Han Sans Neo" pitchFamily="34" charset="-120"/>
                         </a:rPr>
-                        <a:t>35.0%</a:t>
+                        <a:t>20.0%</a:t>
                       </a:r>
                       <a:endParaRPr lang="en-US" sz="1100" dirty="0">
                         <a:latin typeface="Spoqa Han Sans Neo" charset="0"/>
@@ -4213,7 +4587,7 @@
                           <a:ea typeface="Spoqa Han Sans Neo" pitchFamily="34" charset="-122"/>
                           <a:cs typeface="Spoqa Han Sans Neo" pitchFamily="34" charset="-120"/>
                         </a:rPr>
-                        <a:t>3,500만원</a:t>
+                        <a:t>2,000만원</a:t>
                       </a:r>
                       <a:endParaRPr lang="en-US" sz="1100" dirty="0">
                         <a:latin typeface="Spoqa Han Sans Neo" charset="0"/>
@@ -4941,7 +5315,7 @@
                           <a:ea typeface="Spoqa Han Sans Neo" pitchFamily="34" charset="-122"/>
                           <a:cs typeface="Spoqa Han Sans Neo" pitchFamily="34" charset="-120"/>
                         </a:rPr>
-                        <a:t>14.3%</a:t>
+                        <a:t>15.0%</a:t>
                       </a:r>
                       <a:endParaRPr lang="en-US" sz="1100" dirty="0">
                         <a:latin typeface="Spoqa Han Sans Neo" charset="0"/>
@@ -5009,7 +5383,7 @@
                           <a:ea typeface="Spoqa Han Sans Neo" pitchFamily="34" charset="-122"/>
                           <a:cs typeface="Spoqa Han Sans Neo" pitchFamily="34" charset="-120"/>
                         </a:rPr>
-                        <a:t>8.2%</a:t>
+                        <a:t>10.6%</a:t>
                       </a:r>
                       <a:endParaRPr lang="en-US" sz="1100" dirty="0">
                         <a:latin typeface="Spoqa Han Sans Neo" charset="0"/>
@@ -5098,7 +5472,7 @@
                 <a:ea typeface="Spoqa Han Sans Neo" pitchFamily="34" charset="-122"/>
                 <a:cs typeface="Spoqa Han Sans Neo" pitchFamily="34" charset="-120"/>
               </a:rPr>
-              <a:t>5년 초과 — 성향 그대로 담습니다  ·  해외ETF 는 지금 자료가 없어 제안에서 뺐습니다 — 그 몫 15%p 를 해외펀드 로 옮겼습니다.</a:t>
+              <a:t>5년 초과 — 성향 그대로 담습니다</a:t>
             </a:r>
             <a:endParaRPr lang="en-US" sz="900" dirty="0"/>
           </a:p>
@@ -5327,7 +5701,7 @@
                 <a:ea typeface="Spoqa Han Sans Neo" pitchFamily="34" charset="-122"/>
                 <a:cs typeface="Spoqa Han Sans Neo" pitchFamily="34" charset="-120"/>
               </a:rPr>
-              <a:t>14.3%</a:t>
+              <a:t>15.0%</a:t>
             </a:r>
             <a:endParaRPr lang="en-US" sz="3400" dirty="0"/>
           </a:p>
@@ -5469,7 +5843,7 @@
                 <a:ea typeface="Spoqa Han Sans Neo" pitchFamily="34" charset="-122"/>
                 <a:cs typeface="Spoqa Han Sans Neo" pitchFamily="34" charset="-120"/>
               </a:rPr>
-              <a:t>8.2%</a:t>
+              <a:t>10.6%</a:t>
             </a:r>
             <a:endParaRPr lang="en-US" sz="3400" dirty="0"/>
           </a:p>
@@ -5508,7 +5882,7 @@
                 <a:ea typeface="Spoqa Han Sans Neo" pitchFamily="34" charset="-122"/>
                 <a:cs typeface="Spoqa Han Sans Neo" pitchFamily="34" charset="-120"/>
               </a:rPr>
-              <a:t>분산효과 제외 — 실제보다 높게 나옵니다.  덮은 비중 30%</a:t>
+              <a:t>분산효과 제외 — 실제보다 높게 나옵니다.  덮은 비중 45%</a:t>
             </a:r>
             <a:endParaRPr lang="en-US" sz="950" dirty="0"/>
           </a:p>
@@ -5611,7 +5985,7 @@
                 <a:ea typeface="Spoqa Han Sans Neo" pitchFamily="34" charset="-122"/>
                 <a:cs typeface="Spoqa Han Sans Neo" pitchFamily="34" charset="-120"/>
               </a:rPr>
-              <a:t>-11.0%</a:t>
+              <a:t>-13.5%</a:t>
             </a:r>
             <a:endParaRPr lang="en-US" sz="3400" dirty="0"/>
           </a:p>
@@ -5650,7 +6024,7 @@
                 <a:ea typeface="Spoqa Han Sans Neo" pitchFamily="34" charset="-122"/>
                 <a:cs typeface="Spoqa Han Sans Neo" pitchFamily="34" charset="-120"/>
               </a:rPr>
-              <a:t>덮은 비중 30%</a:t>
+              <a:t>덮은 비중 45%</a:t>
             </a:r>
             <a:endParaRPr lang="en-US" sz="950" dirty="0"/>
           </a:p>
@@ -5856,7 +6230,7 @@
                 <a:ea typeface="Spoqa Han Sans Neo" pitchFamily="34" charset="-122"/>
                 <a:cs typeface="Spoqa Han Sans Neo" pitchFamily="34" charset="-120"/>
               </a:rPr>
-              <a:t>변동성은 이 배분의 30%만 덮습니다. 나머지 70%(주로 펀드)는 기준가 이력이 7 거래일뿐이라 셈하지 않았습니다. 위 숫자를 포트폴리오 전체의 값으로 읽지 마십시오.</a:t>
+              <a:t>변동성은 이 배분의 45%만 덮습니다. 나머지 55%(주로 펀드)는 기준가 이력이 7 거래일뿐이라 셈하지 않았습니다. 위 숫자를 포트폴리오 전체의 값으로 읽지 마십시오.</a:t>
             </a:r>
             <a:endParaRPr lang="en-US" sz="1200" dirty="0"/>
           </a:p>
@@ -14830,7 +15204,7 @@
                 <a:ea typeface="Spoqa Han Sans Neo" pitchFamily="34" charset="-122"/>
                 <a:cs typeface="Spoqa Han Sans Neo" pitchFamily="34" charset="-120"/>
               </a:rPr>
-              <a:t>국내펀드 — 20.0% · 2,000만원</a:t>
+              <a:t>해외ETF — 15.0% · 1,500만원</a:t>
             </a:r>
             <a:endParaRPr lang="en-US" sz="1500" dirty="0"/>
           </a:p>
@@ -15363,7 +15737,7 @@
                           <a:ea typeface="Spoqa Han Sans Neo" pitchFamily="34" charset="-122"/>
                           <a:cs typeface="Spoqa Han Sans Neo" pitchFamily="34" charset="-120"/>
                         </a:rPr>
-                        <a:t>삼성MMF법인 1</a:t>
+                        <a:t>SPDR S&amp;P 500</a:t>
                       </a:r>
                       <a:endParaRPr lang="en-US" sz="1100" dirty="0">
                         <a:latin typeface="Spoqa Han Sans Neo" charset="0"/>
@@ -15428,7 +15802,7 @@
                           <a:ea typeface="Spoqa Han Sans Neo" pitchFamily="34" charset="-122"/>
                           <a:cs typeface="Spoqa Han Sans Neo" pitchFamily="34" charset="-120"/>
                         </a:rPr>
-                        <a:t>MMF</a:t>
+                        <a:t>equity</a:t>
                       </a:r>
                       <a:endParaRPr lang="en-US" sz="1100" dirty="0">
                         <a:latin typeface="Spoqa Han Sans Neo" charset="0"/>
@@ -15493,7 +15867,7 @@
                           <a:ea typeface="Spoqa Han Sans Neo" pitchFamily="34" charset="-122"/>
                           <a:cs typeface="Spoqa Han Sans Neo" pitchFamily="34" charset="-120"/>
                         </a:rPr>
-                        <a:t>삼성자산운용</a:t>
+                        <a:t>—</a:t>
                       </a:r>
                       <a:endParaRPr lang="en-US" sz="1100" dirty="0">
                         <a:latin typeface="Spoqa Han Sans Neo" charset="0"/>
@@ -15558,7 +15932,7 @@
                           <a:ea typeface="Spoqa Han Sans Neo" pitchFamily="34" charset="-122"/>
                           <a:cs typeface="Spoqa Han Sans Neo" pitchFamily="34" charset="-120"/>
                         </a:rPr>
-                        <a:t>11조원</a:t>
+                        <a:t>—</a:t>
                       </a:r>
                       <a:endParaRPr lang="en-US" sz="1100" dirty="0">
                         <a:latin typeface="Spoqa Han Sans Neo" charset="0"/>
@@ -15623,7 +15997,7 @@
                           <a:ea typeface="Spoqa Han Sans Neo" pitchFamily="34" charset="-122"/>
                           <a:cs typeface="Spoqa Han Sans Neo" pitchFamily="34" charset="-120"/>
                         </a:rPr>
-                        <a:t>3.0%</a:t>
+                        <a:t>17.1%</a:t>
                       </a:r>
                       <a:endParaRPr lang="en-US" sz="1100" dirty="0">
                         <a:latin typeface="Spoqa Han Sans Neo" charset="0"/>
@@ -15682,78 +16056,78 @@
                       <a:r>
                         <a:rPr lang="en-US" sz="1100" dirty="0">
                           <a:solidFill>
-                            <a:srgbClr val="6C6C6C"/>
+                            <a:srgbClr val="3D3D3D"/>
+                          </a:solidFill>
+                          <a:latin typeface="Spoqa Han Sans Neo" pitchFamily="34" charset="0"/>
+                          <a:ea typeface="Spoqa Han Sans Neo" pitchFamily="34" charset="-122"/>
+                          <a:cs typeface="Spoqa Han Sans Neo" pitchFamily="34" charset="-120"/>
+                        </a:rPr>
+                        <a:t>15.3%</a:t>
+                      </a:r>
+                      <a:endParaRPr lang="en-US" sz="1100" dirty="0">
+                        <a:latin typeface="Spoqa Han Sans Neo" charset="0"/>
+                        <a:ea typeface="Spoqa Han Sans Neo" charset="0"/>
+                        <a:cs typeface="Spoqa Han Sans Neo" charset="0"/>
+                      </a:endParaRPr>
+                    </a:p>
+                  </a:txBody>
+                  <a:tcPr marL="91440" marR="91440" marT="45720" marB="45720" anchor="ctr">
+                    <a:lnL w="6350" cap="flat" cmpd="sng" algn="ctr">
+                      <a:solidFill>
+                        <a:srgbClr val="CDCECB"/>
+                      </a:solidFill>
+                      <a:prstDash val="solid"/>
+                      <a:round/>
+                      <a:headEnd type="none" w="med" len="med"/>
+                      <a:tailEnd type="none" w="med" len="med"/>
+                    </a:lnL>
+                    <a:lnR w="6350" cap="flat" cmpd="sng" algn="ctr">
+                      <a:solidFill>
+                        <a:srgbClr val="CDCECB"/>
+                      </a:solidFill>
+                      <a:prstDash val="solid"/>
+                      <a:round/>
+                      <a:headEnd type="none" w="med" len="med"/>
+                      <a:tailEnd type="none" w="med" len="med"/>
+                    </a:lnR>
+                    <a:lnT w="6350" cap="flat" cmpd="sng" algn="ctr">
+                      <a:solidFill>
+                        <a:srgbClr val="CDCECB"/>
+                      </a:solidFill>
+                      <a:prstDash val="solid"/>
+                      <a:round/>
+                      <a:headEnd type="none" w="med" len="med"/>
+                      <a:tailEnd type="none" w="med" len="med"/>
+                    </a:lnT>
+                    <a:lnB w="6350" cap="flat" cmpd="sng" algn="ctr">
+                      <a:solidFill>
+                        <a:srgbClr val="CDCECB"/>
+                      </a:solidFill>
+                      <a:prstDash val="solid"/>
+                      <a:round/>
+                      <a:headEnd type="none" w="med" len="med"/>
+                      <a:tailEnd type="none" w="med" len="med"/>
+                    </a:lnB>
+                  </a:tcPr>
+                </a:tc>
+                <a:tc>
+                  <a:txBody>
+                    <a:bodyPr/>
+                    <a:lstStyle/>
+                    <a:p>
+                      <a:pPr algn="r" indent="0" marL="0">
+                        <a:buNone/>
+                      </a:pPr>
+                      <a:r>
+                        <a:rPr lang="en-US" sz="1100" dirty="0">
+                          <a:solidFill>
+                            <a:srgbClr val="3D3D3D"/>
                           </a:solidFill>
                           <a:latin typeface="Spoqa Han Sans Neo" pitchFamily="34" charset="0"/>
                           <a:ea typeface="Spoqa Han Sans Neo" pitchFamily="34" charset="-122"/>
                           <a:cs typeface="Spoqa Han Sans Neo" pitchFamily="34" charset="-120"/>
                         </a:rPr>
                         <a:t>—</a:t>
-                      </a:r>
-                      <a:endParaRPr lang="en-US" sz="1100" dirty="0">
-                        <a:latin typeface="Spoqa Han Sans Neo" charset="0"/>
-                        <a:ea typeface="Spoqa Han Sans Neo" charset="0"/>
-                        <a:cs typeface="Spoqa Han Sans Neo" charset="0"/>
-                      </a:endParaRPr>
-                    </a:p>
-                  </a:txBody>
-                  <a:tcPr marL="91440" marR="91440" marT="45720" marB="45720" anchor="ctr">
-                    <a:lnL w="6350" cap="flat" cmpd="sng" algn="ctr">
-                      <a:solidFill>
-                        <a:srgbClr val="CDCECB"/>
-                      </a:solidFill>
-                      <a:prstDash val="solid"/>
-                      <a:round/>
-                      <a:headEnd type="none" w="med" len="med"/>
-                      <a:tailEnd type="none" w="med" len="med"/>
-                    </a:lnL>
-                    <a:lnR w="6350" cap="flat" cmpd="sng" algn="ctr">
-                      <a:solidFill>
-                        <a:srgbClr val="CDCECB"/>
-                      </a:solidFill>
-                      <a:prstDash val="solid"/>
-                      <a:round/>
-                      <a:headEnd type="none" w="med" len="med"/>
-                      <a:tailEnd type="none" w="med" len="med"/>
-                    </a:lnR>
-                    <a:lnT w="6350" cap="flat" cmpd="sng" algn="ctr">
-                      <a:solidFill>
-                        <a:srgbClr val="CDCECB"/>
-                      </a:solidFill>
-                      <a:prstDash val="solid"/>
-                      <a:round/>
-                      <a:headEnd type="none" w="med" len="med"/>
-                      <a:tailEnd type="none" w="med" len="med"/>
-                    </a:lnT>
-                    <a:lnB w="6350" cap="flat" cmpd="sng" algn="ctr">
-                      <a:solidFill>
-                        <a:srgbClr val="CDCECB"/>
-                      </a:solidFill>
-                      <a:prstDash val="solid"/>
-                      <a:round/>
-                      <a:headEnd type="none" w="med" len="med"/>
-                      <a:tailEnd type="none" w="med" len="med"/>
-                    </a:lnB>
-                  </a:tcPr>
-                </a:tc>
-                <a:tc>
-                  <a:txBody>
-                    <a:bodyPr/>
-                    <a:lstStyle/>
-                    <a:p>
-                      <a:pPr algn="r" indent="0" marL="0">
-                        <a:buNone/>
-                      </a:pPr>
-                      <a:r>
-                        <a:rPr lang="en-US" sz="1100" dirty="0">
-                          <a:solidFill>
-                            <a:srgbClr val="3D3D3D"/>
-                          </a:solidFill>
-                          <a:latin typeface="Spoqa Han Sans Neo" pitchFamily="34" charset="0"/>
-                          <a:ea typeface="Spoqa Han Sans Neo" pitchFamily="34" charset="-122"/>
-                          <a:cs typeface="Spoqa Han Sans Neo" pitchFamily="34" charset="-120"/>
-                        </a:rPr>
-                        <a:t>0.05~0.09%</a:t>
                       </a:r>
                       <a:endParaRPr lang="en-US" sz="1100" dirty="0">
                         <a:latin typeface="Spoqa Han Sans Neo" charset="0"/>
@@ -15820,7 +16194,7 @@
                           <a:ea typeface="Spoqa Han Sans Neo" pitchFamily="34" charset="-122"/>
                           <a:cs typeface="Spoqa Han Sans Neo" pitchFamily="34" charset="-120"/>
                         </a:rPr>
-                        <a:t>우리큰만족법인MMF 1(국공채)</a:t>
+                        <a:t>Invesco QQQ (나스닥100)</a:t>
                       </a:r>
                       <a:endParaRPr lang="en-US" sz="1100" dirty="0">
                         <a:latin typeface="Spoqa Han Sans Neo" charset="0"/>
@@ -15885,7 +16259,7 @@
                           <a:ea typeface="Spoqa Han Sans Neo" pitchFamily="34" charset="-122"/>
                           <a:cs typeface="Spoqa Han Sans Neo" pitchFamily="34" charset="-120"/>
                         </a:rPr>
-                        <a:t>MMF</a:t>
+                        <a:t>equity</a:t>
                       </a:r>
                       <a:endParaRPr lang="en-US" sz="1100" dirty="0">
                         <a:latin typeface="Spoqa Han Sans Neo" charset="0"/>
@@ -15950,7 +16324,7 @@
                           <a:ea typeface="Spoqa Han Sans Neo" pitchFamily="34" charset="-122"/>
                           <a:cs typeface="Spoqa Han Sans Neo" pitchFamily="34" charset="-120"/>
                         </a:rPr>
-                        <a:t>우리자산운용</a:t>
+                        <a:t>—</a:t>
                       </a:r>
                       <a:endParaRPr lang="en-US" sz="1100" dirty="0">
                         <a:latin typeface="Spoqa Han Sans Neo" charset="0"/>
@@ -16015,7 +16389,7 @@
                           <a:ea typeface="Spoqa Han Sans Neo" pitchFamily="34" charset="-122"/>
                           <a:cs typeface="Spoqa Han Sans Neo" pitchFamily="34" charset="-120"/>
                         </a:rPr>
-                        <a:t>9조원</a:t>
+                        <a:t>—</a:t>
                       </a:r>
                       <a:endParaRPr lang="en-US" sz="1100" dirty="0">
                         <a:latin typeface="Spoqa Han Sans Neo" charset="0"/>
@@ -16080,7 +16454,7 @@
                           <a:ea typeface="Spoqa Han Sans Neo" pitchFamily="34" charset="-122"/>
                           <a:cs typeface="Spoqa Han Sans Neo" pitchFamily="34" charset="-120"/>
                         </a:rPr>
-                        <a:t>2.8%</a:t>
+                        <a:t>22.9%</a:t>
                       </a:r>
                       <a:endParaRPr lang="en-US" sz="1100" dirty="0">
                         <a:latin typeface="Spoqa Han Sans Neo" charset="0"/>
@@ -16139,78 +16513,78 @@
                       <a:r>
                         <a:rPr lang="en-US" sz="1100" dirty="0">
                           <a:solidFill>
-                            <a:srgbClr val="6C6C6C"/>
+                            <a:srgbClr val="3D3D3D"/>
+                          </a:solidFill>
+                          <a:latin typeface="Spoqa Han Sans Neo" pitchFamily="34" charset="0"/>
+                          <a:ea typeface="Spoqa Han Sans Neo" pitchFamily="34" charset="-122"/>
+                          <a:cs typeface="Spoqa Han Sans Neo" pitchFamily="34" charset="-120"/>
+                        </a:rPr>
+                        <a:t>20.4%</a:t>
+                      </a:r>
+                      <a:endParaRPr lang="en-US" sz="1100" dirty="0">
+                        <a:latin typeface="Spoqa Han Sans Neo" charset="0"/>
+                        <a:ea typeface="Spoqa Han Sans Neo" charset="0"/>
+                        <a:cs typeface="Spoqa Han Sans Neo" charset="0"/>
+                      </a:endParaRPr>
+                    </a:p>
+                  </a:txBody>
+                  <a:tcPr marL="91440" marR="91440" marT="45720" marB="45720" anchor="ctr">
+                    <a:lnL w="6350" cap="flat" cmpd="sng" algn="ctr">
+                      <a:solidFill>
+                        <a:srgbClr val="CDCECB"/>
+                      </a:solidFill>
+                      <a:prstDash val="solid"/>
+                      <a:round/>
+                      <a:headEnd type="none" w="med" len="med"/>
+                      <a:tailEnd type="none" w="med" len="med"/>
+                    </a:lnL>
+                    <a:lnR w="6350" cap="flat" cmpd="sng" algn="ctr">
+                      <a:solidFill>
+                        <a:srgbClr val="CDCECB"/>
+                      </a:solidFill>
+                      <a:prstDash val="solid"/>
+                      <a:round/>
+                      <a:headEnd type="none" w="med" len="med"/>
+                      <a:tailEnd type="none" w="med" len="med"/>
+                    </a:lnR>
+                    <a:lnT w="6350" cap="flat" cmpd="sng" algn="ctr">
+                      <a:solidFill>
+                        <a:srgbClr val="CDCECB"/>
+                      </a:solidFill>
+                      <a:prstDash val="solid"/>
+                      <a:round/>
+                      <a:headEnd type="none" w="med" len="med"/>
+                      <a:tailEnd type="none" w="med" len="med"/>
+                    </a:lnT>
+                    <a:lnB w="6350" cap="flat" cmpd="sng" algn="ctr">
+                      <a:solidFill>
+                        <a:srgbClr val="CDCECB"/>
+                      </a:solidFill>
+                      <a:prstDash val="solid"/>
+                      <a:round/>
+                      <a:headEnd type="none" w="med" len="med"/>
+                      <a:tailEnd type="none" w="med" len="med"/>
+                    </a:lnB>
+                  </a:tcPr>
+                </a:tc>
+                <a:tc>
+                  <a:txBody>
+                    <a:bodyPr/>
+                    <a:lstStyle/>
+                    <a:p>
+                      <a:pPr algn="r" indent="0" marL="0">
+                        <a:buNone/>
+                      </a:pPr>
+                      <a:r>
+                        <a:rPr lang="en-US" sz="1100" dirty="0">
+                          <a:solidFill>
+                            <a:srgbClr val="3D3D3D"/>
                           </a:solidFill>
                           <a:latin typeface="Spoqa Han Sans Neo" pitchFamily="34" charset="0"/>
                           <a:ea typeface="Spoqa Han Sans Neo" pitchFamily="34" charset="-122"/>
                           <a:cs typeface="Spoqa Han Sans Neo" pitchFamily="34" charset="-120"/>
                         </a:rPr>
                         <a:t>—</a:t>
-                      </a:r>
-                      <a:endParaRPr lang="en-US" sz="1100" dirty="0">
-                        <a:latin typeface="Spoqa Han Sans Neo" charset="0"/>
-                        <a:ea typeface="Spoqa Han Sans Neo" charset="0"/>
-                        <a:cs typeface="Spoqa Han Sans Neo" charset="0"/>
-                      </a:endParaRPr>
-                    </a:p>
-                  </a:txBody>
-                  <a:tcPr marL="91440" marR="91440" marT="45720" marB="45720" anchor="ctr">
-                    <a:lnL w="6350" cap="flat" cmpd="sng" algn="ctr">
-                      <a:solidFill>
-                        <a:srgbClr val="CDCECB"/>
-                      </a:solidFill>
-                      <a:prstDash val="solid"/>
-                      <a:round/>
-                      <a:headEnd type="none" w="med" len="med"/>
-                      <a:tailEnd type="none" w="med" len="med"/>
-                    </a:lnL>
-                    <a:lnR w="6350" cap="flat" cmpd="sng" algn="ctr">
-                      <a:solidFill>
-                        <a:srgbClr val="CDCECB"/>
-                      </a:solidFill>
-                      <a:prstDash val="solid"/>
-                      <a:round/>
-                      <a:headEnd type="none" w="med" len="med"/>
-                      <a:tailEnd type="none" w="med" len="med"/>
-                    </a:lnR>
-                    <a:lnT w="6350" cap="flat" cmpd="sng" algn="ctr">
-                      <a:solidFill>
-                        <a:srgbClr val="CDCECB"/>
-                      </a:solidFill>
-                      <a:prstDash val="solid"/>
-                      <a:round/>
-                      <a:headEnd type="none" w="med" len="med"/>
-                      <a:tailEnd type="none" w="med" len="med"/>
-                    </a:lnT>
-                    <a:lnB w="6350" cap="flat" cmpd="sng" algn="ctr">
-                      <a:solidFill>
-                        <a:srgbClr val="CDCECB"/>
-                      </a:solidFill>
-                      <a:prstDash val="solid"/>
-                      <a:round/>
-                      <a:headEnd type="none" w="med" len="med"/>
-                      <a:tailEnd type="none" w="med" len="med"/>
-                    </a:lnB>
-                  </a:tcPr>
-                </a:tc>
-                <a:tc>
-                  <a:txBody>
-                    <a:bodyPr/>
-                    <a:lstStyle/>
-                    <a:p>
-                      <a:pPr algn="r" indent="0" marL="0">
-                        <a:buNone/>
-                      </a:pPr>
-                      <a:r>
-                        <a:rPr lang="en-US" sz="1100" dirty="0">
-                          <a:solidFill>
-                            <a:srgbClr val="3D3D3D"/>
-                          </a:solidFill>
-                          <a:latin typeface="Spoqa Han Sans Neo" pitchFamily="34" charset="0"/>
-                          <a:ea typeface="Spoqa Han Sans Neo" pitchFamily="34" charset="-122"/>
-                          <a:cs typeface="Spoqa Han Sans Neo" pitchFamily="34" charset="-120"/>
-                        </a:rPr>
-                        <a:t>0.08~0.10%</a:t>
                       </a:r>
                       <a:endParaRPr lang="en-US" sz="1100" dirty="0">
                         <a:latin typeface="Spoqa Han Sans Neo" charset="0"/>
@@ -16277,7 +16651,7 @@
                           <a:ea typeface="Spoqa Han Sans Neo" pitchFamily="34" charset="-122"/>
                           <a:cs typeface="Spoqa Han Sans Neo" pitchFamily="34" charset="-120"/>
                         </a:rPr>
-                        <a:t>IBK그랑프리국공채MMF법인투자신탁 1[국공채]</a:t>
+                        <a:t>Vanguard 미국 전체시장</a:t>
                       </a:r>
                       <a:endParaRPr lang="en-US" sz="1100" dirty="0">
                         <a:latin typeface="Spoqa Han Sans Neo" charset="0"/>
@@ -16342,7 +16716,7 @@
                           <a:ea typeface="Spoqa Han Sans Neo" pitchFamily="34" charset="-122"/>
                           <a:cs typeface="Spoqa Han Sans Neo" pitchFamily="34" charset="-120"/>
                         </a:rPr>
-                        <a:t>MMF</a:t>
+                        <a:t>equity</a:t>
                       </a:r>
                       <a:endParaRPr lang="en-US" sz="1100" dirty="0">
                         <a:latin typeface="Spoqa Han Sans Neo" charset="0"/>
@@ -16407,7 +16781,7 @@
                           <a:ea typeface="Spoqa Han Sans Neo" pitchFamily="34" charset="-122"/>
                           <a:cs typeface="Spoqa Han Sans Neo" pitchFamily="34" charset="-120"/>
                         </a:rPr>
-                        <a:t>아이비케이자산운용</a:t>
+                        <a:t>—</a:t>
                       </a:r>
                       <a:endParaRPr lang="en-US" sz="1100" dirty="0">
                         <a:latin typeface="Spoqa Han Sans Neo" charset="0"/>
@@ -16472,7 +16846,7 @@
                           <a:ea typeface="Spoqa Han Sans Neo" pitchFamily="34" charset="-122"/>
                           <a:cs typeface="Spoqa Han Sans Neo" pitchFamily="34" charset="-120"/>
                         </a:rPr>
-                        <a:t>8조원</a:t>
+                        <a:t>—</a:t>
                       </a:r>
                       <a:endParaRPr lang="en-US" sz="1100" dirty="0">
                         <a:latin typeface="Spoqa Han Sans Neo" charset="0"/>
@@ -16537,7 +16911,7 @@
                           <a:ea typeface="Spoqa Han Sans Neo" pitchFamily="34" charset="-122"/>
                           <a:cs typeface="Spoqa Han Sans Neo" pitchFamily="34" charset="-120"/>
                         </a:rPr>
-                        <a:t>2.8%</a:t>
+                        <a:t>16.8%</a:t>
                       </a:r>
                       <a:endParaRPr lang="en-US" sz="1100" dirty="0">
                         <a:latin typeface="Spoqa Han Sans Neo" charset="0"/>
@@ -16596,78 +16970,78 @@
                       <a:r>
                         <a:rPr lang="en-US" sz="1100" dirty="0">
                           <a:solidFill>
-                            <a:srgbClr val="6C6C6C"/>
+                            <a:srgbClr val="3D3D3D"/>
+                          </a:solidFill>
+                          <a:latin typeface="Spoqa Han Sans Neo" pitchFamily="34" charset="0"/>
+                          <a:ea typeface="Spoqa Han Sans Neo" pitchFamily="34" charset="-122"/>
+                          <a:cs typeface="Spoqa Han Sans Neo" pitchFamily="34" charset="-120"/>
+                        </a:rPr>
+                        <a:t>15.4%</a:t>
+                      </a:r>
+                      <a:endParaRPr lang="en-US" sz="1100" dirty="0">
+                        <a:latin typeface="Spoqa Han Sans Neo" charset="0"/>
+                        <a:ea typeface="Spoqa Han Sans Neo" charset="0"/>
+                        <a:cs typeface="Spoqa Han Sans Neo" charset="0"/>
+                      </a:endParaRPr>
+                    </a:p>
+                  </a:txBody>
+                  <a:tcPr marL="91440" marR="91440" marT="45720" marB="45720" anchor="ctr">
+                    <a:lnL w="6350" cap="flat" cmpd="sng" algn="ctr">
+                      <a:solidFill>
+                        <a:srgbClr val="CDCECB"/>
+                      </a:solidFill>
+                      <a:prstDash val="solid"/>
+                      <a:round/>
+                      <a:headEnd type="none" w="med" len="med"/>
+                      <a:tailEnd type="none" w="med" len="med"/>
+                    </a:lnL>
+                    <a:lnR w="6350" cap="flat" cmpd="sng" algn="ctr">
+                      <a:solidFill>
+                        <a:srgbClr val="CDCECB"/>
+                      </a:solidFill>
+                      <a:prstDash val="solid"/>
+                      <a:round/>
+                      <a:headEnd type="none" w="med" len="med"/>
+                      <a:tailEnd type="none" w="med" len="med"/>
+                    </a:lnR>
+                    <a:lnT w="6350" cap="flat" cmpd="sng" algn="ctr">
+                      <a:solidFill>
+                        <a:srgbClr val="CDCECB"/>
+                      </a:solidFill>
+                      <a:prstDash val="solid"/>
+                      <a:round/>
+                      <a:headEnd type="none" w="med" len="med"/>
+                      <a:tailEnd type="none" w="med" len="med"/>
+                    </a:lnT>
+                    <a:lnB w="6350" cap="flat" cmpd="sng" algn="ctr">
+                      <a:solidFill>
+                        <a:srgbClr val="CDCECB"/>
+                      </a:solidFill>
+                      <a:prstDash val="solid"/>
+                      <a:round/>
+                      <a:headEnd type="none" w="med" len="med"/>
+                      <a:tailEnd type="none" w="med" len="med"/>
+                    </a:lnB>
+                  </a:tcPr>
+                </a:tc>
+                <a:tc>
+                  <a:txBody>
+                    <a:bodyPr/>
+                    <a:lstStyle/>
+                    <a:p>
+                      <a:pPr algn="r" indent="0" marL="0">
+                        <a:buNone/>
+                      </a:pPr>
+                      <a:r>
+                        <a:rPr lang="en-US" sz="1100" dirty="0">
+                          <a:solidFill>
+                            <a:srgbClr val="3D3D3D"/>
                           </a:solidFill>
                           <a:latin typeface="Spoqa Han Sans Neo" pitchFamily="34" charset="0"/>
                           <a:ea typeface="Spoqa Han Sans Neo" pitchFamily="34" charset="-122"/>
                           <a:cs typeface="Spoqa Han Sans Neo" pitchFamily="34" charset="-120"/>
                         </a:rPr>
                         <a:t>—</a:t>
-                      </a:r>
-                      <a:endParaRPr lang="en-US" sz="1100" dirty="0">
-                        <a:latin typeface="Spoqa Han Sans Neo" charset="0"/>
-                        <a:ea typeface="Spoqa Han Sans Neo" charset="0"/>
-                        <a:cs typeface="Spoqa Han Sans Neo" charset="0"/>
-                      </a:endParaRPr>
-                    </a:p>
-                  </a:txBody>
-                  <a:tcPr marL="91440" marR="91440" marT="45720" marB="45720" anchor="ctr">
-                    <a:lnL w="6350" cap="flat" cmpd="sng" algn="ctr">
-                      <a:solidFill>
-                        <a:srgbClr val="CDCECB"/>
-                      </a:solidFill>
-                      <a:prstDash val="solid"/>
-                      <a:round/>
-                      <a:headEnd type="none" w="med" len="med"/>
-                      <a:tailEnd type="none" w="med" len="med"/>
-                    </a:lnL>
-                    <a:lnR w="6350" cap="flat" cmpd="sng" algn="ctr">
-                      <a:solidFill>
-                        <a:srgbClr val="CDCECB"/>
-                      </a:solidFill>
-                      <a:prstDash val="solid"/>
-                      <a:round/>
-                      <a:headEnd type="none" w="med" len="med"/>
-                      <a:tailEnd type="none" w="med" len="med"/>
-                    </a:lnR>
-                    <a:lnT w="6350" cap="flat" cmpd="sng" algn="ctr">
-                      <a:solidFill>
-                        <a:srgbClr val="CDCECB"/>
-                      </a:solidFill>
-                      <a:prstDash val="solid"/>
-                      <a:round/>
-                      <a:headEnd type="none" w="med" len="med"/>
-                      <a:tailEnd type="none" w="med" len="med"/>
-                    </a:lnT>
-                    <a:lnB w="6350" cap="flat" cmpd="sng" algn="ctr">
-                      <a:solidFill>
-                        <a:srgbClr val="CDCECB"/>
-                      </a:solidFill>
-                      <a:prstDash val="solid"/>
-                      <a:round/>
-                      <a:headEnd type="none" w="med" len="med"/>
-                      <a:tailEnd type="none" w="med" len="med"/>
-                    </a:lnB>
-                  </a:tcPr>
-                </a:tc>
-                <a:tc>
-                  <a:txBody>
-                    <a:bodyPr/>
-                    <a:lstStyle/>
-                    <a:p>
-                      <a:pPr algn="r" indent="0" marL="0">
-                        <a:buNone/>
-                      </a:pPr>
-                      <a:r>
-                        <a:rPr lang="en-US" sz="1100" dirty="0">
-                          <a:solidFill>
-                            <a:srgbClr val="3D3D3D"/>
-                          </a:solidFill>
-                          <a:latin typeface="Spoqa Han Sans Neo" pitchFamily="34" charset="0"/>
-                          <a:ea typeface="Spoqa Han Sans Neo" pitchFamily="34" charset="-122"/>
-                          <a:cs typeface="Spoqa Han Sans Neo" pitchFamily="34" charset="-120"/>
-                        </a:rPr>
-                        <a:t>0.09~0.17%</a:t>
                       </a:r>
                       <a:endParaRPr lang="en-US" sz="1100" dirty="0">
                         <a:latin typeface="Spoqa Han Sans Neo" charset="0"/>
@@ -16734,7 +17108,7 @@
                           <a:ea typeface="Spoqa Han Sans Neo" pitchFamily="34" charset="-122"/>
                           <a:cs typeface="Spoqa Han Sans Neo" pitchFamily="34" charset="-120"/>
                         </a:rPr>
-                        <a:t>KB법인용MMF I-1(운용)</a:t>
+                        <a:t>iShares 러셀2000 (미국 중소형)</a:t>
                       </a:r>
                       <a:endParaRPr lang="en-US" sz="1100" dirty="0">
                         <a:latin typeface="Spoqa Han Sans Neo" charset="0"/>
@@ -16799,7 +17173,7 @@
                           <a:ea typeface="Spoqa Han Sans Neo" pitchFamily="34" charset="-122"/>
                           <a:cs typeface="Spoqa Han Sans Neo" pitchFamily="34" charset="-120"/>
                         </a:rPr>
-                        <a:t>MMF</a:t>
+                        <a:t>equity</a:t>
                       </a:r>
                       <a:endParaRPr lang="en-US" sz="1100" dirty="0">
                         <a:latin typeface="Spoqa Han Sans Neo" charset="0"/>
@@ -16864,7 +17238,7 @@
                           <a:ea typeface="Spoqa Han Sans Neo" pitchFamily="34" charset="-122"/>
                           <a:cs typeface="Spoqa Han Sans Neo" pitchFamily="34" charset="-120"/>
                         </a:rPr>
-                        <a:t>케이비자산운용</a:t>
+                        <a:t>—</a:t>
                       </a:r>
                       <a:endParaRPr lang="en-US" sz="1100" dirty="0">
                         <a:latin typeface="Spoqa Han Sans Neo" charset="0"/>
@@ -16929,7 +17303,7 @@
                           <a:ea typeface="Spoqa Han Sans Neo" pitchFamily="34" charset="-122"/>
                           <a:cs typeface="Spoqa Han Sans Neo" pitchFamily="34" charset="-120"/>
                         </a:rPr>
-                        <a:t>8조원</a:t>
+                        <a:t>—</a:t>
                       </a:r>
                       <a:endParaRPr lang="en-US" sz="1100" dirty="0">
                         <a:latin typeface="Spoqa Han Sans Neo" charset="0"/>
@@ -16994,7 +17368,7 @@
                           <a:ea typeface="Spoqa Han Sans Neo" pitchFamily="34" charset="-122"/>
                           <a:cs typeface="Spoqa Han Sans Neo" pitchFamily="34" charset="-120"/>
                         </a:rPr>
-                        <a:t>3.0%</a:t>
+                        <a:t>20.1%</a:t>
                       </a:r>
                       <a:endParaRPr lang="en-US" sz="1100" dirty="0">
                         <a:latin typeface="Spoqa Han Sans Neo" charset="0"/>
@@ -17053,78 +17427,78 @@
                       <a:r>
                         <a:rPr lang="en-US" sz="1100" dirty="0">
                           <a:solidFill>
-                            <a:srgbClr val="6C6C6C"/>
+                            <a:srgbClr val="3D3D3D"/>
+                          </a:solidFill>
+                          <a:latin typeface="Spoqa Han Sans Neo" pitchFamily="34" charset="0"/>
+                          <a:ea typeface="Spoqa Han Sans Neo" pitchFamily="34" charset="-122"/>
+                          <a:cs typeface="Spoqa Han Sans Neo" pitchFamily="34" charset="-120"/>
+                        </a:rPr>
+                        <a:t>21.1%</a:t>
+                      </a:r>
+                      <a:endParaRPr lang="en-US" sz="1100" dirty="0">
+                        <a:latin typeface="Spoqa Han Sans Neo" charset="0"/>
+                        <a:ea typeface="Spoqa Han Sans Neo" charset="0"/>
+                        <a:cs typeface="Spoqa Han Sans Neo" charset="0"/>
+                      </a:endParaRPr>
+                    </a:p>
+                  </a:txBody>
+                  <a:tcPr marL="91440" marR="91440" marT="45720" marB="45720" anchor="ctr">
+                    <a:lnL w="6350" cap="flat" cmpd="sng" algn="ctr">
+                      <a:solidFill>
+                        <a:srgbClr val="CDCECB"/>
+                      </a:solidFill>
+                      <a:prstDash val="solid"/>
+                      <a:round/>
+                      <a:headEnd type="none" w="med" len="med"/>
+                      <a:tailEnd type="none" w="med" len="med"/>
+                    </a:lnL>
+                    <a:lnR w="6350" cap="flat" cmpd="sng" algn="ctr">
+                      <a:solidFill>
+                        <a:srgbClr val="CDCECB"/>
+                      </a:solidFill>
+                      <a:prstDash val="solid"/>
+                      <a:round/>
+                      <a:headEnd type="none" w="med" len="med"/>
+                      <a:tailEnd type="none" w="med" len="med"/>
+                    </a:lnR>
+                    <a:lnT w="6350" cap="flat" cmpd="sng" algn="ctr">
+                      <a:solidFill>
+                        <a:srgbClr val="CDCECB"/>
+                      </a:solidFill>
+                      <a:prstDash val="solid"/>
+                      <a:round/>
+                      <a:headEnd type="none" w="med" len="med"/>
+                      <a:tailEnd type="none" w="med" len="med"/>
+                    </a:lnT>
+                    <a:lnB w="6350" cap="flat" cmpd="sng" algn="ctr">
+                      <a:solidFill>
+                        <a:srgbClr val="CDCECB"/>
+                      </a:solidFill>
+                      <a:prstDash val="solid"/>
+                      <a:round/>
+                      <a:headEnd type="none" w="med" len="med"/>
+                      <a:tailEnd type="none" w="med" len="med"/>
+                    </a:lnB>
+                  </a:tcPr>
+                </a:tc>
+                <a:tc>
+                  <a:txBody>
+                    <a:bodyPr/>
+                    <a:lstStyle/>
+                    <a:p>
+                      <a:pPr algn="r" indent="0" marL="0">
+                        <a:buNone/>
+                      </a:pPr>
+                      <a:r>
+                        <a:rPr lang="en-US" sz="1100" dirty="0">
+                          <a:solidFill>
+                            <a:srgbClr val="3D3D3D"/>
                           </a:solidFill>
                           <a:latin typeface="Spoqa Han Sans Neo" pitchFamily="34" charset="0"/>
                           <a:ea typeface="Spoqa Han Sans Neo" pitchFamily="34" charset="-122"/>
                           <a:cs typeface="Spoqa Han Sans Neo" pitchFamily="34" charset="-120"/>
                         </a:rPr>
                         <a:t>—</a:t>
-                      </a:r>
-                      <a:endParaRPr lang="en-US" sz="1100" dirty="0">
-                        <a:latin typeface="Spoqa Han Sans Neo" charset="0"/>
-                        <a:ea typeface="Spoqa Han Sans Neo" charset="0"/>
-                        <a:cs typeface="Spoqa Han Sans Neo" charset="0"/>
-                      </a:endParaRPr>
-                    </a:p>
-                  </a:txBody>
-                  <a:tcPr marL="91440" marR="91440" marT="45720" marB="45720" anchor="ctr">
-                    <a:lnL w="6350" cap="flat" cmpd="sng" algn="ctr">
-                      <a:solidFill>
-                        <a:srgbClr val="CDCECB"/>
-                      </a:solidFill>
-                      <a:prstDash val="solid"/>
-                      <a:round/>
-                      <a:headEnd type="none" w="med" len="med"/>
-                      <a:tailEnd type="none" w="med" len="med"/>
-                    </a:lnL>
-                    <a:lnR w="6350" cap="flat" cmpd="sng" algn="ctr">
-                      <a:solidFill>
-                        <a:srgbClr val="CDCECB"/>
-                      </a:solidFill>
-                      <a:prstDash val="solid"/>
-                      <a:round/>
-                      <a:headEnd type="none" w="med" len="med"/>
-                      <a:tailEnd type="none" w="med" len="med"/>
-                    </a:lnR>
-                    <a:lnT w="6350" cap="flat" cmpd="sng" algn="ctr">
-                      <a:solidFill>
-                        <a:srgbClr val="CDCECB"/>
-                      </a:solidFill>
-                      <a:prstDash val="solid"/>
-                      <a:round/>
-                      <a:headEnd type="none" w="med" len="med"/>
-                      <a:tailEnd type="none" w="med" len="med"/>
-                    </a:lnT>
-                    <a:lnB w="6350" cap="flat" cmpd="sng" algn="ctr">
-                      <a:solidFill>
-                        <a:srgbClr val="CDCECB"/>
-                      </a:solidFill>
-                      <a:prstDash val="solid"/>
-                      <a:round/>
-                      <a:headEnd type="none" w="med" len="med"/>
-                      <a:tailEnd type="none" w="med" len="med"/>
-                    </a:lnB>
-                  </a:tcPr>
-                </a:tc>
-                <a:tc>
-                  <a:txBody>
-                    <a:bodyPr/>
-                    <a:lstStyle/>
-                    <a:p>
-                      <a:pPr algn="r" indent="0" marL="0">
-                        <a:buNone/>
-                      </a:pPr>
-                      <a:r>
-                        <a:rPr lang="en-US" sz="1100" dirty="0">
-                          <a:solidFill>
-                            <a:srgbClr val="3D3D3D"/>
-                          </a:solidFill>
-                          <a:latin typeface="Spoqa Han Sans Neo" pitchFamily="34" charset="0"/>
-                          <a:ea typeface="Spoqa Han Sans Neo" pitchFamily="34" charset="-122"/>
-                          <a:cs typeface="Spoqa Han Sans Neo" pitchFamily="34" charset="-120"/>
-                        </a:rPr>
-                        <a:t>0.06~0.09%</a:t>
                       </a:r>
                       <a:endParaRPr lang="en-US" sz="1100" dirty="0">
                         <a:latin typeface="Spoqa Han Sans Neo" charset="0"/>
@@ -17191,7 +17565,7 @@
                           <a:ea typeface="Spoqa Han Sans Neo" pitchFamily="34" charset="-122"/>
                           <a:cs typeface="Spoqa Han Sans Neo" pitchFamily="34" charset="-120"/>
                         </a:rPr>
-                        <a:t>우리큰만족신종MMF3</a:t>
+                        <a:t>Vanguard 선진국(미국 제외)</a:t>
                       </a:r>
                       <a:endParaRPr lang="en-US" sz="1100" dirty="0">
                         <a:latin typeface="Spoqa Han Sans Neo" charset="0"/>
@@ -17256,7 +17630,7 @@
                           <a:ea typeface="Spoqa Han Sans Neo" pitchFamily="34" charset="-122"/>
                           <a:cs typeface="Spoqa Han Sans Neo" pitchFamily="34" charset="-120"/>
                         </a:rPr>
-                        <a:t>MMF</a:t>
+                        <a:t>equity</a:t>
                       </a:r>
                       <a:endParaRPr lang="en-US" sz="1100" dirty="0">
                         <a:latin typeface="Spoqa Han Sans Neo" charset="0"/>
@@ -17321,7 +17695,7 @@
                           <a:ea typeface="Spoqa Han Sans Neo" pitchFamily="34" charset="-122"/>
                           <a:cs typeface="Spoqa Han Sans Neo" pitchFamily="34" charset="-120"/>
                         </a:rPr>
-                        <a:t>우리자산운용</a:t>
+                        <a:t>—</a:t>
                       </a:r>
                       <a:endParaRPr lang="en-US" sz="1100" dirty="0">
                         <a:latin typeface="Spoqa Han Sans Neo" charset="0"/>
@@ -17386,7 +17760,7 @@
                           <a:ea typeface="Spoqa Han Sans Neo" pitchFamily="34" charset="-122"/>
                           <a:cs typeface="Spoqa Han Sans Neo" pitchFamily="34" charset="-120"/>
                         </a:rPr>
-                        <a:t>7조원</a:t>
+                        <a:t>—</a:t>
                       </a:r>
                       <a:endParaRPr lang="en-US" sz="1100" dirty="0">
                         <a:latin typeface="Spoqa Han Sans Neo" charset="0"/>
@@ -17451,7 +17825,7 @@
                           <a:ea typeface="Spoqa Han Sans Neo" pitchFamily="34" charset="-122"/>
                           <a:cs typeface="Spoqa Han Sans Neo" pitchFamily="34" charset="-120"/>
                         </a:rPr>
-                        <a:t>3.1%</a:t>
+                        <a:t>22.7%</a:t>
                       </a:r>
                       <a:endParaRPr lang="en-US" sz="1100" dirty="0">
                         <a:latin typeface="Spoqa Han Sans Neo" charset="0"/>
@@ -17510,78 +17884,78 @@
                       <a:r>
                         <a:rPr lang="en-US" sz="1100" dirty="0">
                           <a:solidFill>
-                            <a:srgbClr val="6C6C6C"/>
+                            <a:srgbClr val="3D3D3D"/>
+                          </a:solidFill>
+                          <a:latin typeface="Spoqa Han Sans Neo" pitchFamily="34" charset="0"/>
+                          <a:ea typeface="Spoqa Han Sans Neo" pitchFamily="34" charset="-122"/>
+                          <a:cs typeface="Spoqa Han Sans Neo" pitchFamily="34" charset="-120"/>
+                        </a:rPr>
+                        <a:t>15.8%</a:t>
+                      </a:r>
+                      <a:endParaRPr lang="en-US" sz="1100" dirty="0">
+                        <a:latin typeface="Spoqa Han Sans Neo" charset="0"/>
+                        <a:ea typeface="Spoqa Han Sans Neo" charset="0"/>
+                        <a:cs typeface="Spoqa Han Sans Neo" charset="0"/>
+                      </a:endParaRPr>
+                    </a:p>
+                  </a:txBody>
+                  <a:tcPr marL="91440" marR="91440" marT="45720" marB="45720" anchor="ctr">
+                    <a:lnL w="6350" cap="flat" cmpd="sng" algn="ctr">
+                      <a:solidFill>
+                        <a:srgbClr val="CDCECB"/>
+                      </a:solidFill>
+                      <a:prstDash val="solid"/>
+                      <a:round/>
+                      <a:headEnd type="none" w="med" len="med"/>
+                      <a:tailEnd type="none" w="med" len="med"/>
+                    </a:lnL>
+                    <a:lnR w="6350" cap="flat" cmpd="sng" algn="ctr">
+                      <a:solidFill>
+                        <a:srgbClr val="CDCECB"/>
+                      </a:solidFill>
+                      <a:prstDash val="solid"/>
+                      <a:round/>
+                      <a:headEnd type="none" w="med" len="med"/>
+                      <a:tailEnd type="none" w="med" len="med"/>
+                    </a:lnR>
+                    <a:lnT w="6350" cap="flat" cmpd="sng" algn="ctr">
+                      <a:solidFill>
+                        <a:srgbClr val="CDCECB"/>
+                      </a:solidFill>
+                      <a:prstDash val="solid"/>
+                      <a:round/>
+                      <a:headEnd type="none" w="med" len="med"/>
+                      <a:tailEnd type="none" w="med" len="med"/>
+                    </a:lnT>
+                    <a:lnB w="6350" cap="flat" cmpd="sng" algn="ctr">
+                      <a:solidFill>
+                        <a:srgbClr val="CDCECB"/>
+                      </a:solidFill>
+                      <a:prstDash val="solid"/>
+                      <a:round/>
+                      <a:headEnd type="none" w="med" len="med"/>
+                      <a:tailEnd type="none" w="med" len="med"/>
+                    </a:lnB>
+                  </a:tcPr>
+                </a:tc>
+                <a:tc>
+                  <a:txBody>
+                    <a:bodyPr/>
+                    <a:lstStyle/>
+                    <a:p>
+                      <a:pPr algn="r" indent="0" marL="0">
+                        <a:buNone/>
+                      </a:pPr>
+                      <a:r>
+                        <a:rPr lang="en-US" sz="1100" dirty="0">
+                          <a:solidFill>
+                            <a:srgbClr val="3D3D3D"/>
                           </a:solidFill>
                           <a:latin typeface="Spoqa Han Sans Neo" pitchFamily="34" charset="0"/>
                           <a:ea typeface="Spoqa Han Sans Neo" pitchFamily="34" charset="-122"/>
                           <a:cs typeface="Spoqa Han Sans Neo" pitchFamily="34" charset="-120"/>
                         </a:rPr>
                         <a:t>—</a:t>
-                      </a:r>
-                      <a:endParaRPr lang="en-US" sz="1100" dirty="0">
-                        <a:latin typeface="Spoqa Han Sans Neo" charset="0"/>
-                        <a:ea typeface="Spoqa Han Sans Neo" charset="0"/>
-                        <a:cs typeface="Spoqa Han Sans Neo" charset="0"/>
-                      </a:endParaRPr>
-                    </a:p>
-                  </a:txBody>
-                  <a:tcPr marL="91440" marR="91440" marT="45720" marB="45720" anchor="ctr">
-                    <a:lnL w="6350" cap="flat" cmpd="sng" algn="ctr">
-                      <a:solidFill>
-                        <a:srgbClr val="CDCECB"/>
-                      </a:solidFill>
-                      <a:prstDash val="solid"/>
-                      <a:round/>
-                      <a:headEnd type="none" w="med" len="med"/>
-                      <a:tailEnd type="none" w="med" len="med"/>
-                    </a:lnL>
-                    <a:lnR w="6350" cap="flat" cmpd="sng" algn="ctr">
-                      <a:solidFill>
-                        <a:srgbClr val="CDCECB"/>
-                      </a:solidFill>
-                      <a:prstDash val="solid"/>
-                      <a:round/>
-                      <a:headEnd type="none" w="med" len="med"/>
-                      <a:tailEnd type="none" w="med" len="med"/>
-                    </a:lnR>
-                    <a:lnT w="6350" cap="flat" cmpd="sng" algn="ctr">
-                      <a:solidFill>
-                        <a:srgbClr val="CDCECB"/>
-                      </a:solidFill>
-                      <a:prstDash val="solid"/>
-                      <a:round/>
-                      <a:headEnd type="none" w="med" len="med"/>
-                      <a:tailEnd type="none" w="med" len="med"/>
-                    </a:lnT>
-                    <a:lnB w="6350" cap="flat" cmpd="sng" algn="ctr">
-                      <a:solidFill>
-                        <a:srgbClr val="CDCECB"/>
-                      </a:solidFill>
-                      <a:prstDash val="solid"/>
-                      <a:round/>
-                      <a:headEnd type="none" w="med" len="med"/>
-                      <a:tailEnd type="none" w="med" len="med"/>
-                    </a:lnB>
-                  </a:tcPr>
-                </a:tc>
-                <a:tc>
-                  <a:txBody>
-                    <a:bodyPr/>
-                    <a:lstStyle/>
-                    <a:p>
-                      <a:pPr algn="r" indent="0" marL="0">
-                        <a:buNone/>
-                      </a:pPr>
-                      <a:r>
-                        <a:rPr lang="en-US" sz="1100" dirty="0">
-                          <a:solidFill>
-                            <a:srgbClr val="3D3D3D"/>
-                          </a:solidFill>
-                          <a:latin typeface="Spoqa Han Sans Neo" pitchFamily="34" charset="0"/>
-                          <a:ea typeface="Spoqa Han Sans Neo" pitchFamily="34" charset="-122"/>
-                          <a:cs typeface="Spoqa Han Sans Neo" pitchFamily="34" charset="-120"/>
-                        </a:rPr>
-                        <a:t>0.09~0.11%</a:t>
                       </a:r>
                       <a:endParaRPr lang="en-US" sz="1100" dirty="0">
                         <a:latin typeface="Spoqa Han Sans Neo" charset="0"/>
@@ -17832,7 +18206,7 @@
                 <a:ea typeface="Spoqa Han Sans Neo" pitchFamily="34" charset="-122"/>
                 <a:cs typeface="Spoqa Han Sans Neo" pitchFamily="34" charset="-120"/>
               </a:rPr>
-              <a:t>해외펀드 — 35.0% · 3,500만원</a:t>
+              <a:t>국내펀드 — 20.0% · 2,000만원</a:t>
             </a:r>
             <a:endParaRPr lang="en-US" sz="1500" dirty="0"/>
           </a:p>
@@ -18365,7 +18739,7 @@
                           <a:ea typeface="Spoqa Han Sans Neo" pitchFamily="34" charset="-122"/>
                           <a:cs typeface="Spoqa Han Sans Neo" pitchFamily="34" charset="-120"/>
                         </a:rPr>
-                        <a:t>피델리티글로벌테크놀로지증권자투자신탁(주식-재간접형)</a:t>
+                        <a:t>삼성MMF법인 1</a:t>
                       </a:r>
                       <a:endParaRPr lang="en-US" sz="1100" dirty="0">
                         <a:latin typeface="Spoqa Han Sans Neo" charset="0"/>
@@ -18430,7 +18804,7 @@
                           <a:ea typeface="Spoqa Han Sans Neo" pitchFamily="34" charset="-122"/>
                           <a:cs typeface="Spoqa Han Sans Neo" pitchFamily="34" charset="-120"/>
                         </a:rPr>
-                        <a:t>해외주식형</a:t>
+                        <a:t>MMF</a:t>
                       </a:r>
                       <a:endParaRPr lang="en-US" sz="1100" dirty="0">
                         <a:latin typeface="Spoqa Han Sans Neo" charset="0"/>
@@ -18495,7 +18869,7 @@
                           <a:ea typeface="Spoqa Han Sans Neo" pitchFamily="34" charset="-122"/>
                           <a:cs typeface="Spoqa Han Sans Neo" pitchFamily="34" charset="-120"/>
                         </a:rPr>
-                        <a:t>피델리티자산운용</a:t>
+                        <a:t>삼성자산운용</a:t>
                       </a:r>
                       <a:endParaRPr lang="en-US" sz="1100" dirty="0">
                         <a:latin typeface="Spoqa Han Sans Neo" charset="0"/>
@@ -18560,7 +18934,7 @@
                           <a:ea typeface="Spoqa Han Sans Neo" pitchFamily="34" charset="-122"/>
                           <a:cs typeface="Spoqa Han Sans Neo" pitchFamily="34" charset="-120"/>
                         </a:rPr>
-                        <a:t>9,218억원</a:t>
+                        <a:t>11조원</a:t>
                       </a:r>
                       <a:endParaRPr lang="en-US" sz="1100" dirty="0">
                         <a:latin typeface="Spoqa Han Sans Neo" charset="0"/>
@@ -18625,7 +18999,7 @@
                           <a:ea typeface="Spoqa Han Sans Neo" pitchFamily="34" charset="-122"/>
                           <a:cs typeface="Spoqa Han Sans Neo" pitchFamily="34" charset="-120"/>
                         </a:rPr>
-                        <a:t>20.4%</a:t>
+                        <a:t>3.0%</a:t>
                       </a:r>
                       <a:endParaRPr lang="en-US" sz="1100" dirty="0">
                         <a:latin typeface="Spoqa Han Sans Neo" charset="0"/>
@@ -18755,7 +19129,7 @@
                           <a:ea typeface="Spoqa Han Sans Neo" pitchFamily="34" charset="-122"/>
                           <a:cs typeface="Spoqa Han Sans Neo" pitchFamily="34" charset="-120"/>
                         </a:rPr>
-                        <a:t>0.16~1.36%</a:t>
+                        <a:t>0.05~0.09%</a:t>
                       </a:r>
                       <a:endParaRPr lang="en-US" sz="1100" dirty="0">
                         <a:latin typeface="Spoqa Han Sans Neo" charset="0"/>
@@ -18822,7 +19196,7 @@
                           <a:ea typeface="Spoqa Han Sans Neo" pitchFamily="34" charset="-122"/>
                           <a:cs typeface="Spoqa Han Sans Neo" pitchFamily="34" charset="-120"/>
                         </a:rPr>
-                        <a:t>피델리티월지급식아시아하이일드증권자투자신탁[채권-재간접…</a:t>
+                        <a:t>우리큰만족법인MMF 1(국공채)</a:t>
                       </a:r>
                       <a:endParaRPr lang="en-US" sz="1100" dirty="0">
                         <a:latin typeface="Spoqa Han Sans Neo" charset="0"/>
@@ -18887,7 +19261,7 @@
                           <a:ea typeface="Spoqa Han Sans Neo" pitchFamily="34" charset="-122"/>
                           <a:cs typeface="Spoqa Han Sans Neo" pitchFamily="34" charset="-120"/>
                         </a:rPr>
-                        <a:t>해외채권형</a:t>
+                        <a:t>MMF</a:t>
                       </a:r>
                       <a:endParaRPr lang="en-US" sz="1100" dirty="0">
                         <a:latin typeface="Spoqa Han Sans Neo" charset="0"/>
@@ -18952,7 +19326,7 @@
                           <a:ea typeface="Spoqa Han Sans Neo" pitchFamily="34" charset="-122"/>
                           <a:cs typeface="Spoqa Han Sans Neo" pitchFamily="34" charset="-120"/>
                         </a:rPr>
-                        <a:t>피델리티자산운용</a:t>
+                        <a:t>우리자산운용</a:t>
                       </a:r>
                       <a:endParaRPr lang="en-US" sz="1100" dirty="0">
                         <a:latin typeface="Spoqa Han Sans Neo" charset="0"/>
@@ -19017,7 +19391,7 @@
                           <a:ea typeface="Spoqa Han Sans Neo" pitchFamily="34" charset="-122"/>
                           <a:cs typeface="Spoqa Han Sans Neo" pitchFamily="34" charset="-120"/>
                         </a:rPr>
-                        <a:t>7,365억원</a:t>
+                        <a:t>9조원</a:t>
                       </a:r>
                       <a:endParaRPr lang="en-US" sz="1100" dirty="0">
                         <a:latin typeface="Spoqa Han Sans Neo" charset="0"/>
@@ -19082,7 +19456,7 @@
                           <a:ea typeface="Spoqa Han Sans Neo" pitchFamily="34" charset="-122"/>
                           <a:cs typeface="Spoqa Han Sans Neo" pitchFamily="34" charset="-120"/>
                         </a:rPr>
-                        <a:t>5.2%</a:t>
+                        <a:t>2.8%</a:t>
                       </a:r>
                       <a:endParaRPr lang="en-US" sz="1100" dirty="0">
                         <a:latin typeface="Spoqa Han Sans Neo" charset="0"/>
@@ -19212,7 +19586,7 @@
                           <a:ea typeface="Spoqa Han Sans Neo" pitchFamily="34" charset="-122"/>
                           <a:cs typeface="Spoqa Han Sans Neo" pitchFamily="34" charset="-120"/>
                         </a:rPr>
-                        <a:t>0.37~1.17%</a:t>
+                        <a:t>0.08~0.10%</a:t>
                       </a:r>
                       <a:endParaRPr lang="en-US" sz="1100" dirty="0">
                         <a:latin typeface="Spoqa Han Sans Neo" charset="0"/>
@@ -19279,7 +19653,7 @@
                           <a:ea typeface="Spoqa Han Sans Neo" pitchFamily="34" charset="-122"/>
                           <a:cs typeface="Spoqa Han Sans Neo" pitchFamily="34" charset="-120"/>
                         </a:rPr>
-                        <a:t>피델리티글로벌배당인컴증권자투자신탁(주식-재간접형)</a:t>
+                        <a:t>IBK그랑프리국공채MMF법인투자신탁 1[국공채]</a:t>
                       </a:r>
                       <a:endParaRPr lang="en-US" sz="1100" dirty="0">
                         <a:latin typeface="Spoqa Han Sans Neo" charset="0"/>
@@ -19344,7 +19718,7 @@
                           <a:ea typeface="Spoqa Han Sans Neo" pitchFamily="34" charset="-122"/>
                           <a:cs typeface="Spoqa Han Sans Neo" pitchFamily="34" charset="-120"/>
                         </a:rPr>
-                        <a:t>해외주식형</a:t>
+                        <a:t>MMF</a:t>
                       </a:r>
                       <a:endParaRPr lang="en-US" sz="1100" dirty="0">
                         <a:latin typeface="Spoqa Han Sans Neo" charset="0"/>
@@ -19409,7 +19783,7 @@
                           <a:ea typeface="Spoqa Han Sans Neo" pitchFamily="34" charset="-122"/>
                           <a:cs typeface="Spoqa Han Sans Neo" pitchFamily="34" charset="-120"/>
                         </a:rPr>
-                        <a:t>피델리티자산운용</a:t>
+                        <a:t>아이비케이자산운용</a:t>
                       </a:r>
                       <a:endParaRPr lang="en-US" sz="1100" dirty="0">
                         <a:latin typeface="Spoqa Han Sans Neo" charset="0"/>
@@ -19474,7 +19848,7 @@
                           <a:ea typeface="Spoqa Han Sans Neo" pitchFamily="34" charset="-122"/>
                           <a:cs typeface="Spoqa Han Sans Neo" pitchFamily="34" charset="-120"/>
                         </a:rPr>
-                        <a:t>5,716억원</a:t>
+                        <a:t>8조원</a:t>
                       </a:r>
                       <a:endParaRPr lang="en-US" sz="1100" dirty="0">
                         <a:latin typeface="Spoqa Han Sans Neo" charset="0"/>
@@ -19539,7 +19913,7 @@
                           <a:ea typeface="Spoqa Han Sans Neo" pitchFamily="34" charset="-122"/>
                           <a:cs typeface="Spoqa Han Sans Neo" pitchFamily="34" charset="-120"/>
                         </a:rPr>
-                        <a:t>10.8%</a:t>
+                        <a:t>2.8%</a:t>
                       </a:r>
                       <a:endParaRPr lang="en-US" sz="1100" dirty="0">
                         <a:latin typeface="Spoqa Han Sans Neo" charset="0"/>
@@ -19669,7 +20043,7 @@
                           <a:ea typeface="Spoqa Han Sans Neo" pitchFamily="34" charset="-122"/>
                           <a:cs typeface="Spoqa Han Sans Neo" pitchFamily="34" charset="-120"/>
                         </a:rPr>
-                        <a:t>0.16~1.36%</a:t>
+                        <a:t>0.09~0.17%</a:t>
                       </a:r>
                       <a:endParaRPr lang="en-US" sz="1100" dirty="0">
                         <a:latin typeface="Spoqa Han Sans Neo" charset="0"/>
@@ -19736,7 +20110,7 @@
                           <a:ea typeface="Spoqa Han Sans Neo" pitchFamily="34" charset="-122"/>
                           <a:cs typeface="Spoqa Han Sans Neo" pitchFamily="34" charset="-120"/>
                         </a:rPr>
-                        <a:t>AB월지급글로벌고수익증권투자신탁[채권-재간접형]</a:t>
+                        <a:t>KB법인용MMF I-1(운용)</a:t>
                       </a:r>
                       <a:endParaRPr lang="en-US" sz="1100" dirty="0">
                         <a:latin typeface="Spoqa Han Sans Neo" charset="0"/>
@@ -19801,7 +20175,7 @@
                           <a:ea typeface="Spoqa Han Sans Neo" pitchFamily="34" charset="-122"/>
                           <a:cs typeface="Spoqa Han Sans Neo" pitchFamily="34" charset="-120"/>
                         </a:rPr>
-                        <a:t>해외채권형</a:t>
+                        <a:t>MMF</a:t>
                       </a:r>
                       <a:endParaRPr lang="en-US" sz="1100" dirty="0">
                         <a:latin typeface="Spoqa Han Sans Neo" charset="0"/>
@@ -19866,7 +20240,7 @@
                           <a:ea typeface="Spoqa Han Sans Neo" pitchFamily="34" charset="-122"/>
                           <a:cs typeface="Spoqa Han Sans Neo" pitchFamily="34" charset="-120"/>
                         </a:rPr>
-                        <a:t>얼라이언스번스틴자산운용</a:t>
+                        <a:t>케이비자산운용</a:t>
                       </a:r>
                       <a:endParaRPr lang="en-US" sz="1100" dirty="0">
                         <a:latin typeface="Spoqa Han Sans Neo" charset="0"/>
@@ -19931,7 +20305,7 @@
                           <a:ea typeface="Spoqa Han Sans Neo" pitchFamily="34" charset="-122"/>
                           <a:cs typeface="Spoqa Han Sans Neo" pitchFamily="34" charset="-120"/>
                         </a:rPr>
-                        <a:t>5,462억원</a:t>
+                        <a:t>8조원</a:t>
                       </a:r>
                       <a:endParaRPr lang="en-US" sz="1100" dirty="0">
                         <a:latin typeface="Spoqa Han Sans Neo" charset="0"/>
@@ -19996,7 +20370,7 @@
                           <a:ea typeface="Spoqa Han Sans Neo" pitchFamily="34" charset="-122"/>
                           <a:cs typeface="Spoqa Han Sans Neo" pitchFamily="34" charset="-120"/>
                         </a:rPr>
-                        <a:t>1.8%</a:t>
+                        <a:t>3.0%</a:t>
                       </a:r>
                       <a:endParaRPr lang="en-US" sz="1100" dirty="0">
                         <a:latin typeface="Spoqa Han Sans Neo" charset="0"/>
@@ -20126,7 +20500,7 @@
                           <a:ea typeface="Spoqa Han Sans Neo" pitchFamily="34" charset="-122"/>
                           <a:cs typeface="Spoqa Han Sans Neo" pitchFamily="34" charset="-120"/>
                         </a:rPr>
-                        <a:t>0.17~0.71%</a:t>
+                        <a:t>0.06~0.09%</a:t>
                       </a:r>
                       <a:endParaRPr lang="en-US" sz="1100" dirty="0">
                         <a:latin typeface="Spoqa Han Sans Neo" charset="0"/>
@@ -20193,7 +20567,7 @@
                           <a:ea typeface="Spoqa Han Sans Neo" pitchFamily="34" charset="-122"/>
                           <a:cs typeface="Spoqa Han Sans Neo" pitchFamily="34" charset="-120"/>
                         </a:rPr>
-                        <a:t>한국투자글로벌전기차&amp;자율주행증권투자신탁(주식)(모)</a:t>
+                        <a:t>우리큰만족신종MMF3</a:t>
                       </a:r>
                       <a:endParaRPr lang="en-US" sz="1100" dirty="0">
                         <a:latin typeface="Spoqa Han Sans Neo" charset="0"/>
@@ -20258,7 +20632,7 @@
                           <a:ea typeface="Spoqa Han Sans Neo" pitchFamily="34" charset="-122"/>
                           <a:cs typeface="Spoqa Han Sans Neo" pitchFamily="34" charset="-120"/>
                         </a:rPr>
-                        <a:t>해외주식형</a:t>
+                        <a:t>MMF</a:t>
                       </a:r>
                       <a:endParaRPr lang="en-US" sz="1100" dirty="0">
                         <a:latin typeface="Spoqa Han Sans Neo" charset="0"/>
@@ -20323,7 +20697,7 @@
                           <a:ea typeface="Spoqa Han Sans Neo" pitchFamily="34" charset="-122"/>
                           <a:cs typeface="Spoqa Han Sans Neo" pitchFamily="34" charset="-120"/>
                         </a:rPr>
-                        <a:t>한국투자신탁운용</a:t>
+                        <a:t>우리자산운용</a:t>
                       </a:r>
                       <a:endParaRPr lang="en-US" sz="1100" dirty="0">
                         <a:latin typeface="Spoqa Han Sans Neo" charset="0"/>
@@ -20388,7 +20762,7 @@
                           <a:ea typeface="Spoqa Han Sans Neo" pitchFamily="34" charset="-122"/>
                           <a:cs typeface="Spoqa Han Sans Neo" pitchFamily="34" charset="-120"/>
                         </a:rPr>
-                        <a:t>4,762억원</a:t>
+                        <a:t>7조원</a:t>
                       </a:r>
                       <a:endParaRPr lang="en-US" sz="1100" dirty="0">
                         <a:latin typeface="Spoqa Han Sans Neo" charset="0"/>
@@ -20453,7 +20827,7 @@
                           <a:ea typeface="Spoqa Han Sans Neo" pitchFamily="34" charset="-122"/>
                           <a:cs typeface="Spoqa Han Sans Neo" pitchFamily="34" charset="-120"/>
                         </a:rPr>
-                        <a:t>17.8%</a:t>
+                        <a:t>3.1%</a:t>
                       </a:r>
                       <a:endParaRPr lang="en-US" sz="1100" dirty="0">
                         <a:latin typeface="Spoqa Han Sans Neo" charset="0"/>
@@ -20583,7 +20957,7 @@
                           <a:ea typeface="Spoqa Han Sans Neo" pitchFamily="34" charset="-122"/>
                           <a:cs typeface="Spoqa Han Sans Neo" pitchFamily="34" charset="-120"/>
                         </a:rPr>
-                        <a:t>0.77~2.07%</a:t>
+                        <a:t>0.09~0.11%</a:t>
                       </a:r>
                       <a:endParaRPr lang="en-US" sz="1100" dirty="0">
                         <a:latin typeface="Spoqa Han Sans Neo" charset="0"/>
@@ -20639,6 +21013,2843 @@
       <p:sp>
         <p:nvSpPr>
           <p:cNvPr id="7" name="Text 4"/>
+          <p:cNvSpPr txBox="1"/>
+          <p:nvPr/>
+        </p:nvSpPr>
+        <p:spPr>
+          <a:xfrm>
+            <a:off x="548640" y="3703320"/>
+            <a:ext cx="11064240" cy="320040"/>
+          </a:xfrm>
+          <a:prstGeom prst="rect">
+            <a:avLst/>
+          </a:prstGeom>
+          <a:noFill/>
+          <a:ln/>
+        </p:spPr>
+        <p:txBody>
+          <a:bodyPr wrap="square" lIns="0" tIns="0" rIns="0" bIns="0" rtlCol="0" anchor="ctr"/>
+          <a:lstStyle/>
+          <a:p>
+            <a:pPr indent="0" marL="0">
+              <a:buNone/>
+            </a:pPr>
+            <a:r>
+              <a:rPr lang="en-US" sz="1500" b="1" dirty="0">
+                <a:solidFill>
+                  <a:srgbClr val="1A1A1A"/>
+                </a:solidFill>
+                <a:latin typeface="Spoqa Han Sans Neo" pitchFamily="34" charset="0"/>
+                <a:ea typeface="Spoqa Han Sans Neo" pitchFamily="34" charset="-122"/>
+                <a:cs typeface="Spoqa Han Sans Neo" pitchFamily="34" charset="-120"/>
+              </a:rPr>
+              <a:t>해외펀드 — 20.0% · 2,000만원</a:t>
+            </a:r>
+            <a:endParaRPr lang="en-US" sz="1500" dirty="0"/>
+          </a:p>
+        </p:txBody>
+      </p:sp>
+      <p:graphicFrame>
+        <p:nvGraphicFramePr>
+          <p:cNvPr id="13" name="Table 1"/>
+          <p:cNvGraphicFramePr>
+            <a:graphicFrameLocks noGrp="1"/>
+          </p:cNvGraphicFramePr>
+          <p:nvPr>
+            <p:extLst>
+              <p:ext uri="{D42A27DB-BD31-4B8C-83A1-F6EECF244321}">
+                <p14:modId xmlns:p14="http://schemas.microsoft.com/office/powerpoint/2010/main" val="1579011935"/>
+              </p:ext>
+            </p:extLst>
+          </p:nvPr>
+        </p:nvGraphicFramePr>
+        <p:xfrm>
+          <a:off x="548640" y="4069080"/>
+          <a:ext cx="11064240" cy="914400"/>
+        </p:xfrm>
+        <a:graphic>
+          <a:graphicData uri="http://schemas.openxmlformats.org/drawingml/2006/table">
+            <a:tbl>
+              <a:tblPr/>
+              <a:tblGrid>
+                <a:gridCol w="3566160"/>
+                <a:gridCol w="1554480"/>
+                <a:gridCol w="1828800"/>
+                <a:gridCol w="1280160"/>
+                <a:gridCol w="1005840"/>
+                <a:gridCol w="914400"/>
+                <a:gridCol w="914400"/>
+              </a:tblGrid>
+              <a:tr h="256032">
+                <a:tc>
+                  <a:txBody>
+                    <a:bodyPr/>
+                    <a:lstStyle/>
+                    <a:p>
+                      <a:pPr indent="0" marL="0">
+                        <a:buNone/>
+                      </a:pPr>
+                      <a:r>
+                        <a:rPr lang="en-US" sz="1200" b="1" dirty="0">
+                          <a:solidFill>
+                            <a:srgbClr val="1A1A1A"/>
+                          </a:solidFill>
+                          <a:latin typeface="Spoqa Han Sans Neo" pitchFamily="34" charset="0"/>
+                          <a:ea typeface="Spoqa Han Sans Neo" pitchFamily="34" charset="-122"/>
+                          <a:cs typeface="Spoqa Han Sans Neo" pitchFamily="34" charset="-120"/>
+                        </a:rPr>
+                        <a:t>상품</a:t>
+                      </a:r>
+                      <a:endParaRPr lang="en-US" sz="1200" dirty="0">
+                        <a:latin typeface="Spoqa Han Sans Neo" charset="0"/>
+                        <a:ea typeface="Spoqa Han Sans Neo" charset="0"/>
+                        <a:cs typeface="Spoqa Han Sans Neo" charset="0"/>
+                      </a:endParaRPr>
+                    </a:p>
+                  </a:txBody>
+                  <a:tcPr marL="91440" marR="91440" marT="45720" marB="45720" anchor="ctr">
+                    <a:lnL w="6350" cap="flat" cmpd="sng" algn="ctr">
+                      <a:solidFill>
+                        <a:srgbClr val="CDCECB"/>
+                      </a:solidFill>
+                      <a:prstDash val="solid"/>
+                      <a:round/>
+                      <a:headEnd type="none" w="med" len="med"/>
+                      <a:tailEnd type="none" w="med" len="med"/>
+                    </a:lnL>
+                    <a:lnR w="6350" cap="flat" cmpd="sng" algn="ctr">
+                      <a:solidFill>
+                        <a:srgbClr val="CDCECB"/>
+                      </a:solidFill>
+                      <a:prstDash val="solid"/>
+                      <a:round/>
+                      <a:headEnd type="none" w="med" len="med"/>
+                      <a:tailEnd type="none" w="med" len="med"/>
+                    </a:lnR>
+                    <a:lnT w="6350" cap="flat" cmpd="sng" algn="ctr">
+                      <a:solidFill>
+                        <a:srgbClr val="CDCECB"/>
+                      </a:solidFill>
+                      <a:prstDash val="solid"/>
+                      <a:round/>
+                      <a:headEnd type="none" w="med" len="med"/>
+                      <a:tailEnd type="none" w="med" len="med"/>
+                    </a:lnT>
+                    <a:lnB w="6350" cap="flat" cmpd="sng" algn="ctr">
+                      <a:solidFill>
+                        <a:srgbClr val="CDCECB"/>
+                      </a:solidFill>
+                      <a:prstDash val="solid"/>
+                      <a:round/>
+                      <a:headEnd type="none" w="med" len="med"/>
+                      <a:tailEnd type="none" w="med" len="med"/>
+                    </a:lnB>
+                    <a:solidFill>
+                      <a:srgbClr val="FAB072"/>
+                    </a:solidFill>
+                  </a:tcPr>
+                </a:tc>
+                <a:tc>
+                  <a:txBody>
+                    <a:bodyPr/>
+                    <a:lstStyle/>
+                    <a:p>
+                      <a:pPr indent="0" marL="0">
+                        <a:buNone/>
+                      </a:pPr>
+                      <a:r>
+                        <a:rPr lang="en-US" sz="1200" b="1" dirty="0">
+                          <a:solidFill>
+                            <a:srgbClr val="1A1A1A"/>
+                          </a:solidFill>
+                          <a:latin typeface="Spoqa Han Sans Neo" pitchFamily="34" charset="0"/>
+                          <a:ea typeface="Spoqa Han Sans Neo" pitchFamily="34" charset="-122"/>
+                          <a:cs typeface="Spoqa Han Sans Neo" pitchFamily="34" charset="-120"/>
+                        </a:rPr>
+                        <a:t>유형</a:t>
+                      </a:r>
+                      <a:endParaRPr lang="en-US" sz="1200" dirty="0">
+                        <a:latin typeface="Spoqa Han Sans Neo" charset="0"/>
+                        <a:ea typeface="Spoqa Han Sans Neo" charset="0"/>
+                        <a:cs typeface="Spoqa Han Sans Neo" charset="0"/>
+                      </a:endParaRPr>
+                    </a:p>
+                  </a:txBody>
+                  <a:tcPr marL="91440" marR="91440" marT="45720" marB="45720" anchor="ctr">
+                    <a:lnL w="6350" cap="flat" cmpd="sng" algn="ctr">
+                      <a:solidFill>
+                        <a:srgbClr val="CDCECB"/>
+                      </a:solidFill>
+                      <a:prstDash val="solid"/>
+                      <a:round/>
+                      <a:headEnd type="none" w="med" len="med"/>
+                      <a:tailEnd type="none" w="med" len="med"/>
+                    </a:lnL>
+                    <a:lnR w="6350" cap="flat" cmpd="sng" algn="ctr">
+                      <a:solidFill>
+                        <a:srgbClr val="CDCECB"/>
+                      </a:solidFill>
+                      <a:prstDash val="solid"/>
+                      <a:round/>
+                      <a:headEnd type="none" w="med" len="med"/>
+                      <a:tailEnd type="none" w="med" len="med"/>
+                    </a:lnR>
+                    <a:lnT w="6350" cap="flat" cmpd="sng" algn="ctr">
+                      <a:solidFill>
+                        <a:srgbClr val="CDCECB"/>
+                      </a:solidFill>
+                      <a:prstDash val="solid"/>
+                      <a:round/>
+                      <a:headEnd type="none" w="med" len="med"/>
+                      <a:tailEnd type="none" w="med" len="med"/>
+                    </a:lnT>
+                    <a:lnB w="6350" cap="flat" cmpd="sng" algn="ctr">
+                      <a:solidFill>
+                        <a:srgbClr val="CDCECB"/>
+                      </a:solidFill>
+                      <a:prstDash val="solid"/>
+                      <a:round/>
+                      <a:headEnd type="none" w="med" len="med"/>
+                      <a:tailEnd type="none" w="med" len="med"/>
+                    </a:lnB>
+                    <a:solidFill>
+                      <a:srgbClr val="FAB072"/>
+                    </a:solidFill>
+                  </a:tcPr>
+                </a:tc>
+                <a:tc>
+                  <a:txBody>
+                    <a:bodyPr/>
+                    <a:lstStyle/>
+                    <a:p>
+                      <a:pPr indent="0" marL="0">
+                        <a:buNone/>
+                      </a:pPr>
+                      <a:r>
+                        <a:rPr lang="en-US" sz="1200" b="1" dirty="0">
+                          <a:solidFill>
+                            <a:srgbClr val="1A1A1A"/>
+                          </a:solidFill>
+                          <a:latin typeface="Spoqa Han Sans Neo" pitchFamily="34" charset="0"/>
+                          <a:ea typeface="Spoqa Han Sans Neo" pitchFamily="34" charset="-122"/>
+                          <a:cs typeface="Spoqa Han Sans Neo" pitchFamily="34" charset="-120"/>
+                        </a:rPr>
+                        <a:t>운용/발행</a:t>
+                      </a:r>
+                      <a:endParaRPr lang="en-US" sz="1200" dirty="0">
+                        <a:latin typeface="Spoqa Han Sans Neo" charset="0"/>
+                        <a:ea typeface="Spoqa Han Sans Neo" charset="0"/>
+                        <a:cs typeface="Spoqa Han Sans Neo" charset="0"/>
+                      </a:endParaRPr>
+                    </a:p>
+                  </a:txBody>
+                  <a:tcPr marL="91440" marR="91440" marT="45720" marB="45720" anchor="ctr">
+                    <a:lnL w="6350" cap="flat" cmpd="sng" algn="ctr">
+                      <a:solidFill>
+                        <a:srgbClr val="CDCECB"/>
+                      </a:solidFill>
+                      <a:prstDash val="solid"/>
+                      <a:round/>
+                      <a:headEnd type="none" w="med" len="med"/>
+                      <a:tailEnd type="none" w="med" len="med"/>
+                    </a:lnL>
+                    <a:lnR w="6350" cap="flat" cmpd="sng" algn="ctr">
+                      <a:solidFill>
+                        <a:srgbClr val="CDCECB"/>
+                      </a:solidFill>
+                      <a:prstDash val="solid"/>
+                      <a:round/>
+                      <a:headEnd type="none" w="med" len="med"/>
+                      <a:tailEnd type="none" w="med" len="med"/>
+                    </a:lnR>
+                    <a:lnT w="6350" cap="flat" cmpd="sng" algn="ctr">
+                      <a:solidFill>
+                        <a:srgbClr val="CDCECB"/>
+                      </a:solidFill>
+                      <a:prstDash val="solid"/>
+                      <a:round/>
+                      <a:headEnd type="none" w="med" len="med"/>
+                      <a:tailEnd type="none" w="med" len="med"/>
+                    </a:lnT>
+                    <a:lnB w="6350" cap="flat" cmpd="sng" algn="ctr">
+                      <a:solidFill>
+                        <a:srgbClr val="CDCECB"/>
+                      </a:solidFill>
+                      <a:prstDash val="solid"/>
+                      <a:round/>
+                      <a:headEnd type="none" w="med" len="med"/>
+                      <a:tailEnd type="none" w="med" len="med"/>
+                    </a:lnB>
+                    <a:solidFill>
+                      <a:srgbClr val="FAB072"/>
+                    </a:solidFill>
+                  </a:tcPr>
+                </a:tc>
+                <a:tc>
+                  <a:txBody>
+                    <a:bodyPr/>
+                    <a:lstStyle/>
+                    <a:p>
+                      <a:pPr indent="0" marL="0">
+                        <a:buNone/>
+                      </a:pPr>
+                      <a:r>
+                        <a:rPr lang="en-US" sz="1200" b="1" dirty="0">
+                          <a:solidFill>
+                            <a:srgbClr val="1A1A1A"/>
+                          </a:solidFill>
+                          <a:latin typeface="Spoqa Han Sans Neo" pitchFamily="34" charset="0"/>
+                          <a:ea typeface="Spoqa Han Sans Neo" pitchFamily="34" charset="-122"/>
+                          <a:cs typeface="Spoqa Han Sans Neo" pitchFamily="34" charset="-120"/>
+                        </a:rPr>
+                        <a:t>규모</a:t>
+                      </a:r>
+                      <a:endParaRPr lang="en-US" sz="1200" dirty="0">
+                        <a:latin typeface="Spoqa Han Sans Neo" charset="0"/>
+                        <a:ea typeface="Spoqa Han Sans Neo" charset="0"/>
+                        <a:cs typeface="Spoqa Han Sans Neo" charset="0"/>
+                      </a:endParaRPr>
+                    </a:p>
+                  </a:txBody>
+                  <a:tcPr marL="91440" marR="91440" marT="45720" marB="45720" anchor="ctr">
+                    <a:lnL w="6350" cap="flat" cmpd="sng" algn="ctr">
+                      <a:solidFill>
+                        <a:srgbClr val="CDCECB"/>
+                      </a:solidFill>
+                      <a:prstDash val="solid"/>
+                      <a:round/>
+                      <a:headEnd type="none" w="med" len="med"/>
+                      <a:tailEnd type="none" w="med" len="med"/>
+                    </a:lnL>
+                    <a:lnR w="6350" cap="flat" cmpd="sng" algn="ctr">
+                      <a:solidFill>
+                        <a:srgbClr val="CDCECB"/>
+                      </a:solidFill>
+                      <a:prstDash val="solid"/>
+                      <a:round/>
+                      <a:headEnd type="none" w="med" len="med"/>
+                      <a:tailEnd type="none" w="med" len="med"/>
+                    </a:lnR>
+                    <a:lnT w="6350" cap="flat" cmpd="sng" algn="ctr">
+                      <a:solidFill>
+                        <a:srgbClr val="CDCECB"/>
+                      </a:solidFill>
+                      <a:prstDash val="solid"/>
+                      <a:round/>
+                      <a:headEnd type="none" w="med" len="med"/>
+                      <a:tailEnd type="none" w="med" len="med"/>
+                    </a:lnT>
+                    <a:lnB w="6350" cap="flat" cmpd="sng" algn="ctr">
+                      <a:solidFill>
+                        <a:srgbClr val="CDCECB"/>
+                      </a:solidFill>
+                      <a:prstDash val="solid"/>
+                      <a:round/>
+                      <a:headEnd type="none" w="med" len="med"/>
+                      <a:tailEnd type="none" w="med" len="med"/>
+                    </a:lnB>
+                    <a:solidFill>
+                      <a:srgbClr val="FAB072"/>
+                    </a:solidFill>
+                  </a:tcPr>
+                </a:tc>
+                <a:tc>
+                  <a:txBody>
+                    <a:bodyPr/>
+                    <a:lstStyle/>
+                    <a:p>
+                      <a:pPr indent="0" marL="0">
+                        <a:buNone/>
+                      </a:pPr>
+                      <a:r>
+                        <a:rPr lang="en-US" sz="1200" b="1" dirty="0">
+                          <a:solidFill>
+                            <a:srgbClr val="1A1A1A"/>
+                          </a:solidFill>
+                          <a:latin typeface="Spoqa Han Sans Neo" pitchFamily="34" charset="0"/>
+                          <a:ea typeface="Spoqa Han Sans Neo" pitchFamily="34" charset="-122"/>
+                          <a:cs typeface="Spoqa Han Sans Neo" pitchFamily="34" charset="-120"/>
+                        </a:rPr>
+                        <a:t>과거 1년</a:t>
+                      </a:r>
+                      <a:endParaRPr lang="en-US" sz="1200" dirty="0">
+                        <a:latin typeface="Spoqa Han Sans Neo" charset="0"/>
+                        <a:ea typeface="Spoqa Han Sans Neo" charset="0"/>
+                        <a:cs typeface="Spoqa Han Sans Neo" charset="0"/>
+                      </a:endParaRPr>
+                    </a:p>
+                  </a:txBody>
+                  <a:tcPr marL="91440" marR="91440" marT="45720" marB="45720" anchor="ctr">
+                    <a:lnL w="6350" cap="flat" cmpd="sng" algn="ctr">
+                      <a:solidFill>
+                        <a:srgbClr val="CDCECB"/>
+                      </a:solidFill>
+                      <a:prstDash val="solid"/>
+                      <a:round/>
+                      <a:headEnd type="none" w="med" len="med"/>
+                      <a:tailEnd type="none" w="med" len="med"/>
+                    </a:lnL>
+                    <a:lnR w="6350" cap="flat" cmpd="sng" algn="ctr">
+                      <a:solidFill>
+                        <a:srgbClr val="CDCECB"/>
+                      </a:solidFill>
+                      <a:prstDash val="solid"/>
+                      <a:round/>
+                      <a:headEnd type="none" w="med" len="med"/>
+                      <a:tailEnd type="none" w="med" len="med"/>
+                    </a:lnR>
+                    <a:lnT w="6350" cap="flat" cmpd="sng" algn="ctr">
+                      <a:solidFill>
+                        <a:srgbClr val="CDCECB"/>
+                      </a:solidFill>
+                      <a:prstDash val="solid"/>
+                      <a:round/>
+                      <a:headEnd type="none" w="med" len="med"/>
+                      <a:tailEnd type="none" w="med" len="med"/>
+                    </a:lnT>
+                    <a:lnB w="6350" cap="flat" cmpd="sng" algn="ctr">
+                      <a:solidFill>
+                        <a:srgbClr val="CDCECB"/>
+                      </a:solidFill>
+                      <a:prstDash val="solid"/>
+                      <a:round/>
+                      <a:headEnd type="none" w="med" len="med"/>
+                      <a:tailEnd type="none" w="med" len="med"/>
+                    </a:lnB>
+                    <a:solidFill>
+                      <a:srgbClr val="FAB072"/>
+                    </a:solidFill>
+                  </a:tcPr>
+                </a:tc>
+                <a:tc>
+                  <a:txBody>
+                    <a:bodyPr/>
+                    <a:lstStyle/>
+                    <a:p>
+                      <a:pPr indent="0" marL="0">
+                        <a:buNone/>
+                      </a:pPr>
+                      <a:r>
+                        <a:rPr lang="en-US" sz="1200" b="1" dirty="0">
+                          <a:solidFill>
+                            <a:srgbClr val="1A1A1A"/>
+                          </a:solidFill>
+                          <a:latin typeface="Spoqa Han Sans Neo" pitchFamily="34" charset="0"/>
+                          <a:ea typeface="Spoqa Han Sans Neo" pitchFamily="34" charset="-122"/>
+                          <a:cs typeface="Spoqa Han Sans Neo" pitchFamily="34" charset="-120"/>
+                        </a:rPr>
+                        <a:t>변동성</a:t>
+                      </a:r>
+                      <a:endParaRPr lang="en-US" sz="1200" dirty="0">
+                        <a:latin typeface="Spoqa Han Sans Neo" charset="0"/>
+                        <a:ea typeface="Spoqa Han Sans Neo" charset="0"/>
+                        <a:cs typeface="Spoqa Han Sans Neo" charset="0"/>
+                      </a:endParaRPr>
+                    </a:p>
+                  </a:txBody>
+                  <a:tcPr marL="91440" marR="91440" marT="45720" marB="45720" anchor="ctr">
+                    <a:lnL w="6350" cap="flat" cmpd="sng" algn="ctr">
+                      <a:solidFill>
+                        <a:srgbClr val="CDCECB"/>
+                      </a:solidFill>
+                      <a:prstDash val="solid"/>
+                      <a:round/>
+                      <a:headEnd type="none" w="med" len="med"/>
+                      <a:tailEnd type="none" w="med" len="med"/>
+                    </a:lnL>
+                    <a:lnR w="6350" cap="flat" cmpd="sng" algn="ctr">
+                      <a:solidFill>
+                        <a:srgbClr val="CDCECB"/>
+                      </a:solidFill>
+                      <a:prstDash val="solid"/>
+                      <a:round/>
+                      <a:headEnd type="none" w="med" len="med"/>
+                      <a:tailEnd type="none" w="med" len="med"/>
+                    </a:lnR>
+                    <a:lnT w="6350" cap="flat" cmpd="sng" algn="ctr">
+                      <a:solidFill>
+                        <a:srgbClr val="CDCECB"/>
+                      </a:solidFill>
+                      <a:prstDash val="solid"/>
+                      <a:round/>
+                      <a:headEnd type="none" w="med" len="med"/>
+                      <a:tailEnd type="none" w="med" len="med"/>
+                    </a:lnT>
+                    <a:lnB w="6350" cap="flat" cmpd="sng" algn="ctr">
+                      <a:solidFill>
+                        <a:srgbClr val="CDCECB"/>
+                      </a:solidFill>
+                      <a:prstDash val="solid"/>
+                      <a:round/>
+                      <a:headEnd type="none" w="med" len="med"/>
+                      <a:tailEnd type="none" w="med" len="med"/>
+                    </a:lnB>
+                    <a:solidFill>
+                      <a:srgbClr val="FAB072"/>
+                    </a:solidFill>
+                  </a:tcPr>
+                </a:tc>
+                <a:tc>
+                  <a:txBody>
+                    <a:bodyPr/>
+                    <a:lstStyle/>
+                    <a:p>
+                      <a:pPr indent="0" marL="0">
+                        <a:buNone/>
+                      </a:pPr>
+                      <a:r>
+                        <a:rPr lang="en-US" sz="1200" b="1" dirty="0">
+                          <a:solidFill>
+                            <a:srgbClr val="1A1A1A"/>
+                          </a:solidFill>
+                          <a:latin typeface="Spoqa Han Sans Neo" pitchFamily="34" charset="0"/>
+                          <a:ea typeface="Spoqa Han Sans Neo" pitchFamily="34" charset="-122"/>
+                          <a:cs typeface="Spoqa Han Sans Neo" pitchFamily="34" charset="-120"/>
+                        </a:rPr>
+                        <a:t>보수</a:t>
+                      </a:r>
+                      <a:endParaRPr lang="en-US" sz="1200" dirty="0">
+                        <a:latin typeface="Spoqa Han Sans Neo" charset="0"/>
+                        <a:ea typeface="Spoqa Han Sans Neo" charset="0"/>
+                        <a:cs typeface="Spoqa Han Sans Neo" charset="0"/>
+                      </a:endParaRPr>
+                    </a:p>
+                  </a:txBody>
+                  <a:tcPr marL="91440" marR="91440" marT="45720" marB="45720" anchor="ctr">
+                    <a:lnL w="6350" cap="flat" cmpd="sng" algn="ctr">
+                      <a:solidFill>
+                        <a:srgbClr val="CDCECB"/>
+                      </a:solidFill>
+                      <a:prstDash val="solid"/>
+                      <a:round/>
+                      <a:headEnd type="none" w="med" len="med"/>
+                      <a:tailEnd type="none" w="med" len="med"/>
+                    </a:lnL>
+                    <a:lnR w="6350" cap="flat" cmpd="sng" algn="ctr">
+                      <a:solidFill>
+                        <a:srgbClr val="CDCECB"/>
+                      </a:solidFill>
+                      <a:prstDash val="solid"/>
+                      <a:round/>
+                      <a:headEnd type="none" w="med" len="med"/>
+                      <a:tailEnd type="none" w="med" len="med"/>
+                    </a:lnR>
+                    <a:lnT w="6350" cap="flat" cmpd="sng" algn="ctr">
+                      <a:solidFill>
+                        <a:srgbClr val="CDCECB"/>
+                      </a:solidFill>
+                      <a:prstDash val="solid"/>
+                      <a:round/>
+                      <a:headEnd type="none" w="med" len="med"/>
+                      <a:tailEnd type="none" w="med" len="med"/>
+                    </a:lnT>
+                    <a:lnB w="6350" cap="flat" cmpd="sng" algn="ctr">
+                      <a:solidFill>
+                        <a:srgbClr val="CDCECB"/>
+                      </a:solidFill>
+                      <a:prstDash val="solid"/>
+                      <a:round/>
+                      <a:headEnd type="none" w="med" len="med"/>
+                      <a:tailEnd type="none" w="med" len="med"/>
+                    </a:lnB>
+                    <a:solidFill>
+                      <a:srgbClr val="FAB072"/>
+                    </a:solidFill>
+                  </a:tcPr>
+                </a:tc>
+              </a:tr>
+              <a:tr h="256032">
+                <a:tc>
+                  <a:txBody>
+                    <a:bodyPr/>
+                    <a:lstStyle/>
+                    <a:p>
+                      <a:pPr indent="0" marL="0">
+                        <a:buNone/>
+                      </a:pPr>
+                      <a:r>
+                        <a:rPr lang="en-US" sz="1100" dirty="0">
+                          <a:solidFill>
+                            <a:srgbClr val="3D3D3D"/>
+                          </a:solidFill>
+                          <a:latin typeface="Spoqa Han Sans Neo" pitchFamily="34" charset="0"/>
+                          <a:ea typeface="Spoqa Han Sans Neo" pitchFamily="34" charset="-122"/>
+                          <a:cs typeface="Spoqa Han Sans Neo" pitchFamily="34" charset="-120"/>
+                        </a:rPr>
+                        <a:t>피델리티글로벌테크놀로지증권자투자신탁(주식-재간접형)</a:t>
+                      </a:r>
+                      <a:endParaRPr lang="en-US" sz="1100" dirty="0">
+                        <a:latin typeface="Spoqa Han Sans Neo" charset="0"/>
+                        <a:ea typeface="Spoqa Han Sans Neo" charset="0"/>
+                        <a:cs typeface="Spoqa Han Sans Neo" charset="0"/>
+                      </a:endParaRPr>
+                    </a:p>
+                  </a:txBody>
+                  <a:tcPr marL="91440" marR="91440" marT="45720" marB="45720" anchor="ctr">
+                    <a:lnL w="6350" cap="flat" cmpd="sng" algn="ctr">
+                      <a:solidFill>
+                        <a:srgbClr val="CDCECB"/>
+                      </a:solidFill>
+                      <a:prstDash val="solid"/>
+                      <a:round/>
+                      <a:headEnd type="none" w="med" len="med"/>
+                      <a:tailEnd type="none" w="med" len="med"/>
+                    </a:lnL>
+                    <a:lnR w="6350" cap="flat" cmpd="sng" algn="ctr">
+                      <a:solidFill>
+                        <a:srgbClr val="CDCECB"/>
+                      </a:solidFill>
+                      <a:prstDash val="solid"/>
+                      <a:round/>
+                      <a:headEnd type="none" w="med" len="med"/>
+                      <a:tailEnd type="none" w="med" len="med"/>
+                    </a:lnR>
+                    <a:lnT w="6350" cap="flat" cmpd="sng" algn="ctr">
+                      <a:solidFill>
+                        <a:srgbClr val="CDCECB"/>
+                      </a:solidFill>
+                      <a:prstDash val="solid"/>
+                      <a:round/>
+                      <a:headEnd type="none" w="med" len="med"/>
+                      <a:tailEnd type="none" w="med" len="med"/>
+                    </a:lnT>
+                    <a:lnB w="6350" cap="flat" cmpd="sng" algn="ctr">
+                      <a:solidFill>
+                        <a:srgbClr val="CDCECB"/>
+                      </a:solidFill>
+                      <a:prstDash val="solid"/>
+                      <a:round/>
+                      <a:headEnd type="none" w="med" len="med"/>
+                      <a:tailEnd type="none" w="med" len="med"/>
+                    </a:lnB>
+                  </a:tcPr>
+                </a:tc>
+                <a:tc>
+                  <a:txBody>
+                    <a:bodyPr/>
+                    <a:lstStyle/>
+                    <a:p>
+                      <a:pPr indent="0" marL="0">
+                        <a:buNone/>
+                      </a:pPr>
+                      <a:r>
+                        <a:rPr lang="en-US" sz="1100" dirty="0">
+                          <a:solidFill>
+                            <a:srgbClr val="3D3D3D"/>
+                          </a:solidFill>
+                          <a:latin typeface="Spoqa Han Sans Neo" pitchFamily="34" charset="0"/>
+                          <a:ea typeface="Spoqa Han Sans Neo" pitchFamily="34" charset="-122"/>
+                          <a:cs typeface="Spoqa Han Sans Neo" pitchFamily="34" charset="-120"/>
+                        </a:rPr>
+                        <a:t>해외주식형</a:t>
+                      </a:r>
+                      <a:endParaRPr lang="en-US" sz="1100" dirty="0">
+                        <a:latin typeface="Spoqa Han Sans Neo" charset="0"/>
+                        <a:ea typeface="Spoqa Han Sans Neo" charset="0"/>
+                        <a:cs typeface="Spoqa Han Sans Neo" charset="0"/>
+                      </a:endParaRPr>
+                    </a:p>
+                  </a:txBody>
+                  <a:tcPr marL="91440" marR="91440" marT="45720" marB="45720" anchor="ctr">
+                    <a:lnL w="6350" cap="flat" cmpd="sng" algn="ctr">
+                      <a:solidFill>
+                        <a:srgbClr val="CDCECB"/>
+                      </a:solidFill>
+                      <a:prstDash val="solid"/>
+                      <a:round/>
+                      <a:headEnd type="none" w="med" len="med"/>
+                      <a:tailEnd type="none" w="med" len="med"/>
+                    </a:lnL>
+                    <a:lnR w="6350" cap="flat" cmpd="sng" algn="ctr">
+                      <a:solidFill>
+                        <a:srgbClr val="CDCECB"/>
+                      </a:solidFill>
+                      <a:prstDash val="solid"/>
+                      <a:round/>
+                      <a:headEnd type="none" w="med" len="med"/>
+                      <a:tailEnd type="none" w="med" len="med"/>
+                    </a:lnR>
+                    <a:lnT w="6350" cap="flat" cmpd="sng" algn="ctr">
+                      <a:solidFill>
+                        <a:srgbClr val="CDCECB"/>
+                      </a:solidFill>
+                      <a:prstDash val="solid"/>
+                      <a:round/>
+                      <a:headEnd type="none" w="med" len="med"/>
+                      <a:tailEnd type="none" w="med" len="med"/>
+                    </a:lnT>
+                    <a:lnB w="6350" cap="flat" cmpd="sng" algn="ctr">
+                      <a:solidFill>
+                        <a:srgbClr val="CDCECB"/>
+                      </a:solidFill>
+                      <a:prstDash val="solid"/>
+                      <a:round/>
+                      <a:headEnd type="none" w="med" len="med"/>
+                      <a:tailEnd type="none" w="med" len="med"/>
+                    </a:lnB>
+                  </a:tcPr>
+                </a:tc>
+                <a:tc>
+                  <a:txBody>
+                    <a:bodyPr/>
+                    <a:lstStyle/>
+                    <a:p>
+                      <a:pPr indent="0" marL="0">
+                        <a:buNone/>
+                      </a:pPr>
+                      <a:r>
+                        <a:rPr lang="en-US" sz="1100" dirty="0">
+                          <a:solidFill>
+                            <a:srgbClr val="3D3D3D"/>
+                          </a:solidFill>
+                          <a:latin typeface="Spoqa Han Sans Neo" pitchFamily="34" charset="0"/>
+                          <a:ea typeface="Spoqa Han Sans Neo" pitchFamily="34" charset="-122"/>
+                          <a:cs typeface="Spoqa Han Sans Neo" pitchFamily="34" charset="-120"/>
+                        </a:rPr>
+                        <a:t>피델리티자산운용</a:t>
+                      </a:r>
+                      <a:endParaRPr lang="en-US" sz="1100" dirty="0">
+                        <a:latin typeface="Spoqa Han Sans Neo" charset="0"/>
+                        <a:ea typeface="Spoqa Han Sans Neo" charset="0"/>
+                        <a:cs typeface="Spoqa Han Sans Neo" charset="0"/>
+                      </a:endParaRPr>
+                    </a:p>
+                  </a:txBody>
+                  <a:tcPr marL="91440" marR="91440" marT="45720" marB="45720" anchor="ctr">
+                    <a:lnL w="6350" cap="flat" cmpd="sng" algn="ctr">
+                      <a:solidFill>
+                        <a:srgbClr val="CDCECB"/>
+                      </a:solidFill>
+                      <a:prstDash val="solid"/>
+                      <a:round/>
+                      <a:headEnd type="none" w="med" len="med"/>
+                      <a:tailEnd type="none" w="med" len="med"/>
+                    </a:lnL>
+                    <a:lnR w="6350" cap="flat" cmpd="sng" algn="ctr">
+                      <a:solidFill>
+                        <a:srgbClr val="CDCECB"/>
+                      </a:solidFill>
+                      <a:prstDash val="solid"/>
+                      <a:round/>
+                      <a:headEnd type="none" w="med" len="med"/>
+                      <a:tailEnd type="none" w="med" len="med"/>
+                    </a:lnR>
+                    <a:lnT w="6350" cap="flat" cmpd="sng" algn="ctr">
+                      <a:solidFill>
+                        <a:srgbClr val="CDCECB"/>
+                      </a:solidFill>
+                      <a:prstDash val="solid"/>
+                      <a:round/>
+                      <a:headEnd type="none" w="med" len="med"/>
+                      <a:tailEnd type="none" w="med" len="med"/>
+                    </a:lnT>
+                    <a:lnB w="6350" cap="flat" cmpd="sng" algn="ctr">
+                      <a:solidFill>
+                        <a:srgbClr val="CDCECB"/>
+                      </a:solidFill>
+                      <a:prstDash val="solid"/>
+                      <a:round/>
+                      <a:headEnd type="none" w="med" len="med"/>
+                      <a:tailEnd type="none" w="med" len="med"/>
+                    </a:lnB>
+                  </a:tcPr>
+                </a:tc>
+                <a:tc>
+                  <a:txBody>
+                    <a:bodyPr/>
+                    <a:lstStyle/>
+                    <a:p>
+                      <a:pPr algn="r" indent="0" marL="0">
+                        <a:buNone/>
+                      </a:pPr>
+                      <a:r>
+                        <a:rPr lang="en-US" sz="1100" dirty="0">
+                          <a:solidFill>
+                            <a:srgbClr val="3D3D3D"/>
+                          </a:solidFill>
+                          <a:latin typeface="Spoqa Han Sans Neo" pitchFamily="34" charset="0"/>
+                          <a:ea typeface="Spoqa Han Sans Neo" pitchFamily="34" charset="-122"/>
+                          <a:cs typeface="Spoqa Han Sans Neo" pitchFamily="34" charset="-120"/>
+                        </a:rPr>
+                        <a:t>9,218억원</a:t>
+                      </a:r>
+                      <a:endParaRPr lang="en-US" sz="1100" dirty="0">
+                        <a:latin typeface="Spoqa Han Sans Neo" charset="0"/>
+                        <a:ea typeface="Spoqa Han Sans Neo" charset="0"/>
+                        <a:cs typeface="Spoqa Han Sans Neo" charset="0"/>
+                      </a:endParaRPr>
+                    </a:p>
+                  </a:txBody>
+                  <a:tcPr marL="91440" marR="91440" marT="45720" marB="45720" anchor="ctr">
+                    <a:lnL w="6350" cap="flat" cmpd="sng" algn="ctr">
+                      <a:solidFill>
+                        <a:srgbClr val="CDCECB"/>
+                      </a:solidFill>
+                      <a:prstDash val="solid"/>
+                      <a:round/>
+                      <a:headEnd type="none" w="med" len="med"/>
+                      <a:tailEnd type="none" w="med" len="med"/>
+                    </a:lnL>
+                    <a:lnR w="6350" cap="flat" cmpd="sng" algn="ctr">
+                      <a:solidFill>
+                        <a:srgbClr val="CDCECB"/>
+                      </a:solidFill>
+                      <a:prstDash val="solid"/>
+                      <a:round/>
+                      <a:headEnd type="none" w="med" len="med"/>
+                      <a:tailEnd type="none" w="med" len="med"/>
+                    </a:lnR>
+                    <a:lnT w="6350" cap="flat" cmpd="sng" algn="ctr">
+                      <a:solidFill>
+                        <a:srgbClr val="CDCECB"/>
+                      </a:solidFill>
+                      <a:prstDash val="solid"/>
+                      <a:round/>
+                      <a:headEnd type="none" w="med" len="med"/>
+                      <a:tailEnd type="none" w="med" len="med"/>
+                    </a:lnT>
+                    <a:lnB w="6350" cap="flat" cmpd="sng" algn="ctr">
+                      <a:solidFill>
+                        <a:srgbClr val="CDCECB"/>
+                      </a:solidFill>
+                      <a:prstDash val="solid"/>
+                      <a:round/>
+                      <a:headEnd type="none" w="med" len="med"/>
+                      <a:tailEnd type="none" w="med" len="med"/>
+                    </a:lnB>
+                  </a:tcPr>
+                </a:tc>
+                <a:tc>
+                  <a:txBody>
+                    <a:bodyPr/>
+                    <a:lstStyle/>
+                    <a:p>
+                      <a:pPr algn="r" indent="0" marL="0">
+                        <a:buNone/>
+                      </a:pPr>
+                      <a:r>
+                        <a:rPr lang="en-US" sz="1100" dirty="0">
+                          <a:solidFill>
+                            <a:srgbClr val="3D3D3D"/>
+                          </a:solidFill>
+                          <a:latin typeface="Spoqa Han Sans Neo" pitchFamily="34" charset="0"/>
+                          <a:ea typeface="Spoqa Han Sans Neo" pitchFamily="34" charset="-122"/>
+                          <a:cs typeface="Spoqa Han Sans Neo" pitchFamily="34" charset="-120"/>
+                        </a:rPr>
+                        <a:t>20.4%</a:t>
+                      </a:r>
+                      <a:endParaRPr lang="en-US" sz="1100" dirty="0">
+                        <a:latin typeface="Spoqa Han Sans Neo" charset="0"/>
+                        <a:ea typeface="Spoqa Han Sans Neo" charset="0"/>
+                        <a:cs typeface="Spoqa Han Sans Neo" charset="0"/>
+                      </a:endParaRPr>
+                    </a:p>
+                  </a:txBody>
+                  <a:tcPr marL="91440" marR="91440" marT="45720" marB="45720" anchor="ctr">
+                    <a:lnL w="6350" cap="flat" cmpd="sng" algn="ctr">
+                      <a:solidFill>
+                        <a:srgbClr val="CDCECB"/>
+                      </a:solidFill>
+                      <a:prstDash val="solid"/>
+                      <a:round/>
+                      <a:headEnd type="none" w="med" len="med"/>
+                      <a:tailEnd type="none" w="med" len="med"/>
+                    </a:lnL>
+                    <a:lnR w="6350" cap="flat" cmpd="sng" algn="ctr">
+                      <a:solidFill>
+                        <a:srgbClr val="CDCECB"/>
+                      </a:solidFill>
+                      <a:prstDash val="solid"/>
+                      <a:round/>
+                      <a:headEnd type="none" w="med" len="med"/>
+                      <a:tailEnd type="none" w="med" len="med"/>
+                    </a:lnR>
+                    <a:lnT w="6350" cap="flat" cmpd="sng" algn="ctr">
+                      <a:solidFill>
+                        <a:srgbClr val="CDCECB"/>
+                      </a:solidFill>
+                      <a:prstDash val="solid"/>
+                      <a:round/>
+                      <a:headEnd type="none" w="med" len="med"/>
+                      <a:tailEnd type="none" w="med" len="med"/>
+                    </a:lnT>
+                    <a:lnB w="6350" cap="flat" cmpd="sng" algn="ctr">
+                      <a:solidFill>
+                        <a:srgbClr val="CDCECB"/>
+                      </a:solidFill>
+                      <a:prstDash val="solid"/>
+                      <a:round/>
+                      <a:headEnd type="none" w="med" len="med"/>
+                      <a:tailEnd type="none" w="med" len="med"/>
+                    </a:lnB>
+                  </a:tcPr>
+                </a:tc>
+                <a:tc>
+                  <a:txBody>
+                    <a:bodyPr/>
+                    <a:lstStyle/>
+                    <a:p>
+                      <a:pPr algn="r" indent="0" marL="0">
+                        <a:buNone/>
+                      </a:pPr>
+                      <a:r>
+                        <a:rPr lang="en-US" sz="1100" dirty="0">
+                          <a:solidFill>
+                            <a:srgbClr val="6C6C6C"/>
+                          </a:solidFill>
+                          <a:latin typeface="Spoqa Han Sans Neo" pitchFamily="34" charset="0"/>
+                          <a:ea typeface="Spoqa Han Sans Neo" pitchFamily="34" charset="-122"/>
+                          <a:cs typeface="Spoqa Han Sans Neo" pitchFamily="34" charset="-120"/>
+                        </a:rPr>
+                        <a:t>—</a:t>
+                      </a:r>
+                      <a:endParaRPr lang="en-US" sz="1100" dirty="0">
+                        <a:latin typeface="Spoqa Han Sans Neo" charset="0"/>
+                        <a:ea typeface="Spoqa Han Sans Neo" charset="0"/>
+                        <a:cs typeface="Spoqa Han Sans Neo" charset="0"/>
+                      </a:endParaRPr>
+                    </a:p>
+                  </a:txBody>
+                  <a:tcPr marL="91440" marR="91440" marT="45720" marB="45720" anchor="ctr">
+                    <a:lnL w="6350" cap="flat" cmpd="sng" algn="ctr">
+                      <a:solidFill>
+                        <a:srgbClr val="CDCECB"/>
+                      </a:solidFill>
+                      <a:prstDash val="solid"/>
+                      <a:round/>
+                      <a:headEnd type="none" w="med" len="med"/>
+                      <a:tailEnd type="none" w="med" len="med"/>
+                    </a:lnL>
+                    <a:lnR w="6350" cap="flat" cmpd="sng" algn="ctr">
+                      <a:solidFill>
+                        <a:srgbClr val="CDCECB"/>
+                      </a:solidFill>
+                      <a:prstDash val="solid"/>
+                      <a:round/>
+                      <a:headEnd type="none" w="med" len="med"/>
+                      <a:tailEnd type="none" w="med" len="med"/>
+                    </a:lnR>
+                    <a:lnT w="6350" cap="flat" cmpd="sng" algn="ctr">
+                      <a:solidFill>
+                        <a:srgbClr val="CDCECB"/>
+                      </a:solidFill>
+                      <a:prstDash val="solid"/>
+                      <a:round/>
+                      <a:headEnd type="none" w="med" len="med"/>
+                      <a:tailEnd type="none" w="med" len="med"/>
+                    </a:lnT>
+                    <a:lnB w="6350" cap="flat" cmpd="sng" algn="ctr">
+                      <a:solidFill>
+                        <a:srgbClr val="CDCECB"/>
+                      </a:solidFill>
+                      <a:prstDash val="solid"/>
+                      <a:round/>
+                      <a:headEnd type="none" w="med" len="med"/>
+                      <a:tailEnd type="none" w="med" len="med"/>
+                    </a:lnB>
+                  </a:tcPr>
+                </a:tc>
+                <a:tc>
+                  <a:txBody>
+                    <a:bodyPr/>
+                    <a:lstStyle/>
+                    <a:p>
+                      <a:pPr algn="r" indent="0" marL="0">
+                        <a:buNone/>
+                      </a:pPr>
+                      <a:r>
+                        <a:rPr lang="en-US" sz="1100" dirty="0">
+                          <a:solidFill>
+                            <a:srgbClr val="3D3D3D"/>
+                          </a:solidFill>
+                          <a:latin typeface="Spoqa Han Sans Neo" pitchFamily="34" charset="0"/>
+                          <a:ea typeface="Spoqa Han Sans Neo" pitchFamily="34" charset="-122"/>
+                          <a:cs typeface="Spoqa Han Sans Neo" pitchFamily="34" charset="-120"/>
+                        </a:rPr>
+                        <a:t>0.16~1.36%</a:t>
+                      </a:r>
+                      <a:endParaRPr lang="en-US" sz="1100" dirty="0">
+                        <a:latin typeface="Spoqa Han Sans Neo" charset="0"/>
+                        <a:ea typeface="Spoqa Han Sans Neo" charset="0"/>
+                        <a:cs typeface="Spoqa Han Sans Neo" charset="0"/>
+                      </a:endParaRPr>
+                    </a:p>
+                  </a:txBody>
+                  <a:tcPr marL="91440" marR="91440" marT="45720" marB="45720" anchor="ctr">
+                    <a:lnL w="6350" cap="flat" cmpd="sng" algn="ctr">
+                      <a:solidFill>
+                        <a:srgbClr val="CDCECB"/>
+                      </a:solidFill>
+                      <a:prstDash val="solid"/>
+                      <a:round/>
+                      <a:headEnd type="none" w="med" len="med"/>
+                      <a:tailEnd type="none" w="med" len="med"/>
+                    </a:lnL>
+                    <a:lnR w="6350" cap="flat" cmpd="sng" algn="ctr">
+                      <a:solidFill>
+                        <a:srgbClr val="CDCECB"/>
+                      </a:solidFill>
+                      <a:prstDash val="solid"/>
+                      <a:round/>
+                      <a:headEnd type="none" w="med" len="med"/>
+                      <a:tailEnd type="none" w="med" len="med"/>
+                    </a:lnR>
+                    <a:lnT w="6350" cap="flat" cmpd="sng" algn="ctr">
+                      <a:solidFill>
+                        <a:srgbClr val="CDCECB"/>
+                      </a:solidFill>
+                      <a:prstDash val="solid"/>
+                      <a:round/>
+                      <a:headEnd type="none" w="med" len="med"/>
+                      <a:tailEnd type="none" w="med" len="med"/>
+                    </a:lnT>
+                    <a:lnB w="6350" cap="flat" cmpd="sng" algn="ctr">
+                      <a:solidFill>
+                        <a:srgbClr val="CDCECB"/>
+                      </a:solidFill>
+                      <a:prstDash val="solid"/>
+                      <a:round/>
+                      <a:headEnd type="none" w="med" len="med"/>
+                      <a:tailEnd type="none" w="med" len="med"/>
+                    </a:lnB>
+                  </a:tcPr>
+                </a:tc>
+              </a:tr>
+              <a:tr h="256032">
+                <a:tc>
+                  <a:txBody>
+                    <a:bodyPr/>
+                    <a:lstStyle/>
+                    <a:p>
+                      <a:pPr indent="0" marL="0">
+                        <a:buNone/>
+                      </a:pPr>
+                      <a:r>
+                        <a:rPr lang="en-US" sz="1100" dirty="0">
+                          <a:solidFill>
+                            <a:srgbClr val="3D3D3D"/>
+                          </a:solidFill>
+                          <a:latin typeface="Spoqa Han Sans Neo" pitchFamily="34" charset="0"/>
+                          <a:ea typeface="Spoqa Han Sans Neo" pitchFamily="34" charset="-122"/>
+                          <a:cs typeface="Spoqa Han Sans Neo" pitchFamily="34" charset="-120"/>
+                        </a:rPr>
+                        <a:t>피델리티월지급식아시아하이일드증권자투자신탁[채권-재간접…</a:t>
+                      </a:r>
+                      <a:endParaRPr lang="en-US" sz="1100" dirty="0">
+                        <a:latin typeface="Spoqa Han Sans Neo" charset="0"/>
+                        <a:ea typeface="Spoqa Han Sans Neo" charset="0"/>
+                        <a:cs typeface="Spoqa Han Sans Neo" charset="0"/>
+                      </a:endParaRPr>
+                    </a:p>
+                  </a:txBody>
+                  <a:tcPr marL="91440" marR="91440" marT="45720" marB="45720" anchor="ctr">
+                    <a:lnL w="6350" cap="flat" cmpd="sng" algn="ctr">
+                      <a:solidFill>
+                        <a:srgbClr val="CDCECB"/>
+                      </a:solidFill>
+                      <a:prstDash val="solid"/>
+                      <a:round/>
+                      <a:headEnd type="none" w="med" len="med"/>
+                      <a:tailEnd type="none" w="med" len="med"/>
+                    </a:lnL>
+                    <a:lnR w="6350" cap="flat" cmpd="sng" algn="ctr">
+                      <a:solidFill>
+                        <a:srgbClr val="CDCECB"/>
+                      </a:solidFill>
+                      <a:prstDash val="solid"/>
+                      <a:round/>
+                      <a:headEnd type="none" w="med" len="med"/>
+                      <a:tailEnd type="none" w="med" len="med"/>
+                    </a:lnR>
+                    <a:lnT w="6350" cap="flat" cmpd="sng" algn="ctr">
+                      <a:solidFill>
+                        <a:srgbClr val="CDCECB"/>
+                      </a:solidFill>
+                      <a:prstDash val="solid"/>
+                      <a:round/>
+                      <a:headEnd type="none" w="med" len="med"/>
+                      <a:tailEnd type="none" w="med" len="med"/>
+                    </a:lnT>
+                    <a:lnB w="6350" cap="flat" cmpd="sng" algn="ctr">
+                      <a:solidFill>
+                        <a:srgbClr val="CDCECB"/>
+                      </a:solidFill>
+                      <a:prstDash val="solid"/>
+                      <a:round/>
+                      <a:headEnd type="none" w="med" len="med"/>
+                      <a:tailEnd type="none" w="med" len="med"/>
+                    </a:lnB>
+                  </a:tcPr>
+                </a:tc>
+                <a:tc>
+                  <a:txBody>
+                    <a:bodyPr/>
+                    <a:lstStyle/>
+                    <a:p>
+                      <a:pPr indent="0" marL="0">
+                        <a:buNone/>
+                      </a:pPr>
+                      <a:r>
+                        <a:rPr lang="en-US" sz="1100" dirty="0">
+                          <a:solidFill>
+                            <a:srgbClr val="3D3D3D"/>
+                          </a:solidFill>
+                          <a:latin typeface="Spoqa Han Sans Neo" pitchFamily="34" charset="0"/>
+                          <a:ea typeface="Spoqa Han Sans Neo" pitchFamily="34" charset="-122"/>
+                          <a:cs typeface="Spoqa Han Sans Neo" pitchFamily="34" charset="-120"/>
+                        </a:rPr>
+                        <a:t>해외채권형</a:t>
+                      </a:r>
+                      <a:endParaRPr lang="en-US" sz="1100" dirty="0">
+                        <a:latin typeface="Spoqa Han Sans Neo" charset="0"/>
+                        <a:ea typeface="Spoqa Han Sans Neo" charset="0"/>
+                        <a:cs typeface="Spoqa Han Sans Neo" charset="0"/>
+                      </a:endParaRPr>
+                    </a:p>
+                  </a:txBody>
+                  <a:tcPr marL="91440" marR="91440" marT="45720" marB="45720" anchor="ctr">
+                    <a:lnL w="6350" cap="flat" cmpd="sng" algn="ctr">
+                      <a:solidFill>
+                        <a:srgbClr val="CDCECB"/>
+                      </a:solidFill>
+                      <a:prstDash val="solid"/>
+                      <a:round/>
+                      <a:headEnd type="none" w="med" len="med"/>
+                      <a:tailEnd type="none" w="med" len="med"/>
+                    </a:lnL>
+                    <a:lnR w="6350" cap="flat" cmpd="sng" algn="ctr">
+                      <a:solidFill>
+                        <a:srgbClr val="CDCECB"/>
+                      </a:solidFill>
+                      <a:prstDash val="solid"/>
+                      <a:round/>
+                      <a:headEnd type="none" w="med" len="med"/>
+                      <a:tailEnd type="none" w="med" len="med"/>
+                    </a:lnR>
+                    <a:lnT w="6350" cap="flat" cmpd="sng" algn="ctr">
+                      <a:solidFill>
+                        <a:srgbClr val="CDCECB"/>
+                      </a:solidFill>
+                      <a:prstDash val="solid"/>
+                      <a:round/>
+                      <a:headEnd type="none" w="med" len="med"/>
+                      <a:tailEnd type="none" w="med" len="med"/>
+                    </a:lnT>
+                    <a:lnB w="6350" cap="flat" cmpd="sng" algn="ctr">
+                      <a:solidFill>
+                        <a:srgbClr val="CDCECB"/>
+                      </a:solidFill>
+                      <a:prstDash val="solid"/>
+                      <a:round/>
+                      <a:headEnd type="none" w="med" len="med"/>
+                      <a:tailEnd type="none" w="med" len="med"/>
+                    </a:lnB>
+                  </a:tcPr>
+                </a:tc>
+                <a:tc>
+                  <a:txBody>
+                    <a:bodyPr/>
+                    <a:lstStyle/>
+                    <a:p>
+                      <a:pPr indent="0" marL="0">
+                        <a:buNone/>
+                      </a:pPr>
+                      <a:r>
+                        <a:rPr lang="en-US" sz="1100" dirty="0">
+                          <a:solidFill>
+                            <a:srgbClr val="3D3D3D"/>
+                          </a:solidFill>
+                          <a:latin typeface="Spoqa Han Sans Neo" pitchFamily="34" charset="0"/>
+                          <a:ea typeface="Spoqa Han Sans Neo" pitchFamily="34" charset="-122"/>
+                          <a:cs typeface="Spoqa Han Sans Neo" pitchFamily="34" charset="-120"/>
+                        </a:rPr>
+                        <a:t>피델리티자산운용</a:t>
+                      </a:r>
+                      <a:endParaRPr lang="en-US" sz="1100" dirty="0">
+                        <a:latin typeface="Spoqa Han Sans Neo" charset="0"/>
+                        <a:ea typeface="Spoqa Han Sans Neo" charset="0"/>
+                        <a:cs typeface="Spoqa Han Sans Neo" charset="0"/>
+                      </a:endParaRPr>
+                    </a:p>
+                  </a:txBody>
+                  <a:tcPr marL="91440" marR="91440" marT="45720" marB="45720" anchor="ctr">
+                    <a:lnL w="6350" cap="flat" cmpd="sng" algn="ctr">
+                      <a:solidFill>
+                        <a:srgbClr val="CDCECB"/>
+                      </a:solidFill>
+                      <a:prstDash val="solid"/>
+                      <a:round/>
+                      <a:headEnd type="none" w="med" len="med"/>
+                      <a:tailEnd type="none" w="med" len="med"/>
+                    </a:lnL>
+                    <a:lnR w="6350" cap="flat" cmpd="sng" algn="ctr">
+                      <a:solidFill>
+                        <a:srgbClr val="CDCECB"/>
+                      </a:solidFill>
+                      <a:prstDash val="solid"/>
+                      <a:round/>
+                      <a:headEnd type="none" w="med" len="med"/>
+                      <a:tailEnd type="none" w="med" len="med"/>
+                    </a:lnR>
+                    <a:lnT w="6350" cap="flat" cmpd="sng" algn="ctr">
+                      <a:solidFill>
+                        <a:srgbClr val="CDCECB"/>
+                      </a:solidFill>
+                      <a:prstDash val="solid"/>
+                      <a:round/>
+                      <a:headEnd type="none" w="med" len="med"/>
+                      <a:tailEnd type="none" w="med" len="med"/>
+                    </a:lnT>
+                    <a:lnB w="6350" cap="flat" cmpd="sng" algn="ctr">
+                      <a:solidFill>
+                        <a:srgbClr val="CDCECB"/>
+                      </a:solidFill>
+                      <a:prstDash val="solid"/>
+                      <a:round/>
+                      <a:headEnd type="none" w="med" len="med"/>
+                      <a:tailEnd type="none" w="med" len="med"/>
+                    </a:lnB>
+                  </a:tcPr>
+                </a:tc>
+                <a:tc>
+                  <a:txBody>
+                    <a:bodyPr/>
+                    <a:lstStyle/>
+                    <a:p>
+                      <a:pPr algn="r" indent="0" marL="0">
+                        <a:buNone/>
+                      </a:pPr>
+                      <a:r>
+                        <a:rPr lang="en-US" sz="1100" dirty="0">
+                          <a:solidFill>
+                            <a:srgbClr val="3D3D3D"/>
+                          </a:solidFill>
+                          <a:latin typeface="Spoqa Han Sans Neo" pitchFamily="34" charset="0"/>
+                          <a:ea typeface="Spoqa Han Sans Neo" pitchFamily="34" charset="-122"/>
+                          <a:cs typeface="Spoqa Han Sans Neo" pitchFamily="34" charset="-120"/>
+                        </a:rPr>
+                        <a:t>7,365억원</a:t>
+                      </a:r>
+                      <a:endParaRPr lang="en-US" sz="1100" dirty="0">
+                        <a:latin typeface="Spoqa Han Sans Neo" charset="0"/>
+                        <a:ea typeface="Spoqa Han Sans Neo" charset="0"/>
+                        <a:cs typeface="Spoqa Han Sans Neo" charset="0"/>
+                      </a:endParaRPr>
+                    </a:p>
+                  </a:txBody>
+                  <a:tcPr marL="91440" marR="91440" marT="45720" marB="45720" anchor="ctr">
+                    <a:lnL w="6350" cap="flat" cmpd="sng" algn="ctr">
+                      <a:solidFill>
+                        <a:srgbClr val="CDCECB"/>
+                      </a:solidFill>
+                      <a:prstDash val="solid"/>
+                      <a:round/>
+                      <a:headEnd type="none" w="med" len="med"/>
+                      <a:tailEnd type="none" w="med" len="med"/>
+                    </a:lnL>
+                    <a:lnR w="6350" cap="flat" cmpd="sng" algn="ctr">
+                      <a:solidFill>
+                        <a:srgbClr val="CDCECB"/>
+                      </a:solidFill>
+                      <a:prstDash val="solid"/>
+                      <a:round/>
+                      <a:headEnd type="none" w="med" len="med"/>
+                      <a:tailEnd type="none" w="med" len="med"/>
+                    </a:lnR>
+                    <a:lnT w="6350" cap="flat" cmpd="sng" algn="ctr">
+                      <a:solidFill>
+                        <a:srgbClr val="CDCECB"/>
+                      </a:solidFill>
+                      <a:prstDash val="solid"/>
+                      <a:round/>
+                      <a:headEnd type="none" w="med" len="med"/>
+                      <a:tailEnd type="none" w="med" len="med"/>
+                    </a:lnT>
+                    <a:lnB w="6350" cap="flat" cmpd="sng" algn="ctr">
+                      <a:solidFill>
+                        <a:srgbClr val="CDCECB"/>
+                      </a:solidFill>
+                      <a:prstDash val="solid"/>
+                      <a:round/>
+                      <a:headEnd type="none" w="med" len="med"/>
+                      <a:tailEnd type="none" w="med" len="med"/>
+                    </a:lnB>
+                  </a:tcPr>
+                </a:tc>
+                <a:tc>
+                  <a:txBody>
+                    <a:bodyPr/>
+                    <a:lstStyle/>
+                    <a:p>
+                      <a:pPr algn="r" indent="0" marL="0">
+                        <a:buNone/>
+                      </a:pPr>
+                      <a:r>
+                        <a:rPr lang="en-US" sz="1100" dirty="0">
+                          <a:solidFill>
+                            <a:srgbClr val="3D3D3D"/>
+                          </a:solidFill>
+                          <a:latin typeface="Spoqa Han Sans Neo" pitchFamily="34" charset="0"/>
+                          <a:ea typeface="Spoqa Han Sans Neo" pitchFamily="34" charset="-122"/>
+                          <a:cs typeface="Spoqa Han Sans Neo" pitchFamily="34" charset="-120"/>
+                        </a:rPr>
+                        <a:t>5.2%</a:t>
+                      </a:r>
+                      <a:endParaRPr lang="en-US" sz="1100" dirty="0">
+                        <a:latin typeface="Spoqa Han Sans Neo" charset="0"/>
+                        <a:ea typeface="Spoqa Han Sans Neo" charset="0"/>
+                        <a:cs typeface="Spoqa Han Sans Neo" charset="0"/>
+                      </a:endParaRPr>
+                    </a:p>
+                  </a:txBody>
+                  <a:tcPr marL="91440" marR="91440" marT="45720" marB="45720" anchor="ctr">
+                    <a:lnL w="6350" cap="flat" cmpd="sng" algn="ctr">
+                      <a:solidFill>
+                        <a:srgbClr val="CDCECB"/>
+                      </a:solidFill>
+                      <a:prstDash val="solid"/>
+                      <a:round/>
+                      <a:headEnd type="none" w="med" len="med"/>
+                      <a:tailEnd type="none" w="med" len="med"/>
+                    </a:lnL>
+                    <a:lnR w="6350" cap="flat" cmpd="sng" algn="ctr">
+                      <a:solidFill>
+                        <a:srgbClr val="CDCECB"/>
+                      </a:solidFill>
+                      <a:prstDash val="solid"/>
+                      <a:round/>
+                      <a:headEnd type="none" w="med" len="med"/>
+                      <a:tailEnd type="none" w="med" len="med"/>
+                    </a:lnR>
+                    <a:lnT w="6350" cap="flat" cmpd="sng" algn="ctr">
+                      <a:solidFill>
+                        <a:srgbClr val="CDCECB"/>
+                      </a:solidFill>
+                      <a:prstDash val="solid"/>
+                      <a:round/>
+                      <a:headEnd type="none" w="med" len="med"/>
+                      <a:tailEnd type="none" w="med" len="med"/>
+                    </a:lnT>
+                    <a:lnB w="6350" cap="flat" cmpd="sng" algn="ctr">
+                      <a:solidFill>
+                        <a:srgbClr val="CDCECB"/>
+                      </a:solidFill>
+                      <a:prstDash val="solid"/>
+                      <a:round/>
+                      <a:headEnd type="none" w="med" len="med"/>
+                      <a:tailEnd type="none" w="med" len="med"/>
+                    </a:lnB>
+                  </a:tcPr>
+                </a:tc>
+                <a:tc>
+                  <a:txBody>
+                    <a:bodyPr/>
+                    <a:lstStyle/>
+                    <a:p>
+                      <a:pPr algn="r" indent="0" marL="0">
+                        <a:buNone/>
+                      </a:pPr>
+                      <a:r>
+                        <a:rPr lang="en-US" sz="1100" dirty="0">
+                          <a:solidFill>
+                            <a:srgbClr val="6C6C6C"/>
+                          </a:solidFill>
+                          <a:latin typeface="Spoqa Han Sans Neo" pitchFamily="34" charset="0"/>
+                          <a:ea typeface="Spoqa Han Sans Neo" pitchFamily="34" charset="-122"/>
+                          <a:cs typeface="Spoqa Han Sans Neo" pitchFamily="34" charset="-120"/>
+                        </a:rPr>
+                        <a:t>—</a:t>
+                      </a:r>
+                      <a:endParaRPr lang="en-US" sz="1100" dirty="0">
+                        <a:latin typeface="Spoqa Han Sans Neo" charset="0"/>
+                        <a:ea typeface="Spoqa Han Sans Neo" charset="0"/>
+                        <a:cs typeface="Spoqa Han Sans Neo" charset="0"/>
+                      </a:endParaRPr>
+                    </a:p>
+                  </a:txBody>
+                  <a:tcPr marL="91440" marR="91440" marT="45720" marB="45720" anchor="ctr">
+                    <a:lnL w="6350" cap="flat" cmpd="sng" algn="ctr">
+                      <a:solidFill>
+                        <a:srgbClr val="CDCECB"/>
+                      </a:solidFill>
+                      <a:prstDash val="solid"/>
+                      <a:round/>
+                      <a:headEnd type="none" w="med" len="med"/>
+                      <a:tailEnd type="none" w="med" len="med"/>
+                    </a:lnL>
+                    <a:lnR w="6350" cap="flat" cmpd="sng" algn="ctr">
+                      <a:solidFill>
+                        <a:srgbClr val="CDCECB"/>
+                      </a:solidFill>
+                      <a:prstDash val="solid"/>
+                      <a:round/>
+                      <a:headEnd type="none" w="med" len="med"/>
+                      <a:tailEnd type="none" w="med" len="med"/>
+                    </a:lnR>
+                    <a:lnT w="6350" cap="flat" cmpd="sng" algn="ctr">
+                      <a:solidFill>
+                        <a:srgbClr val="CDCECB"/>
+                      </a:solidFill>
+                      <a:prstDash val="solid"/>
+                      <a:round/>
+                      <a:headEnd type="none" w="med" len="med"/>
+                      <a:tailEnd type="none" w="med" len="med"/>
+                    </a:lnT>
+                    <a:lnB w="6350" cap="flat" cmpd="sng" algn="ctr">
+                      <a:solidFill>
+                        <a:srgbClr val="CDCECB"/>
+                      </a:solidFill>
+                      <a:prstDash val="solid"/>
+                      <a:round/>
+                      <a:headEnd type="none" w="med" len="med"/>
+                      <a:tailEnd type="none" w="med" len="med"/>
+                    </a:lnB>
+                  </a:tcPr>
+                </a:tc>
+                <a:tc>
+                  <a:txBody>
+                    <a:bodyPr/>
+                    <a:lstStyle/>
+                    <a:p>
+                      <a:pPr algn="r" indent="0" marL="0">
+                        <a:buNone/>
+                      </a:pPr>
+                      <a:r>
+                        <a:rPr lang="en-US" sz="1100" dirty="0">
+                          <a:solidFill>
+                            <a:srgbClr val="3D3D3D"/>
+                          </a:solidFill>
+                          <a:latin typeface="Spoqa Han Sans Neo" pitchFamily="34" charset="0"/>
+                          <a:ea typeface="Spoqa Han Sans Neo" pitchFamily="34" charset="-122"/>
+                          <a:cs typeface="Spoqa Han Sans Neo" pitchFamily="34" charset="-120"/>
+                        </a:rPr>
+                        <a:t>0.37~1.17%</a:t>
+                      </a:r>
+                      <a:endParaRPr lang="en-US" sz="1100" dirty="0">
+                        <a:latin typeface="Spoqa Han Sans Neo" charset="0"/>
+                        <a:ea typeface="Spoqa Han Sans Neo" charset="0"/>
+                        <a:cs typeface="Spoqa Han Sans Neo" charset="0"/>
+                      </a:endParaRPr>
+                    </a:p>
+                  </a:txBody>
+                  <a:tcPr marL="91440" marR="91440" marT="45720" marB="45720" anchor="ctr">
+                    <a:lnL w="6350" cap="flat" cmpd="sng" algn="ctr">
+                      <a:solidFill>
+                        <a:srgbClr val="CDCECB"/>
+                      </a:solidFill>
+                      <a:prstDash val="solid"/>
+                      <a:round/>
+                      <a:headEnd type="none" w="med" len="med"/>
+                      <a:tailEnd type="none" w="med" len="med"/>
+                    </a:lnL>
+                    <a:lnR w="6350" cap="flat" cmpd="sng" algn="ctr">
+                      <a:solidFill>
+                        <a:srgbClr val="CDCECB"/>
+                      </a:solidFill>
+                      <a:prstDash val="solid"/>
+                      <a:round/>
+                      <a:headEnd type="none" w="med" len="med"/>
+                      <a:tailEnd type="none" w="med" len="med"/>
+                    </a:lnR>
+                    <a:lnT w="6350" cap="flat" cmpd="sng" algn="ctr">
+                      <a:solidFill>
+                        <a:srgbClr val="CDCECB"/>
+                      </a:solidFill>
+                      <a:prstDash val="solid"/>
+                      <a:round/>
+                      <a:headEnd type="none" w="med" len="med"/>
+                      <a:tailEnd type="none" w="med" len="med"/>
+                    </a:lnT>
+                    <a:lnB w="6350" cap="flat" cmpd="sng" algn="ctr">
+                      <a:solidFill>
+                        <a:srgbClr val="CDCECB"/>
+                      </a:solidFill>
+                      <a:prstDash val="solid"/>
+                      <a:round/>
+                      <a:headEnd type="none" w="med" len="med"/>
+                      <a:tailEnd type="none" w="med" len="med"/>
+                    </a:lnB>
+                  </a:tcPr>
+                </a:tc>
+              </a:tr>
+              <a:tr h="256032">
+                <a:tc>
+                  <a:txBody>
+                    <a:bodyPr/>
+                    <a:lstStyle/>
+                    <a:p>
+                      <a:pPr indent="0" marL="0">
+                        <a:buNone/>
+                      </a:pPr>
+                      <a:r>
+                        <a:rPr lang="en-US" sz="1100" dirty="0">
+                          <a:solidFill>
+                            <a:srgbClr val="3D3D3D"/>
+                          </a:solidFill>
+                          <a:latin typeface="Spoqa Han Sans Neo" pitchFamily="34" charset="0"/>
+                          <a:ea typeface="Spoqa Han Sans Neo" pitchFamily="34" charset="-122"/>
+                          <a:cs typeface="Spoqa Han Sans Neo" pitchFamily="34" charset="-120"/>
+                        </a:rPr>
+                        <a:t>피델리티글로벌배당인컴증권자투자신탁(주식-재간접형)</a:t>
+                      </a:r>
+                      <a:endParaRPr lang="en-US" sz="1100" dirty="0">
+                        <a:latin typeface="Spoqa Han Sans Neo" charset="0"/>
+                        <a:ea typeface="Spoqa Han Sans Neo" charset="0"/>
+                        <a:cs typeface="Spoqa Han Sans Neo" charset="0"/>
+                      </a:endParaRPr>
+                    </a:p>
+                  </a:txBody>
+                  <a:tcPr marL="91440" marR="91440" marT="45720" marB="45720" anchor="ctr">
+                    <a:lnL w="6350" cap="flat" cmpd="sng" algn="ctr">
+                      <a:solidFill>
+                        <a:srgbClr val="CDCECB"/>
+                      </a:solidFill>
+                      <a:prstDash val="solid"/>
+                      <a:round/>
+                      <a:headEnd type="none" w="med" len="med"/>
+                      <a:tailEnd type="none" w="med" len="med"/>
+                    </a:lnL>
+                    <a:lnR w="6350" cap="flat" cmpd="sng" algn="ctr">
+                      <a:solidFill>
+                        <a:srgbClr val="CDCECB"/>
+                      </a:solidFill>
+                      <a:prstDash val="solid"/>
+                      <a:round/>
+                      <a:headEnd type="none" w="med" len="med"/>
+                      <a:tailEnd type="none" w="med" len="med"/>
+                    </a:lnR>
+                    <a:lnT w="6350" cap="flat" cmpd="sng" algn="ctr">
+                      <a:solidFill>
+                        <a:srgbClr val="CDCECB"/>
+                      </a:solidFill>
+                      <a:prstDash val="solid"/>
+                      <a:round/>
+                      <a:headEnd type="none" w="med" len="med"/>
+                      <a:tailEnd type="none" w="med" len="med"/>
+                    </a:lnT>
+                    <a:lnB w="6350" cap="flat" cmpd="sng" algn="ctr">
+                      <a:solidFill>
+                        <a:srgbClr val="CDCECB"/>
+                      </a:solidFill>
+                      <a:prstDash val="solid"/>
+                      <a:round/>
+                      <a:headEnd type="none" w="med" len="med"/>
+                      <a:tailEnd type="none" w="med" len="med"/>
+                    </a:lnB>
+                  </a:tcPr>
+                </a:tc>
+                <a:tc>
+                  <a:txBody>
+                    <a:bodyPr/>
+                    <a:lstStyle/>
+                    <a:p>
+                      <a:pPr indent="0" marL="0">
+                        <a:buNone/>
+                      </a:pPr>
+                      <a:r>
+                        <a:rPr lang="en-US" sz="1100" dirty="0">
+                          <a:solidFill>
+                            <a:srgbClr val="3D3D3D"/>
+                          </a:solidFill>
+                          <a:latin typeface="Spoqa Han Sans Neo" pitchFamily="34" charset="0"/>
+                          <a:ea typeface="Spoqa Han Sans Neo" pitchFamily="34" charset="-122"/>
+                          <a:cs typeface="Spoqa Han Sans Neo" pitchFamily="34" charset="-120"/>
+                        </a:rPr>
+                        <a:t>해외주식형</a:t>
+                      </a:r>
+                      <a:endParaRPr lang="en-US" sz="1100" dirty="0">
+                        <a:latin typeface="Spoqa Han Sans Neo" charset="0"/>
+                        <a:ea typeface="Spoqa Han Sans Neo" charset="0"/>
+                        <a:cs typeface="Spoqa Han Sans Neo" charset="0"/>
+                      </a:endParaRPr>
+                    </a:p>
+                  </a:txBody>
+                  <a:tcPr marL="91440" marR="91440" marT="45720" marB="45720" anchor="ctr">
+                    <a:lnL w="6350" cap="flat" cmpd="sng" algn="ctr">
+                      <a:solidFill>
+                        <a:srgbClr val="CDCECB"/>
+                      </a:solidFill>
+                      <a:prstDash val="solid"/>
+                      <a:round/>
+                      <a:headEnd type="none" w="med" len="med"/>
+                      <a:tailEnd type="none" w="med" len="med"/>
+                    </a:lnL>
+                    <a:lnR w="6350" cap="flat" cmpd="sng" algn="ctr">
+                      <a:solidFill>
+                        <a:srgbClr val="CDCECB"/>
+                      </a:solidFill>
+                      <a:prstDash val="solid"/>
+                      <a:round/>
+                      <a:headEnd type="none" w="med" len="med"/>
+                      <a:tailEnd type="none" w="med" len="med"/>
+                    </a:lnR>
+                    <a:lnT w="6350" cap="flat" cmpd="sng" algn="ctr">
+                      <a:solidFill>
+                        <a:srgbClr val="CDCECB"/>
+                      </a:solidFill>
+                      <a:prstDash val="solid"/>
+                      <a:round/>
+                      <a:headEnd type="none" w="med" len="med"/>
+                      <a:tailEnd type="none" w="med" len="med"/>
+                    </a:lnT>
+                    <a:lnB w="6350" cap="flat" cmpd="sng" algn="ctr">
+                      <a:solidFill>
+                        <a:srgbClr val="CDCECB"/>
+                      </a:solidFill>
+                      <a:prstDash val="solid"/>
+                      <a:round/>
+                      <a:headEnd type="none" w="med" len="med"/>
+                      <a:tailEnd type="none" w="med" len="med"/>
+                    </a:lnB>
+                  </a:tcPr>
+                </a:tc>
+                <a:tc>
+                  <a:txBody>
+                    <a:bodyPr/>
+                    <a:lstStyle/>
+                    <a:p>
+                      <a:pPr indent="0" marL="0">
+                        <a:buNone/>
+                      </a:pPr>
+                      <a:r>
+                        <a:rPr lang="en-US" sz="1100" dirty="0">
+                          <a:solidFill>
+                            <a:srgbClr val="3D3D3D"/>
+                          </a:solidFill>
+                          <a:latin typeface="Spoqa Han Sans Neo" pitchFamily="34" charset="0"/>
+                          <a:ea typeface="Spoqa Han Sans Neo" pitchFamily="34" charset="-122"/>
+                          <a:cs typeface="Spoqa Han Sans Neo" pitchFamily="34" charset="-120"/>
+                        </a:rPr>
+                        <a:t>피델리티자산운용</a:t>
+                      </a:r>
+                      <a:endParaRPr lang="en-US" sz="1100" dirty="0">
+                        <a:latin typeface="Spoqa Han Sans Neo" charset="0"/>
+                        <a:ea typeface="Spoqa Han Sans Neo" charset="0"/>
+                        <a:cs typeface="Spoqa Han Sans Neo" charset="0"/>
+                      </a:endParaRPr>
+                    </a:p>
+                  </a:txBody>
+                  <a:tcPr marL="91440" marR="91440" marT="45720" marB="45720" anchor="ctr">
+                    <a:lnL w="6350" cap="flat" cmpd="sng" algn="ctr">
+                      <a:solidFill>
+                        <a:srgbClr val="CDCECB"/>
+                      </a:solidFill>
+                      <a:prstDash val="solid"/>
+                      <a:round/>
+                      <a:headEnd type="none" w="med" len="med"/>
+                      <a:tailEnd type="none" w="med" len="med"/>
+                    </a:lnL>
+                    <a:lnR w="6350" cap="flat" cmpd="sng" algn="ctr">
+                      <a:solidFill>
+                        <a:srgbClr val="CDCECB"/>
+                      </a:solidFill>
+                      <a:prstDash val="solid"/>
+                      <a:round/>
+                      <a:headEnd type="none" w="med" len="med"/>
+                      <a:tailEnd type="none" w="med" len="med"/>
+                    </a:lnR>
+                    <a:lnT w="6350" cap="flat" cmpd="sng" algn="ctr">
+                      <a:solidFill>
+                        <a:srgbClr val="CDCECB"/>
+                      </a:solidFill>
+                      <a:prstDash val="solid"/>
+                      <a:round/>
+                      <a:headEnd type="none" w="med" len="med"/>
+                      <a:tailEnd type="none" w="med" len="med"/>
+                    </a:lnT>
+                    <a:lnB w="6350" cap="flat" cmpd="sng" algn="ctr">
+                      <a:solidFill>
+                        <a:srgbClr val="CDCECB"/>
+                      </a:solidFill>
+                      <a:prstDash val="solid"/>
+                      <a:round/>
+                      <a:headEnd type="none" w="med" len="med"/>
+                      <a:tailEnd type="none" w="med" len="med"/>
+                    </a:lnB>
+                  </a:tcPr>
+                </a:tc>
+                <a:tc>
+                  <a:txBody>
+                    <a:bodyPr/>
+                    <a:lstStyle/>
+                    <a:p>
+                      <a:pPr algn="r" indent="0" marL="0">
+                        <a:buNone/>
+                      </a:pPr>
+                      <a:r>
+                        <a:rPr lang="en-US" sz="1100" dirty="0">
+                          <a:solidFill>
+                            <a:srgbClr val="3D3D3D"/>
+                          </a:solidFill>
+                          <a:latin typeface="Spoqa Han Sans Neo" pitchFamily="34" charset="0"/>
+                          <a:ea typeface="Spoqa Han Sans Neo" pitchFamily="34" charset="-122"/>
+                          <a:cs typeface="Spoqa Han Sans Neo" pitchFamily="34" charset="-120"/>
+                        </a:rPr>
+                        <a:t>5,716억원</a:t>
+                      </a:r>
+                      <a:endParaRPr lang="en-US" sz="1100" dirty="0">
+                        <a:latin typeface="Spoqa Han Sans Neo" charset="0"/>
+                        <a:ea typeface="Spoqa Han Sans Neo" charset="0"/>
+                        <a:cs typeface="Spoqa Han Sans Neo" charset="0"/>
+                      </a:endParaRPr>
+                    </a:p>
+                  </a:txBody>
+                  <a:tcPr marL="91440" marR="91440" marT="45720" marB="45720" anchor="ctr">
+                    <a:lnL w="6350" cap="flat" cmpd="sng" algn="ctr">
+                      <a:solidFill>
+                        <a:srgbClr val="CDCECB"/>
+                      </a:solidFill>
+                      <a:prstDash val="solid"/>
+                      <a:round/>
+                      <a:headEnd type="none" w="med" len="med"/>
+                      <a:tailEnd type="none" w="med" len="med"/>
+                    </a:lnL>
+                    <a:lnR w="6350" cap="flat" cmpd="sng" algn="ctr">
+                      <a:solidFill>
+                        <a:srgbClr val="CDCECB"/>
+                      </a:solidFill>
+                      <a:prstDash val="solid"/>
+                      <a:round/>
+                      <a:headEnd type="none" w="med" len="med"/>
+                      <a:tailEnd type="none" w="med" len="med"/>
+                    </a:lnR>
+                    <a:lnT w="6350" cap="flat" cmpd="sng" algn="ctr">
+                      <a:solidFill>
+                        <a:srgbClr val="CDCECB"/>
+                      </a:solidFill>
+                      <a:prstDash val="solid"/>
+                      <a:round/>
+                      <a:headEnd type="none" w="med" len="med"/>
+                      <a:tailEnd type="none" w="med" len="med"/>
+                    </a:lnT>
+                    <a:lnB w="6350" cap="flat" cmpd="sng" algn="ctr">
+                      <a:solidFill>
+                        <a:srgbClr val="CDCECB"/>
+                      </a:solidFill>
+                      <a:prstDash val="solid"/>
+                      <a:round/>
+                      <a:headEnd type="none" w="med" len="med"/>
+                      <a:tailEnd type="none" w="med" len="med"/>
+                    </a:lnB>
+                  </a:tcPr>
+                </a:tc>
+                <a:tc>
+                  <a:txBody>
+                    <a:bodyPr/>
+                    <a:lstStyle/>
+                    <a:p>
+                      <a:pPr algn="r" indent="0" marL="0">
+                        <a:buNone/>
+                      </a:pPr>
+                      <a:r>
+                        <a:rPr lang="en-US" sz="1100" dirty="0">
+                          <a:solidFill>
+                            <a:srgbClr val="3D3D3D"/>
+                          </a:solidFill>
+                          <a:latin typeface="Spoqa Han Sans Neo" pitchFamily="34" charset="0"/>
+                          <a:ea typeface="Spoqa Han Sans Neo" pitchFamily="34" charset="-122"/>
+                          <a:cs typeface="Spoqa Han Sans Neo" pitchFamily="34" charset="-120"/>
+                        </a:rPr>
+                        <a:t>10.8%</a:t>
+                      </a:r>
+                      <a:endParaRPr lang="en-US" sz="1100" dirty="0">
+                        <a:latin typeface="Spoqa Han Sans Neo" charset="0"/>
+                        <a:ea typeface="Spoqa Han Sans Neo" charset="0"/>
+                        <a:cs typeface="Spoqa Han Sans Neo" charset="0"/>
+                      </a:endParaRPr>
+                    </a:p>
+                  </a:txBody>
+                  <a:tcPr marL="91440" marR="91440" marT="45720" marB="45720" anchor="ctr">
+                    <a:lnL w="6350" cap="flat" cmpd="sng" algn="ctr">
+                      <a:solidFill>
+                        <a:srgbClr val="CDCECB"/>
+                      </a:solidFill>
+                      <a:prstDash val="solid"/>
+                      <a:round/>
+                      <a:headEnd type="none" w="med" len="med"/>
+                      <a:tailEnd type="none" w="med" len="med"/>
+                    </a:lnL>
+                    <a:lnR w="6350" cap="flat" cmpd="sng" algn="ctr">
+                      <a:solidFill>
+                        <a:srgbClr val="CDCECB"/>
+                      </a:solidFill>
+                      <a:prstDash val="solid"/>
+                      <a:round/>
+                      <a:headEnd type="none" w="med" len="med"/>
+                      <a:tailEnd type="none" w="med" len="med"/>
+                    </a:lnR>
+                    <a:lnT w="6350" cap="flat" cmpd="sng" algn="ctr">
+                      <a:solidFill>
+                        <a:srgbClr val="CDCECB"/>
+                      </a:solidFill>
+                      <a:prstDash val="solid"/>
+                      <a:round/>
+                      <a:headEnd type="none" w="med" len="med"/>
+                      <a:tailEnd type="none" w="med" len="med"/>
+                    </a:lnT>
+                    <a:lnB w="6350" cap="flat" cmpd="sng" algn="ctr">
+                      <a:solidFill>
+                        <a:srgbClr val="CDCECB"/>
+                      </a:solidFill>
+                      <a:prstDash val="solid"/>
+                      <a:round/>
+                      <a:headEnd type="none" w="med" len="med"/>
+                      <a:tailEnd type="none" w="med" len="med"/>
+                    </a:lnB>
+                  </a:tcPr>
+                </a:tc>
+                <a:tc>
+                  <a:txBody>
+                    <a:bodyPr/>
+                    <a:lstStyle/>
+                    <a:p>
+                      <a:pPr algn="r" indent="0" marL="0">
+                        <a:buNone/>
+                      </a:pPr>
+                      <a:r>
+                        <a:rPr lang="en-US" sz="1100" dirty="0">
+                          <a:solidFill>
+                            <a:srgbClr val="6C6C6C"/>
+                          </a:solidFill>
+                          <a:latin typeface="Spoqa Han Sans Neo" pitchFamily="34" charset="0"/>
+                          <a:ea typeface="Spoqa Han Sans Neo" pitchFamily="34" charset="-122"/>
+                          <a:cs typeface="Spoqa Han Sans Neo" pitchFamily="34" charset="-120"/>
+                        </a:rPr>
+                        <a:t>—</a:t>
+                      </a:r>
+                      <a:endParaRPr lang="en-US" sz="1100" dirty="0">
+                        <a:latin typeface="Spoqa Han Sans Neo" charset="0"/>
+                        <a:ea typeface="Spoqa Han Sans Neo" charset="0"/>
+                        <a:cs typeface="Spoqa Han Sans Neo" charset="0"/>
+                      </a:endParaRPr>
+                    </a:p>
+                  </a:txBody>
+                  <a:tcPr marL="91440" marR="91440" marT="45720" marB="45720" anchor="ctr">
+                    <a:lnL w="6350" cap="flat" cmpd="sng" algn="ctr">
+                      <a:solidFill>
+                        <a:srgbClr val="CDCECB"/>
+                      </a:solidFill>
+                      <a:prstDash val="solid"/>
+                      <a:round/>
+                      <a:headEnd type="none" w="med" len="med"/>
+                      <a:tailEnd type="none" w="med" len="med"/>
+                    </a:lnL>
+                    <a:lnR w="6350" cap="flat" cmpd="sng" algn="ctr">
+                      <a:solidFill>
+                        <a:srgbClr val="CDCECB"/>
+                      </a:solidFill>
+                      <a:prstDash val="solid"/>
+                      <a:round/>
+                      <a:headEnd type="none" w="med" len="med"/>
+                      <a:tailEnd type="none" w="med" len="med"/>
+                    </a:lnR>
+                    <a:lnT w="6350" cap="flat" cmpd="sng" algn="ctr">
+                      <a:solidFill>
+                        <a:srgbClr val="CDCECB"/>
+                      </a:solidFill>
+                      <a:prstDash val="solid"/>
+                      <a:round/>
+                      <a:headEnd type="none" w="med" len="med"/>
+                      <a:tailEnd type="none" w="med" len="med"/>
+                    </a:lnT>
+                    <a:lnB w="6350" cap="flat" cmpd="sng" algn="ctr">
+                      <a:solidFill>
+                        <a:srgbClr val="CDCECB"/>
+                      </a:solidFill>
+                      <a:prstDash val="solid"/>
+                      <a:round/>
+                      <a:headEnd type="none" w="med" len="med"/>
+                      <a:tailEnd type="none" w="med" len="med"/>
+                    </a:lnB>
+                  </a:tcPr>
+                </a:tc>
+                <a:tc>
+                  <a:txBody>
+                    <a:bodyPr/>
+                    <a:lstStyle/>
+                    <a:p>
+                      <a:pPr algn="r" indent="0" marL="0">
+                        <a:buNone/>
+                      </a:pPr>
+                      <a:r>
+                        <a:rPr lang="en-US" sz="1100" dirty="0">
+                          <a:solidFill>
+                            <a:srgbClr val="3D3D3D"/>
+                          </a:solidFill>
+                          <a:latin typeface="Spoqa Han Sans Neo" pitchFamily="34" charset="0"/>
+                          <a:ea typeface="Spoqa Han Sans Neo" pitchFamily="34" charset="-122"/>
+                          <a:cs typeface="Spoqa Han Sans Neo" pitchFamily="34" charset="-120"/>
+                        </a:rPr>
+                        <a:t>0.16~1.36%</a:t>
+                      </a:r>
+                      <a:endParaRPr lang="en-US" sz="1100" dirty="0">
+                        <a:latin typeface="Spoqa Han Sans Neo" charset="0"/>
+                        <a:ea typeface="Spoqa Han Sans Neo" charset="0"/>
+                        <a:cs typeface="Spoqa Han Sans Neo" charset="0"/>
+                      </a:endParaRPr>
+                    </a:p>
+                  </a:txBody>
+                  <a:tcPr marL="91440" marR="91440" marT="45720" marB="45720" anchor="ctr">
+                    <a:lnL w="6350" cap="flat" cmpd="sng" algn="ctr">
+                      <a:solidFill>
+                        <a:srgbClr val="CDCECB"/>
+                      </a:solidFill>
+                      <a:prstDash val="solid"/>
+                      <a:round/>
+                      <a:headEnd type="none" w="med" len="med"/>
+                      <a:tailEnd type="none" w="med" len="med"/>
+                    </a:lnL>
+                    <a:lnR w="6350" cap="flat" cmpd="sng" algn="ctr">
+                      <a:solidFill>
+                        <a:srgbClr val="CDCECB"/>
+                      </a:solidFill>
+                      <a:prstDash val="solid"/>
+                      <a:round/>
+                      <a:headEnd type="none" w="med" len="med"/>
+                      <a:tailEnd type="none" w="med" len="med"/>
+                    </a:lnR>
+                    <a:lnT w="6350" cap="flat" cmpd="sng" algn="ctr">
+                      <a:solidFill>
+                        <a:srgbClr val="CDCECB"/>
+                      </a:solidFill>
+                      <a:prstDash val="solid"/>
+                      <a:round/>
+                      <a:headEnd type="none" w="med" len="med"/>
+                      <a:tailEnd type="none" w="med" len="med"/>
+                    </a:lnT>
+                    <a:lnB w="6350" cap="flat" cmpd="sng" algn="ctr">
+                      <a:solidFill>
+                        <a:srgbClr val="CDCECB"/>
+                      </a:solidFill>
+                      <a:prstDash val="solid"/>
+                      <a:round/>
+                      <a:headEnd type="none" w="med" len="med"/>
+                      <a:tailEnd type="none" w="med" len="med"/>
+                    </a:lnB>
+                  </a:tcPr>
+                </a:tc>
+              </a:tr>
+              <a:tr h="256032">
+                <a:tc>
+                  <a:txBody>
+                    <a:bodyPr/>
+                    <a:lstStyle/>
+                    <a:p>
+                      <a:pPr indent="0" marL="0">
+                        <a:buNone/>
+                      </a:pPr>
+                      <a:r>
+                        <a:rPr lang="en-US" sz="1100" dirty="0">
+                          <a:solidFill>
+                            <a:srgbClr val="3D3D3D"/>
+                          </a:solidFill>
+                          <a:latin typeface="Spoqa Han Sans Neo" pitchFamily="34" charset="0"/>
+                          <a:ea typeface="Spoqa Han Sans Neo" pitchFamily="34" charset="-122"/>
+                          <a:cs typeface="Spoqa Han Sans Neo" pitchFamily="34" charset="-120"/>
+                        </a:rPr>
+                        <a:t>AB월지급글로벌고수익증권투자신탁[채권-재간접형]</a:t>
+                      </a:r>
+                      <a:endParaRPr lang="en-US" sz="1100" dirty="0">
+                        <a:latin typeface="Spoqa Han Sans Neo" charset="0"/>
+                        <a:ea typeface="Spoqa Han Sans Neo" charset="0"/>
+                        <a:cs typeface="Spoqa Han Sans Neo" charset="0"/>
+                      </a:endParaRPr>
+                    </a:p>
+                  </a:txBody>
+                  <a:tcPr marL="91440" marR="91440" marT="45720" marB="45720" anchor="ctr">
+                    <a:lnL w="6350" cap="flat" cmpd="sng" algn="ctr">
+                      <a:solidFill>
+                        <a:srgbClr val="CDCECB"/>
+                      </a:solidFill>
+                      <a:prstDash val="solid"/>
+                      <a:round/>
+                      <a:headEnd type="none" w="med" len="med"/>
+                      <a:tailEnd type="none" w="med" len="med"/>
+                    </a:lnL>
+                    <a:lnR w="6350" cap="flat" cmpd="sng" algn="ctr">
+                      <a:solidFill>
+                        <a:srgbClr val="CDCECB"/>
+                      </a:solidFill>
+                      <a:prstDash val="solid"/>
+                      <a:round/>
+                      <a:headEnd type="none" w="med" len="med"/>
+                      <a:tailEnd type="none" w="med" len="med"/>
+                    </a:lnR>
+                    <a:lnT w="6350" cap="flat" cmpd="sng" algn="ctr">
+                      <a:solidFill>
+                        <a:srgbClr val="CDCECB"/>
+                      </a:solidFill>
+                      <a:prstDash val="solid"/>
+                      <a:round/>
+                      <a:headEnd type="none" w="med" len="med"/>
+                      <a:tailEnd type="none" w="med" len="med"/>
+                    </a:lnT>
+                    <a:lnB w="6350" cap="flat" cmpd="sng" algn="ctr">
+                      <a:solidFill>
+                        <a:srgbClr val="CDCECB"/>
+                      </a:solidFill>
+                      <a:prstDash val="solid"/>
+                      <a:round/>
+                      <a:headEnd type="none" w="med" len="med"/>
+                      <a:tailEnd type="none" w="med" len="med"/>
+                    </a:lnB>
+                  </a:tcPr>
+                </a:tc>
+                <a:tc>
+                  <a:txBody>
+                    <a:bodyPr/>
+                    <a:lstStyle/>
+                    <a:p>
+                      <a:pPr indent="0" marL="0">
+                        <a:buNone/>
+                      </a:pPr>
+                      <a:r>
+                        <a:rPr lang="en-US" sz="1100" dirty="0">
+                          <a:solidFill>
+                            <a:srgbClr val="3D3D3D"/>
+                          </a:solidFill>
+                          <a:latin typeface="Spoqa Han Sans Neo" pitchFamily="34" charset="0"/>
+                          <a:ea typeface="Spoqa Han Sans Neo" pitchFamily="34" charset="-122"/>
+                          <a:cs typeface="Spoqa Han Sans Neo" pitchFamily="34" charset="-120"/>
+                        </a:rPr>
+                        <a:t>해외채권형</a:t>
+                      </a:r>
+                      <a:endParaRPr lang="en-US" sz="1100" dirty="0">
+                        <a:latin typeface="Spoqa Han Sans Neo" charset="0"/>
+                        <a:ea typeface="Spoqa Han Sans Neo" charset="0"/>
+                        <a:cs typeface="Spoqa Han Sans Neo" charset="0"/>
+                      </a:endParaRPr>
+                    </a:p>
+                  </a:txBody>
+                  <a:tcPr marL="91440" marR="91440" marT="45720" marB="45720" anchor="ctr">
+                    <a:lnL w="6350" cap="flat" cmpd="sng" algn="ctr">
+                      <a:solidFill>
+                        <a:srgbClr val="CDCECB"/>
+                      </a:solidFill>
+                      <a:prstDash val="solid"/>
+                      <a:round/>
+                      <a:headEnd type="none" w="med" len="med"/>
+                      <a:tailEnd type="none" w="med" len="med"/>
+                    </a:lnL>
+                    <a:lnR w="6350" cap="flat" cmpd="sng" algn="ctr">
+                      <a:solidFill>
+                        <a:srgbClr val="CDCECB"/>
+                      </a:solidFill>
+                      <a:prstDash val="solid"/>
+                      <a:round/>
+                      <a:headEnd type="none" w="med" len="med"/>
+                      <a:tailEnd type="none" w="med" len="med"/>
+                    </a:lnR>
+                    <a:lnT w="6350" cap="flat" cmpd="sng" algn="ctr">
+                      <a:solidFill>
+                        <a:srgbClr val="CDCECB"/>
+                      </a:solidFill>
+                      <a:prstDash val="solid"/>
+                      <a:round/>
+                      <a:headEnd type="none" w="med" len="med"/>
+                      <a:tailEnd type="none" w="med" len="med"/>
+                    </a:lnT>
+                    <a:lnB w="6350" cap="flat" cmpd="sng" algn="ctr">
+                      <a:solidFill>
+                        <a:srgbClr val="CDCECB"/>
+                      </a:solidFill>
+                      <a:prstDash val="solid"/>
+                      <a:round/>
+                      <a:headEnd type="none" w="med" len="med"/>
+                      <a:tailEnd type="none" w="med" len="med"/>
+                    </a:lnB>
+                  </a:tcPr>
+                </a:tc>
+                <a:tc>
+                  <a:txBody>
+                    <a:bodyPr/>
+                    <a:lstStyle/>
+                    <a:p>
+                      <a:pPr indent="0" marL="0">
+                        <a:buNone/>
+                      </a:pPr>
+                      <a:r>
+                        <a:rPr lang="en-US" sz="1100" dirty="0">
+                          <a:solidFill>
+                            <a:srgbClr val="3D3D3D"/>
+                          </a:solidFill>
+                          <a:latin typeface="Spoqa Han Sans Neo" pitchFamily="34" charset="0"/>
+                          <a:ea typeface="Spoqa Han Sans Neo" pitchFamily="34" charset="-122"/>
+                          <a:cs typeface="Spoqa Han Sans Neo" pitchFamily="34" charset="-120"/>
+                        </a:rPr>
+                        <a:t>얼라이언스번스틴자산운용</a:t>
+                      </a:r>
+                      <a:endParaRPr lang="en-US" sz="1100" dirty="0">
+                        <a:latin typeface="Spoqa Han Sans Neo" charset="0"/>
+                        <a:ea typeface="Spoqa Han Sans Neo" charset="0"/>
+                        <a:cs typeface="Spoqa Han Sans Neo" charset="0"/>
+                      </a:endParaRPr>
+                    </a:p>
+                  </a:txBody>
+                  <a:tcPr marL="91440" marR="91440" marT="45720" marB="45720" anchor="ctr">
+                    <a:lnL w="6350" cap="flat" cmpd="sng" algn="ctr">
+                      <a:solidFill>
+                        <a:srgbClr val="CDCECB"/>
+                      </a:solidFill>
+                      <a:prstDash val="solid"/>
+                      <a:round/>
+                      <a:headEnd type="none" w="med" len="med"/>
+                      <a:tailEnd type="none" w="med" len="med"/>
+                    </a:lnL>
+                    <a:lnR w="6350" cap="flat" cmpd="sng" algn="ctr">
+                      <a:solidFill>
+                        <a:srgbClr val="CDCECB"/>
+                      </a:solidFill>
+                      <a:prstDash val="solid"/>
+                      <a:round/>
+                      <a:headEnd type="none" w="med" len="med"/>
+                      <a:tailEnd type="none" w="med" len="med"/>
+                    </a:lnR>
+                    <a:lnT w="6350" cap="flat" cmpd="sng" algn="ctr">
+                      <a:solidFill>
+                        <a:srgbClr val="CDCECB"/>
+                      </a:solidFill>
+                      <a:prstDash val="solid"/>
+                      <a:round/>
+                      <a:headEnd type="none" w="med" len="med"/>
+                      <a:tailEnd type="none" w="med" len="med"/>
+                    </a:lnT>
+                    <a:lnB w="6350" cap="flat" cmpd="sng" algn="ctr">
+                      <a:solidFill>
+                        <a:srgbClr val="CDCECB"/>
+                      </a:solidFill>
+                      <a:prstDash val="solid"/>
+                      <a:round/>
+                      <a:headEnd type="none" w="med" len="med"/>
+                      <a:tailEnd type="none" w="med" len="med"/>
+                    </a:lnB>
+                  </a:tcPr>
+                </a:tc>
+                <a:tc>
+                  <a:txBody>
+                    <a:bodyPr/>
+                    <a:lstStyle/>
+                    <a:p>
+                      <a:pPr algn="r" indent="0" marL="0">
+                        <a:buNone/>
+                      </a:pPr>
+                      <a:r>
+                        <a:rPr lang="en-US" sz="1100" dirty="0">
+                          <a:solidFill>
+                            <a:srgbClr val="3D3D3D"/>
+                          </a:solidFill>
+                          <a:latin typeface="Spoqa Han Sans Neo" pitchFamily="34" charset="0"/>
+                          <a:ea typeface="Spoqa Han Sans Neo" pitchFamily="34" charset="-122"/>
+                          <a:cs typeface="Spoqa Han Sans Neo" pitchFamily="34" charset="-120"/>
+                        </a:rPr>
+                        <a:t>5,462억원</a:t>
+                      </a:r>
+                      <a:endParaRPr lang="en-US" sz="1100" dirty="0">
+                        <a:latin typeface="Spoqa Han Sans Neo" charset="0"/>
+                        <a:ea typeface="Spoqa Han Sans Neo" charset="0"/>
+                        <a:cs typeface="Spoqa Han Sans Neo" charset="0"/>
+                      </a:endParaRPr>
+                    </a:p>
+                  </a:txBody>
+                  <a:tcPr marL="91440" marR="91440" marT="45720" marB="45720" anchor="ctr">
+                    <a:lnL w="6350" cap="flat" cmpd="sng" algn="ctr">
+                      <a:solidFill>
+                        <a:srgbClr val="CDCECB"/>
+                      </a:solidFill>
+                      <a:prstDash val="solid"/>
+                      <a:round/>
+                      <a:headEnd type="none" w="med" len="med"/>
+                      <a:tailEnd type="none" w="med" len="med"/>
+                    </a:lnL>
+                    <a:lnR w="6350" cap="flat" cmpd="sng" algn="ctr">
+                      <a:solidFill>
+                        <a:srgbClr val="CDCECB"/>
+                      </a:solidFill>
+                      <a:prstDash val="solid"/>
+                      <a:round/>
+                      <a:headEnd type="none" w="med" len="med"/>
+                      <a:tailEnd type="none" w="med" len="med"/>
+                    </a:lnR>
+                    <a:lnT w="6350" cap="flat" cmpd="sng" algn="ctr">
+                      <a:solidFill>
+                        <a:srgbClr val="CDCECB"/>
+                      </a:solidFill>
+                      <a:prstDash val="solid"/>
+                      <a:round/>
+                      <a:headEnd type="none" w="med" len="med"/>
+                      <a:tailEnd type="none" w="med" len="med"/>
+                    </a:lnT>
+                    <a:lnB w="6350" cap="flat" cmpd="sng" algn="ctr">
+                      <a:solidFill>
+                        <a:srgbClr val="CDCECB"/>
+                      </a:solidFill>
+                      <a:prstDash val="solid"/>
+                      <a:round/>
+                      <a:headEnd type="none" w="med" len="med"/>
+                      <a:tailEnd type="none" w="med" len="med"/>
+                    </a:lnB>
+                  </a:tcPr>
+                </a:tc>
+                <a:tc>
+                  <a:txBody>
+                    <a:bodyPr/>
+                    <a:lstStyle/>
+                    <a:p>
+                      <a:pPr algn="r" indent="0" marL="0">
+                        <a:buNone/>
+                      </a:pPr>
+                      <a:r>
+                        <a:rPr lang="en-US" sz="1100" dirty="0">
+                          <a:solidFill>
+                            <a:srgbClr val="3D3D3D"/>
+                          </a:solidFill>
+                          <a:latin typeface="Spoqa Han Sans Neo" pitchFamily="34" charset="0"/>
+                          <a:ea typeface="Spoqa Han Sans Neo" pitchFamily="34" charset="-122"/>
+                          <a:cs typeface="Spoqa Han Sans Neo" pitchFamily="34" charset="-120"/>
+                        </a:rPr>
+                        <a:t>1.8%</a:t>
+                      </a:r>
+                      <a:endParaRPr lang="en-US" sz="1100" dirty="0">
+                        <a:latin typeface="Spoqa Han Sans Neo" charset="0"/>
+                        <a:ea typeface="Spoqa Han Sans Neo" charset="0"/>
+                        <a:cs typeface="Spoqa Han Sans Neo" charset="0"/>
+                      </a:endParaRPr>
+                    </a:p>
+                  </a:txBody>
+                  <a:tcPr marL="91440" marR="91440" marT="45720" marB="45720" anchor="ctr">
+                    <a:lnL w="6350" cap="flat" cmpd="sng" algn="ctr">
+                      <a:solidFill>
+                        <a:srgbClr val="CDCECB"/>
+                      </a:solidFill>
+                      <a:prstDash val="solid"/>
+                      <a:round/>
+                      <a:headEnd type="none" w="med" len="med"/>
+                      <a:tailEnd type="none" w="med" len="med"/>
+                    </a:lnL>
+                    <a:lnR w="6350" cap="flat" cmpd="sng" algn="ctr">
+                      <a:solidFill>
+                        <a:srgbClr val="CDCECB"/>
+                      </a:solidFill>
+                      <a:prstDash val="solid"/>
+                      <a:round/>
+                      <a:headEnd type="none" w="med" len="med"/>
+                      <a:tailEnd type="none" w="med" len="med"/>
+                    </a:lnR>
+                    <a:lnT w="6350" cap="flat" cmpd="sng" algn="ctr">
+                      <a:solidFill>
+                        <a:srgbClr val="CDCECB"/>
+                      </a:solidFill>
+                      <a:prstDash val="solid"/>
+                      <a:round/>
+                      <a:headEnd type="none" w="med" len="med"/>
+                      <a:tailEnd type="none" w="med" len="med"/>
+                    </a:lnT>
+                    <a:lnB w="6350" cap="flat" cmpd="sng" algn="ctr">
+                      <a:solidFill>
+                        <a:srgbClr val="CDCECB"/>
+                      </a:solidFill>
+                      <a:prstDash val="solid"/>
+                      <a:round/>
+                      <a:headEnd type="none" w="med" len="med"/>
+                      <a:tailEnd type="none" w="med" len="med"/>
+                    </a:lnB>
+                  </a:tcPr>
+                </a:tc>
+                <a:tc>
+                  <a:txBody>
+                    <a:bodyPr/>
+                    <a:lstStyle/>
+                    <a:p>
+                      <a:pPr algn="r" indent="0" marL="0">
+                        <a:buNone/>
+                      </a:pPr>
+                      <a:r>
+                        <a:rPr lang="en-US" sz="1100" dirty="0">
+                          <a:solidFill>
+                            <a:srgbClr val="6C6C6C"/>
+                          </a:solidFill>
+                          <a:latin typeface="Spoqa Han Sans Neo" pitchFamily="34" charset="0"/>
+                          <a:ea typeface="Spoqa Han Sans Neo" pitchFamily="34" charset="-122"/>
+                          <a:cs typeface="Spoqa Han Sans Neo" pitchFamily="34" charset="-120"/>
+                        </a:rPr>
+                        <a:t>—</a:t>
+                      </a:r>
+                      <a:endParaRPr lang="en-US" sz="1100" dirty="0">
+                        <a:latin typeface="Spoqa Han Sans Neo" charset="0"/>
+                        <a:ea typeface="Spoqa Han Sans Neo" charset="0"/>
+                        <a:cs typeface="Spoqa Han Sans Neo" charset="0"/>
+                      </a:endParaRPr>
+                    </a:p>
+                  </a:txBody>
+                  <a:tcPr marL="91440" marR="91440" marT="45720" marB="45720" anchor="ctr">
+                    <a:lnL w="6350" cap="flat" cmpd="sng" algn="ctr">
+                      <a:solidFill>
+                        <a:srgbClr val="CDCECB"/>
+                      </a:solidFill>
+                      <a:prstDash val="solid"/>
+                      <a:round/>
+                      <a:headEnd type="none" w="med" len="med"/>
+                      <a:tailEnd type="none" w="med" len="med"/>
+                    </a:lnL>
+                    <a:lnR w="6350" cap="flat" cmpd="sng" algn="ctr">
+                      <a:solidFill>
+                        <a:srgbClr val="CDCECB"/>
+                      </a:solidFill>
+                      <a:prstDash val="solid"/>
+                      <a:round/>
+                      <a:headEnd type="none" w="med" len="med"/>
+                      <a:tailEnd type="none" w="med" len="med"/>
+                    </a:lnR>
+                    <a:lnT w="6350" cap="flat" cmpd="sng" algn="ctr">
+                      <a:solidFill>
+                        <a:srgbClr val="CDCECB"/>
+                      </a:solidFill>
+                      <a:prstDash val="solid"/>
+                      <a:round/>
+                      <a:headEnd type="none" w="med" len="med"/>
+                      <a:tailEnd type="none" w="med" len="med"/>
+                    </a:lnT>
+                    <a:lnB w="6350" cap="flat" cmpd="sng" algn="ctr">
+                      <a:solidFill>
+                        <a:srgbClr val="CDCECB"/>
+                      </a:solidFill>
+                      <a:prstDash val="solid"/>
+                      <a:round/>
+                      <a:headEnd type="none" w="med" len="med"/>
+                      <a:tailEnd type="none" w="med" len="med"/>
+                    </a:lnB>
+                  </a:tcPr>
+                </a:tc>
+                <a:tc>
+                  <a:txBody>
+                    <a:bodyPr/>
+                    <a:lstStyle/>
+                    <a:p>
+                      <a:pPr algn="r" indent="0" marL="0">
+                        <a:buNone/>
+                      </a:pPr>
+                      <a:r>
+                        <a:rPr lang="en-US" sz="1100" dirty="0">
+                          <a:solidFill>
+                            <a:srgbClr val="3D3D3D"/>
+                          </a:solidFill>
+                          <a:latin typeface="Spoqa Han Sans Neo" pitchFamily="34" charset="0"/>
+                          <a:ea typeface="Spoqa Han Sans Neo" pitchFamily="34" charset="-122"/>
+                          <a:cs typeface="Spoqa Han Sans Neo" pitchFamily="34" charset="-120"/>
+                        </a:rPr>
+                        <a:t>0.17~0.71%</a:t>
+                      </a:r>
+                      <a:endParaRPr lang="en-US" sz="1100" dirty="0">
+                        <a:latin typeface="Spoqa Han Sans Neo" charset="0"/>
+                        <a:ea typeface="Spoqa Han Sans Neo" charset="0"/>
+                        <a:cs typeface="Spoqa Han Sans Neo" charset="0"/>
+                      </a:endParaRPr>
+                    </a:p>
+                  </a:txBody>
+                  <a:tcPr marL="91440" marR="91440" marT="45720" marB="45720" anchor="ctr">
+                    <a:lnL w="6350" cap="flat" cmpd="sng" algn="ctr">
+                      <a:solidFill>
+                        <a:srgbClr val="CDCECB"/>
+                      </a:solidFill>
+                      <a:prstDash val="solid"/>
+                      <a:round/>
+                      <a:headEnd type="none" w="med" len="med"/>
+                      <a:tailEnd type="none" w="med" len="med"/>
+                    </a:lnL>
+                    <a:lnR w="6350" cap="flat" cmpd="sng" algn="ctr">
+                      <a:solidFill>
+                        <a:srgbClr val="CDCECB"/>
+                      </a:solidFill>
+                      <a:prstDash val="solid"/>
+                      <a:round/>
+                      <a:headEnd type="none" w="med" len="med"/>
+                      <a:tailEnd type="none" w="med" len="med"/>
+                    </a:lnR>
+                    <a:lnT w="6350" cap="flat" cmpd="sng" algn="ctr">
+                      <a:solidFill>
+                        <a:srgbClr val="CDCECB"/>
+                      </a:solidFill>
+                      <a:prstDash val="solid"/>
+                      <a:round/>
+                      <a:headEnd type="none" w="med" len="med"/>
+                      <a:tailEnd type="none" w="med" len="med"/>
+                    </a:lnT>
+                    <a:lnB w="6350" cap="flat" cmpd="sng" algn="ctr">
+                      <a:solidFill>
+                        <a:srgbClr val="CDCECB"/>
+                      </a:solidFill>
+                      <a:prstDash val="solid"/>
+                      <a:round/>
+                      <a:headEnd type="none" w="med" len="med"/>
+                      <a:tailEnd type="none" w="med" len="med"/>
+                    </a:lnB>
+                  </a:tcPr>
+                </a:tc>
+              </a:tr>
+              <a:tr h="256032">
+                <a:tc>
+                  <a:txBody>
+                    <a:bodyPr/>
+                    <a:lstStyle/>
+                    <a:p>
+                      <a:pPr indent="0" marL="0">
+                        <a:buNone/>
+                      </a:pPr>
+                      <a:r>
+                        <a:rPr lang="en-US" sz="1100" dirty="0">
+                          <a:solidFill>
+                            <a:srgbClr val="3D3D3D"/>
+                          </a:solidFill>
+                          <a:latin typeface="Spoqa Han Sans Neo" pitchFamily="34" charset="0"/>
+                          <a:ea typeface="Spoqa Han Sans Neo" pitchFamily="34" charset="-122"/>
+                          <a:cs typeface="Spoqa Han Sans Neo" pitchFamily="34" charset="-120"/>
+                        </a:rPr>
+                        <a:t>한국투자글로벌전기차&amp;자율주행증권투자신탁(주식)(모)</a:t>
+                      </a:r>
+                      <a:endParaRPr lang="en-US" sz="1100" dirty="0">
+                        <a:latin typeface="Spoqa Han Sans Neo" charset="0"/>
+                        <a:ea typeface="Spoqa Han Sans Neo" charset="0"/>
+                        <a:cs typeface="Spoqa Han Sans Neo" charset="0"/>
+                      </a:endParaRPr>
+                    </a:p>
+                  </a:txBody>
+                  <a:tcPr marL="91440" marR="91440" marT="45720" marB="45720" anchor="ctr">
+                    <a:lnL w="6350" cap="flat" cmpd="sng" algn="ctr">
+                      <a:solidFill>
+                        <a:srgbClr val="CDCECB"/>
+                      </a:solidFill>
+                      <a:prstDash val="solid"/>
+                      <a:round/>
+                      <a:headEnd type="none" w="med" len="med"/>
+                      <a:tailEnd type="none" w="med" len="med"/>
+                    </a:lnL>
+                    <a:lnR w="6350" cap="flat" cmpd="sng" algn="ctr">
+                      <a:solidFill>
+                        <a:srgbClr val="CDCECB"/>
+                      </a:solidFill>
+                      <a:prstDash val="solid"/>
+                      <a:round/>
+                      <a:headEnd type="none" w="med" len="med"/>
+                      <a:tailEnd type="none" w="med" len="med"/>
+                    </a:lnR>
+                    <a:lnT w="6350" cap="flat" cmpd="sng" algn="ctr">
+                      <a:solidFill>
+                        <a:srgbClr val="CDCECB"/>
+                      </a:solidFill>
+                      <a:prstDash val="solid"/>
+                      <a:round/>
+                      <a:headEnd type="none" w="med" len="med"/>
+                      <a:tailEnd type="none" w="med" len="med"/>
+                    </a:lnT>
+                    <a:lnB w="6350" cap="flat" cmpd="sng" algn="ctr">
+                      <a:solidFill>
+                        <a:srgbClr val="CDCECB"/>
+                      </a:solidFill>
+                      <a:prstDash val="solid"/>
+                      <a:round/>
+                      <a:headEnd type="none" w="med" len="med"/>
+                      <a:tailEnd type="none" w="med" len="med"/>
+                    </a:lnB>
+                  </a:tcPr>
+                </a:tc>
+                <a:tc>
+                  <a:txBody>
+                    <a:bodyPr/>
+                    <a:lstStyle/>
+                    <a:p>
+                      <a:pPr indent="0" marL="0">
+                        <a:buNone/>
+                      </a:pPr>
+                      <a:r>
+                        <a:rPr lang="en-US" sz="1100" dirty="0">
+                          <a:solidFill>
+                            <a:srgbClr val="3D3D3D"/>
+                          </a:solidFill>
+                          <a:latin typeface="Spoqa Han Sans Neo" pitchFamily="34" charset="0"/>
+                          <a:ea typeface="Spoqa Han Sans Neo" pitchFamily="34" charset="-122"/>
+                          <a:cs typeface="Spoqa Han Sans Neo" pitchFamily="34" charset="-120"/>
+                        </a:rPr>
+                        <a:t>해외주식형</a:t>
+                      </a:r>
+                      <a:endParaRPr lang="en-US" sz="1100" dirty="0">
+                        <a:latin typeface="Spoqa Han Sans Neo" charset="0"/>
+                        <a:ea typeface="Spoqa Han Sans Neo" charset="0"/>
+                        <a:cs typeface="Spoqa Han Sans Neo" charset="0"/>
+                      </a:endParaRPr>
+                    </a:p>
+                  </a:txBody>
+                  <a:tcPr marL="91440" marR="91440" marT="45720" marB="45720" anchor="ctr">
+                    <a:lnL w="6350" cap="flat" cmpd="sng" algn="ctr">
+                      <a:solidFill>
+                        <a:srgbClr val="CDCECB"/>
+                      </a:solidFill>
+                      <a:prstDash val="solid"/>
+                      <a:round/>
+                      <a:headEnd type="none" w="med" len="med"/>
+                      <a:tailEnd type="none" w="med" len="med"/>
+                    </a:lnL>
+                    <a:lnR w="6350" cap="flat" cmpd="sng" algn="ctr">
+                      <a:solidFill>
+                        <a:srgbClr val="CDCECB"/>
+                      </a:solidFill>
+                      <a:prstDash val="solid"/>
+                      <a:round/>
+                      <a:headEnd type="none" w="med" len="med"/>
+                      <a:tailEnd type="none" w="med" len="med"/>
+                    </a:lnR>
+                    <a:lnT w="6350" cap="flat" cmpd="sng" algn="ctr">
+                      <a:solidFill>
+                        <a:srgbClr val="CDCECB"/>
+                      </a:solidFill>
+                      <a:prstDash val="solid"/>
+                      <a:round/>
+                      <a:headEnd type="none" w="med" len="med"/>
+                      <a:tailEnd type="none" w="med" len="med"/>
+                    </a:lnT>
+                    <a:lnB w="6350" cap="flat" cmpd="sng" algn="ctr">
+                      <a:solidFill>
+                        <a:srgbClr val="CDCECB"/>
+                      </a:solidFill>
+                      <a:prstDash val="solid"/>
+                      <a:round/>
+                      <a:headEnd type="none" w="med" len="med"/>
+                      <a:tailEnd type="none" w="med" len="med"/>
+                    </a:lnB>
+                  </a:tcPr>
+                </a:tc>
+                <a:tc>
+                  <a:txBody>
+                    <a:bodyPr/>
+                    <a:lstStyle/>
+                    <a:p>
+                      <a:pPr indent="0" marL="0">
+                        <a:buNone/>
+                      </a:pPr>
+                      <a:r>
+                        <a:rPr lang="en-US" sz="1100" dirty="0">
+                          <a:solidFill>
+                            <a:srgbClr val="3D3D3D"/>
+                          </a:solidFill>
+                          <a:latin typeface="Spoqa Han Sans Neo" pitchFamily="34" charset="0"/>
+                          <a:ea typeface="Spoqa Han Sans Neo" pitchFamily="34" charset="-122"/>
+                          <a:cs typeface="Spoqa Han Sans Neo" pitchFamily="34" charset="-120"/>
+                        </a:rPr>
+                        <a:t>한국투자신탁운용</a:t>
+                      </a:r>
+                      <a:endParaRPr lang="en-US" sz="1100" dirty="0">
+                        <a:latin typeface="Spoqa Han Sans Neo" charset="0"/>
+                        <a:ea typeface="Spoqa Han Sans Neo" charset="0"/>
+                        <a:cs typeface="Spoqa Han Sans Neo" charset="0"/>
+                      </a:endParaRPr>
+                    </a:p>
+                  </a:txBody>
+                  <a:tcPr marL="91440" marR="91440" marT="45720" marB="45720" anchor="ctr">
+                    <a:lnL w="6350" cap="flat" cmpd="sng" algn="ctr">
+                      <a:solidFill>
+                        <a:srgbClr val="CDCECB"/>
+                      </a:solidFill>
+                      <a:prstDash val="solid"/>
+                      <a:round/>
+                      <a:headEnd type="none" w="med" len="med"/>
+                      <a:tailEnd type="none" w="med" len="med"/>
+                    </a:lnL>
+                    <a:lnR w="6350" cap="flat" cmpd="sng" algn="ctr">
+                      <a:solidFill>
+                        <a:srgbClr val="CDCECB"/>
+                      </a:solidFill>
+                      <a:prstDash val="solid"/>
+                      <a:round/>
+                      <a:headEnd type="none" w="med" len="med"/>
+                      <a:tailEnd type="none" w="med" len="med"/>
+                    </a:lnR>
+                    <a:lnT w="6350" cap="flat" cmpd="sng" algn="ctr">
+                      <a:solidFill>
+                        <a:srgbClr val="CDCECB"/>
+                      </a:solidFill>
+                      <a:prstDash val="solid"/>
+                      <a:round/>
+                      <a:headEnd type="none" w="med" len="med"/>
+                      <a:tailEnd type="none" w="med" len="med"/>
+                    </a:lnT>
+                    <a:lnB w="6350" cap="flat" cmpd="sng" algn="ctr">
+                      <a:solidFill>
+                        <a:srgbClr val="CDCECB"/>
+                      </a:solidFill>
+                      <a:prstDash val="solid"/>
+                      <a:round/>
+                      <a:headEnd type="none" w="med" len="med"/>
+                      <a:tailEnd type="none" w="med" len="med"/>
+                    </a:lnB>
+                  </a:tcPr>
+                </a:tc>
+                <a:tc>
+                  <a:txBody>
+                    <a:bodyPr/>
+                    <a:lstStyle/>
+                    <a:p>
+                      <a:pPr algn="r" indent="0" marL="0">
+                        <a:buNone/>
+                      </a:pPr>
+                      <a:r>
+                        <a:rPr lang="en-US" sz="1100" dirty="0">
+                          <a:solidFill>
+                            <a:srgbClr val="3D3D3D"/>
+                          </a:solidFill>
+                          <a:latin typeface="Spoqa Han Sans Neo" pitchFamily="34" charset="0"/>
+                          <a:ea typeface="Spoqa Han Sans Neo" pitchFamily="34" charset="-122"/>
+                          <a:cs typeface="Spoqa Han Sans Neo" pitchFamily="34" charset="-120"/>
+                        </a:rPr>
+                        <a:t>4,762억원</a:t>
+                      </a:r>
+                      <a:endParaRPr lang="en-US" sz="1100" dirty="0">
+                        <a:latin typeface="Spoqa Han Sans Neo" charset="0"/>
+                        <a:ea typeface="Spoqa Han Sans Neo" charset="0"/>
+                        <a:cs typeface="Spoqa Han Sans Neo" charset="0"/>
+                      </a:endParaRPr>
+                    </a:p>
+                  </a:txBody>
+                  <a:tcPr marL="91440" marR="91440" marT="45720" marB="45720" anchor="ctr">
+                    <a:lnL w="6350" cap="flat" cmpd="sng" algn="ctr">
+                      <a:solidFill>
+                        <a:srgbClr val="CDCECB"/>
+                      </a:solidFill>
+                      <a:prstDash val="solid"/>
+                      <a:round/>
+                      <a:headEnd type="none" w="med" len="med"/>
+                      <a:tailEnd type="none" w="med" len="med"/>
+                    </a:lnL>
+                    <a:lnR w="6350" cap="flat" cmpd="sng" algn="ctr">
+                      <a:solidFill>
+                        <a:srgbClr val="CDCECB"/>
+                      </a:solidFill>
+                      <a:prstDash val="solid"/>
+                      <a:round/>
+                      <a:headEnd type="none" w="med" len="med"/>
+                      <a:tailEnd type="none" w="med" len="med"/>
+                    </a:lnR>
+                    <a:lnT w="6350" cap="flat" cmpd="sng" algn="ctr">
+                      <a:solidFill>
+                        <a:srgbClr val="CDCECB"/>
+                      </a:solidFill>
+                      <a:prstDash val="solid"/>
+                      <a:round/>
+                      <a:headEnd type="none" w="med" len="med"/>
+                      <a:tailEnd type="none" w="med" len="med"/>
+                    </a:lnT>
+                    <a:lnB w="6350" cap="flat" cmpd="sng" algn="ctr">
+                      <a:solidFill>
+                        <a:srgbClr val="CDCECB"/>
+                      </a:solidFill>
+                      <a:prstDash val="solid"/>
+                      <a:round/>
+                      <a:headEnd type="none" w="med" len="med"/>
+                      <a:tailEnd type="none" w="med" len="med"/>
+                    </a:lnB>
+                  </a:tcPr>
+                </a:tc>
+                <a:tc>
+                  <a:txBody>
+                    <a:bodyPr/>
+                    <a:lstStyle/>
+                    <a:p>
+                      <a:pPr algn="r" indent="0" marL="0">
+                        <a:buNone/>
+                      </a:pPr>
+                      <a:r>
+                        <a:rPr lang="en-US" sz="1100" dirty="0">
+                          <a:solidFill>
+                            <a:srgbClr val="3D3D3D"/>
+                          </a:solidFill>
+                          <a:latin typeface="Spoqa Han Sans Neo" pitchFamily="34" charset="0"/>
+                          <a:ea typeface="Spoqa Han Sans Neo" pitchFamily="34" charset="-122"/>
+                          <a:cs typeface="Spoqa Han Sans Neo" pitchFamily="34" charset="-120"/>
+                        </a:rPr>
+                        <a:t>17.8%</a:t>
+                      </a:r>
+                      <a:endParaRPr lang="en-US" sz="1100" dirty="0">
+                        <a:latin typeface="Spoqa Han Sans Neo" charset="0"/>
+                        <a:ea typeface="Spoqa Han Sans Neo" charset="0"/>
+                        <a:cs typeface="Spoqa Han Sans Neo" charset="0"/>
+                      </a:endParaRPr>
+                    </a:p>
+                  </a:txBody>
+                  <a:tcPr marL="91440" marR="91440" marT="45720" marB="45720" anchor="ctr">
+                    <a:lnL w="6350" cap="flat" cmpd="sng" algn="ctr">
+                      <a:solidFill>
+                        <a:srgbClr val="CDCECB"/>
+                      </a:solidFill>
+                      <a:prstDash val="solid"/>
+                      <a:round/>
+                      <a:headEnd type="none" w="med" len="med"/>
+                      <a:tailEnd type="none" w="med" len="med"/>
+                    </a:lnL>
+                    <a:lnR w="6350" cap="flat" cmpd="sng" algn="ctr">
+                      <a:solidFill>
+                        <a:srgbClr val="CDCECB"/>
+                      </a:solidFill>
+                      <a:prstDash val="solid"/>
+                      <a:round/>
+                      <a:headEnd type="none" w="med" len="med"/>
+                      <a:tailEnd type="none" w="med" len="med"/>
+                    </a:lnR>
+                    <a:lnT w="6350" cap="flat" cmpd="sng" algn="ctr">
+                      <a:solidFill>
+                        <a:srgbClr val="CDCECB"/>
+                      </a:solidFill>
+                      <a:prstDash val="solid"/>
+                      <a:round/>
+                      <a:headEnd type="none" w="med" len="med"/>
+                      <a:tailEnd type="none" w="med" len="med"/>
+                    </a:lnT>
+                    <a:lnB w="6350" cap="flat" cmpd="sng" algn="ctr">
+                      <a:solidFill>
+                        <a:srgbClr val="CDCECB"/>
+                      </a:solidFill>
+                      <a:prstDash val="solid"/>
+                      <a:round/>
+                      <a:headEnd type="none" w="med" len="med"/>
+                      <a:tailEnd type="none" w="med" len="med"/>
+                    </a:lnB>
+                  </a:tcPr>
+                </a:tc>
+                <a:tc>
+                  <a:txBody>
+                    <a:bodyPr/>
+                    <a:lstStyle/>
+                    <a:p>
+                      <a:pPr algn="r" indent="0" marL="0">
+                        <a:buNone/>
+                      </a:pPr>
+                      <a:r>
+                        <a:rPr lang="en-US" sz="1100" dirty="0">
+                          <a:solidFill>
+                            <a:srgbClr val="6C6C6C"/>
+                          </a:solidFill>
+                          <a:latin typeface="Spoqa Han Sans Neo" pitchFamily="34" charset="0"/>
+                          <a:ea typeface="Spoqa Han Sans Neo" pitchFamily="34" charset="-122"/>
+                          <a:cs typeface="Spoqa Han Sans Neo" pitchFamily="34" charset="-120"/>
+                        </a:rPr>
+                        <a:t>—</a:t>
+                      </a:r>
+                      <a:endParaRPr lang="en-US" sz="1100" dirty="0">
+                        <a:latin typeface="Spoqa Han Sans Neo" charset="0"/>
+                        <a:ea typeface="Spoqa Han Sans Neo" charset="0"/>
+                        <a:cs typeface="Spoqa Han Sans Neo" charset="0"/>
+                      </a:endParaRPr>
+                    </a:p>
+                  </a:txBody>
+                  <a:tcPr marL="91440" marR="91440" marT="45720" marB="45720" anchor="ctr">
+                    <a:lnL w="6350" cap="flat" cmpd="sng" algn="ctr">
+                      <a:solidFill>
+                        <a:srgbClr val="CDCECB"/>
+                      </a:solidFill>
+                      <a:prstDash val="solid"/>
+                      <a:round/>
+                      <a:headEnd type="none" w="med" len="med"/>
+                      <a:tailEnd type="none" w="med" len="med"/>
+                    </a:lnL>
+                    <a:lnR w="6350" cap="flat" cmpd="sng" algn="ctr">
+                      <a:solidFill>
+                        <a:srgbClr val="CDCECB"/>
+                      </a:solidFill>
+                      <a:prstDash val="solid"/>
+                      <a:round/>
+                      <a:headEnd type="none" w="med" len="med"/>
+                      <a:tailEnd type="none" w="med" len="med"/>
+                    </a:lnR>
+                    <a:lnT w="6350" cap="flat" cmpd="sng" algn="ctr">
+                      <a:solidFill>
+                        <a:srgbClr val="CDCECB"/>
+                      </a:solidFill>
+                      <a:prstDash val="solid"/>
+                      <a:round/>
+                      <a:headEnd type="none" w="med" len="med"/>
+                      <a:tailEnd type="none" w="med" len="med"/>
+                    </a:lnT>
+                    <a:lnB w="6350" cap="flat" cmpd="sng" algn="ctr">
+                      <a:solidFill>
+                        <a:srgbClr val="CDCECB"/>
+                      </a:solidFill>
+                      <a:prstDash val="solid"/>
+                      <a:round/>
+                      <a:headEnd type="none" w="med" len="med"/>
+                      <a:tailEnd type="none" w="med" len="med"/>
+                    </a:lnB>
+                  </a:tcPr>
+                </a:tc>
+                <a:tc>
+                  <a:txBody>
+                    <a:bodyPr/>
+                    <a:lstStyle/>
+                    <a:p>
+                      <a:pPr algn="r" indent="0" marL="0">
+                        <a:buNone/>
+                      </a:pPr>
+                      <a:r>
+                        <a:rPr lang="en-US" sz="1100" dirty="0">
+                          <a:solidFill>
+                            <a:srgbClr val="3D3D3D"/>
+                          </a:solidFill>
+                          <a:latin typeface="Spoqa Han Sans Neo" pitchFamily="34" charset="0"/>
+                          <a:ea typeface="Spoqa Han Sans Neo" pitchFamily="34" charset="-122"/>
+                          <a:cs typeface="Spoqa Han Sans Neo" pitchFamily="34" charset="-120"/>
+                        </a:rPr>
+                        <a:t>0.77~2.07%</a:t>
+                      </a:r>
+                      <a:endParaRPr lang="en-US" sz="1100" dirty="0">
+                        <a:latin typeface="Spoqa Han Sans Neo" charset="0"/>
+                        <a:ea typeface="Spoqa Han Sans Neo" charset="0"/>
+                        <a:cs typeface="Spoqa Han Sans Neo" charset="0"/>
+                      </a:endParaRPr>
+                    </a:p>
+                  </a:txBody>
+                  <a:tcPr marL="91440" marR="91440" marT="45720" marB="45720" anchor="ctr">
+                    <a:lnL w="6350" cap="flat" cmpd="sng" algn="ctr">
+                      <a:solidFill>
+                        <a:srgbClr val="CDCECB"/>
+                      </a:solidFill>
+                      <a:prstDash val="solid"/>
+                      <a:round/>
+                      <a:headEnd type="none" w="med" len="med"/>
+                      <a:tailEnd type="none" w="med" len="med"/>
+                    </a:lnL>
+                    <a:lnR w="6350" cap="flat" cmpd="sng" algn="ctr">
+                      <a:solidFill>
+                        <a:srgbClr val="CDCECB"/>
+                      </a:solidFill>
+                      <a:prstDash val="solid"/>
+                      <a:round/>
+                      <a:headEnd type="none" w="med" len="med"/>
+                      <a:tailEnd type="none" w="med" len="med"/>
+                    </a:lnR>
+                    <a:lnT w="6350" cap="flat" cmpd="sng" algn="ctr">
+                      <a:solidFill>
+                        <a:srgbClr val="CDCECB"/>
+                      </a:solidFill>
+                      <a:prstDash val="solid"/>
+                      <a:round/>
+                      <a:headEnd type="none" w="med" len="med"/>
+                      <a:tailEnd type="none" w="med" len="med"/>
+                    </a:lnT>
+                    <a:lnB w="6350" cap="flat" cmpd="sng" algn="ctr">
+                      <a:solidFill>
+                        <a:srgbClr val="CDCECB"/>
+                      </a:solidFill>
+                      <a:prstDash val="solid"/>
+                      <a:round/>
+                      <a:headEnd type="none" w="med" len="med"/>
+                      <a:tailEnd type="none" w="med" len="med"/>
+                    </a:lnB>
+                  </a:tcPr>
+                </a:tc>
+              </a:tr>
+            </a:tbl>
+          </a:graphicData>
+        </a:graphic>
+      </p:graphicFrame>
+      <p:sp>
+        <p:nvSpPr>
+          <p:cNvPr id="9" name="Text 5"/>
           <p:cNvSpPr txBox="1"/>
           <p:nvPr/>
         </p:nvSpPr>
@@ -22195,7 +25406,7 @@
                           <a:ea typeface="Spoqa Han Sans Neo" pitchFamily="34" charset="-122"/>
                           <a:cs typeface="Spoqa Han Sans Neo" pitchFamily="34" charset="-120"/>
                         </a:rPr>
-                        <a:t>—</a:t>
+                        <a:t>한국투자증권 오픈API (모의투자, HHDFS76240000, 수정주가)</a:t>
                       </a:r>
                       <a:endParaRPr lang="en-US" sz="1100" dirty="0">
                         <a:latin typeface="Spoqa Han Sans Neo" charset="0"/>
@@ -22260,7 +25471,7 @@
                           <a:ea typeface="Spoqa Han Sans Neo" pitchFamily="34" charset="-122"/>
                           <a:cs typeface="Spoqa Han Sans Neo" pitchFamily="34" charset="-120"/>
                         </a:rPr>
-                        <a:t>0</a:t>
+                        <a:t>19</a:t>
                       </a:r>
                       <a:endParaRPr lang="en-US" sz="1100" dirty="0">
                         <a:latin typeface="Spoqa Han Sans Neo" charset="0"/>
@@ -22325,7 +25536,7 @@
                           <a:ea typeface="Spoqa Han Sans Neo" pitchFamily="34" charset="-122"/>
                           <a:cs typeface="Spoqa Han Sans Neo" pitchFamily="34" charset="-120"/>
                         </a:rPr>
-                        <a:t>—</a:t>
+                        <a:t>2026-09-19</a:t>
                       </a:r>
                       <a:endParaRPr lang="en-US" sz="1100" dirty="0">
                         <a:latin typeface="Spoqa Han Sans Neo" charset="0"/>
@@ -22580,7 +25791,7 @@
                 <a:ea typeface="Spoqa Han Sans Neo" pitchFamily="34" charset="-122"/>
                 <a:cs typeface="Spoqa Han Sans Neo" pitchFamily="34" charset="-120"/>
               </a:rPr>
-              <a:t>유니버스 2026-09-19 08:55:38 · 문서 2026-09-19 08:55 (KST)</a:t>
+              <a:t>유니버스 2026-09-19 10:13:47 · 문서 2026-09-19 10:14 (KST)</a:t>
             </a:r>
             <a:endParaRPr lang="en-US" sz="900" dirty="0"/>
           </a:p>

--- a/고객제안서_자산배분.pptx
+++ b/고객제안서_자산배분.pptx
@@ -2285,7 +2285,7 @@
                 <a:ea typeface="Spoqa Han Sans Neo" pitchFamily="34" charset="-122"/>
                 <a:cs typeface="Spoqa Han Sans Neo" pitchFamily="34" charset="-120"/>
               </a:rPr>
-              <a:t>2026-09-19 10:14</a:t>
+              <a:t>2026-09-19 10:31</a:t>
             </a:r>
             <a:endParaRPr lang="en-US" sz="1200" dirty="0"/>
           </a:p>
@@ -25791,7 +25791,7 @@
                 <a:ea typeface="Spoqa Han Sans Neo" pitchFamily="34" charset="-122"/>
                 <a:cs typeface="Spoqa Han Sans Neo" pitchFamily="34" charset="-120"/>
               </a:rPr>
-              <a:t>유니버스 2026-09-19 10:13:47 · 문서 2026-09-19 10:14 (KST)</a:t>
+              <a:t>유니버스 2026-09-19 10:13:47 · 문서 2026-09-19 10:31 (KST)</a:t>
             </a:r>
             <a:endParaRPr lang="en-US" sz="900" dirty="0"/>
           </a:p>

--- a/고객제안서_자산배분.pptx
+++ b/고객제안서_자산배분.pptx
@@ -2221,6 +2221,45 @@
         </p:nvSpPr>
         <p:spPr>
           <a:xfrm>
+            <a:off x="731520" y="3520440"/>
+            <a:ext cx="10515600" cy="320040"/>
+          </a:xfrm>
+          <a:prstGeom prst="rect">
+            <a:avLst/>
+          </a:prstGeom>
+          <a:noFill/>
+          <a:ln/>
+        </p:spPr>
+        <p:txBody>
+          <a:bodyPr wrap="square" lIns="0" tIns="0" rIns="0" bIns="0" rtlCol="0" anchor="ctr"/>
+          <a:lstStyle/>
+          <a:p>
+            <a:pPr indent="0" marL="0">
+              <a:buNone/>
+            </a:pPr>
+            <a:r>
+              <a:rPr lang="en-US" sz="1400" dirty="0">
+                <a:solidFill>
+                  <a:srgbClr val="FFFFFF"/>
+                </a:solidFill>
+                <a:latin typeface="Spoqa Han Sans Neo" pitchFamily="34" charset="0"/>
+                <a:ea typeface="Spoqa Han Sans Neo" pitchFamily="34" charset="-122"/>
+                <a:cs typeface="Spoqa Han Sans Neo" pitchFamily="34" charset="-120"/>
+              </a:rPr>
+              <a:t>성향 기준 제안값입니다</a:t>
+            </a:r>
+            <a:endParaRPr lang="en-US" sz="1400" dirty="0"/>
+          </a:p>
+        </p:txBody>
+      </p:sp>
+      <p:sp>
+        <p:nvSpPr>
+          <p:cNvPr id="6" name="Text 4"/>
+          <p:cNvSpPr txBox="1"/>
+          <p:nvPr/>
+        </p:nvSpPr>
+        <p:spPr>
+          <a:xfrm>
             <a:off x="731520" y="5943600"/>
             <a:ext cx="5486400" cy="320040"/>
           </a:xfrm>
@@ -2254,7 +2293,7 @@
       </p:sp>
       <p:sp>
         <p:nvSpPr>
-          <p:cNvPr id="6" name="Text 4"/>
+          <p:cNvPr id="7" name="Text 5"/>
           <p:cNvSpPr txBox="1"/>
           <p:nvPr/>
         </p:nvSpPr>
@@ -2285,7 +2324,7 @@
                 <a:ea typeface="Spoqa Han Sans Neo" pitchFamily="34" charset="-122"/>
                 <a:cs typeface="Spoqa Han Sans Neo" pitchFamily="34" charset="-120"/>
               </a:rPr>
-              <a:t>2026-09-19 10:31</a:t>
+              <a:t>2026-09-19 10:36</a:t>
             </a:r>
             <a:endParaRPr lang="en-US" sz="1200" dirty="0"/>
           </a:p>
@@ -25791,7 +25830,7 @@
                 <a:ea typeface="Spoqa Han Sans Neo" pitchFamily="34" charset="-122"/>
                 <a:cs typeface="Spoqa Han Sans Neo" pitchFamily="34" charset="-120"/>
               </a:rPr>
-              <a:t>유니버스 2026-09-19 10:13:47 · 문서 2026-09-19 10:31 (KST)</a:t>
+              <a:t>유니버스 2026-09-19 10:13:47 · 문서 2026-09-19 10:36 (KST)</a:t>
             </a:r>
             <a:endParaRPr lang="en-US" sz="900" dirty="0"/>
           </a:p>

--- a/고객제안서_자산배분.pptx
+++ b/고객제안서_자산배분.pptx
@@ -643,7 +643,7 @@
                   <c:v>16.4</c:v>
                 </c:pt>
                 <c:pt idx="1">
-                  <c:v>57.3</c:v>
+                  <c:v>57</c:v>
                 </c:pt>
                 <c:pt idx="2">
                   <c:v>15.4</c:v>
@@ -2324,7 +2324,7 @@
                 <a:ea typeface="Spoqa Han Sans Neo" pitchFamily="34" charset="-122"/>
                 <a:cs typeface="Spoqa Han Sans Neo" pitchFamily="34" charset="-120"/>
               </a:rPr>
-              <a:t>2026-09-19 10:36</a:t>
+              <a:t>2026-09-19 11:00</a:t>
             </a:r>
             <a:endParaRPr lang="en-US" sz="1200" dirty="0"/>
           </a:p>
@@ -3056,7 +3056,7 @@
                           <a:ea typeface="Spoqa Han Sans Neo" pitchFamily="34" charset="-122"/>
                           <a:cs typeface="Spoqa Han Sans Neo" pitchFamily="34" charset="-120"/>
                         </a:rPr>
-                        <a:t>35.8%</a:t>
+                        <a:t>38.3%</a:t>
                       </a:r>
                       <a:endParaRPr lang="en-US" sz="1100" dirty="0">
                         <a:latin typeface="Spoqa Han Sans Neo" charset="0"/>
@@ -3121,7 +3121,7 @@
                           <a:ea typeface="Spoqa Han Sans Neo" pitchFamily="34" charset="-122"/>
                           <a:cs typeface="Spoqa Han Sans Neo" pitchFamily="34" charset="-120"/>
                         </a:rPr>
-                        <a:t>57.3%</a:t>
+                        <a:t>57.0%</a:t>
                       </a:r>
                       <a:endParaRPr lang="en-US" sz="1100" dirty="0">
                         <a:latin typeface="Spoqa Han Sans Neo" charset="0"/>
@@ -5354,7 +5354,7 @@
                           <a:ea typeface="Spoqa Han Sans Neo" pitchFamily="34" charset="-122"/>
                           <a:cs typeface="Spoqa Han Sans Neo" pitchFamily="34" charset="-120"/>
                         </a:rPr>
-                        <a:t>15.0%</a:t>
+                        <a:t>15.2%</a:t>
                       </a:r>
                       <a:endParaRPr lang="en-US" sz="1100" dirty="0">
                         <a:latin typeface="Spoqa Han Sans Neo" charset="0"/>
@@ -5422,7 +5422,7 @@
                           <a:ea typeface="Spoqa Han Sans Neo" pitchFamily="34" charset="-122"/>
                           <a:cs typeface="Spoqa Han Sans Neo" pitchFamily="34" charset="-120"/>
                         </a:rPr>
-                        <a:t>10.6%</a:t>
+                        <a:t>10.5%</a:t>
                       </a:r>
                       <a:endParaRPr lang="en-US" sz="1100" dirty="0">
                         <a:latin typeface="Spoqa Han Sans Neo" charset="0"/>
@@ -5740,7 +5740,7 @@
                 <a:ea typeface="Spoqa Han Sans Neo" pitchFamily="34" charset="-122"/>
                 <a:cs typeface="Spoqa Han Sans Neo" pitchFamily="34" charset="-120"/>
               </a:rPr>
-              <a:t>15.0%</a:t>
+              <a:t>15.2%</a:t>
             </a:r>
             <a:endParaRPr lang="en-US" sz="3400" dirty="0"/>
           </a:p>
@@ -5882,7 +5882,7 @@
                 <a:ea typeface="Spoqa Han Sans Neo" pitchFamily="34" charset="-122"/>
                 <a:cs typeface="Spoqa Han Sans Neo" pitchFamily="34" charset="-120"/>
               </a:rPr>
-              <a:t>10.6%</a:t>
+              <a:t>10.5%</a:t>
             </a:r>
             <a:endParaRPr lang="en-US" sz="3400" dirty="0"/>
           </a:p>
@@ -7256,7 +7256,7 @@
                           <a:ea typeface="Spoqa Han Sans Neo" pitchFamily="34" charset="-122"/>
                           <a:cs typeface="Spoqa Han Sans Neo" pitchFamily="34" charset="-120"/>
                         </a:rPr>
-                        <a:t>1,714조원</a:t>
+                        <a:t>1,707조원</a:t>
                       </a:r>
                       <a:endParaRPr lang="en-US" sz="1100" dirty="0">
                         <a:latin typeface="Spoqa Han Sans Neo" charset="0"/>
@@ -7321,7 +7321,7 @@
                           <a:ea typeface="Spoqa Han Sans Neo" pitchFamily="34" charset="-122"/>
                           <a:cs typeface="Spoqa Han Sans Neo" pitchFamily="34" charset="-120"/>
                         </a:rPr>
-                        <a:t>272.3%</a:t>
+                        <a:t>274.1%</a:t>
                       </a:r>
                       <a:endParaRPr lang="en-US" sz="1100" dirty="0">
                         <a:latin typeface="Spoqa Han Sans Neo" charset="0"/>
@@ -7386,7 +7386,7 @@
                           <a:ea typeface="Spoqa Han Sans Neo" pitchFamily="34" charset="-122"/>
                           <a:cs typeface="Spoqa Han Sans Neo" pitchFamily="34" charset="-120"/>
                         </a:rPr>
-                        <a:t>57.9%</a:t>
+                        <a:t>57.6%</a:t>
                       </a:r>
                       <a:endParaRPr lang="en-US" sz="1100" dirty="0">
                         <a:latin typeface="Spoqa Han Sans Neo" charset="0"/>
@@ -7713,7 +7713,7 @@
                           <a:ea typeface="Spoqa Han Sans Neo" pitchFamily="34" charset="-122"/>
                           <a:cs typeface="Spoqa Han Sans Neo" pitchFamily="34" charset="-120"/>
                         </a:rPr>
-                        <a:t>1,318조원</a:t>
+                        <a:t>1,313조원</a:t>
                       </a:r>
                       <a:endParaRPr lang="en-US" sz="1100" dirty="0">
                         <a:latin typeface="Spoqa Han Sans Neo" charset="0"/>
@@ -7778,7 +7778,7 @@
                           <a:ea typeface="Spoqa Han Sans Neo" pitchFamily="34" charset="-122"/>
                           <a:cs typeface="Spoqa Han Sans Neo" pitchFamily="34" charset="-120"/>
                         </a:rPr>
-                        <a:t>599.4%</a:t>
+                        <a:t>576.1%</a:t>
                       </a:r>
                       <a:endParaRPr lang="en-US" sz="1100" dirty="0">
                         <a:latin typeface="Spoqa Han Sans Neo" charset="0"/>
@@ -7843,7 +7843,7 @@
                           <a:ea typeface="Spoqa Han Sans Neo" pitchFamily="34" charset="-122"/>
                           <a:cs typeface="Spoqa Han Sans Neo" pitchFamily="34" charset="-120"/>
                         </a:rPr>
-                        <a:t>73.4%</a:t>
+                        <a:t>73.3%</a:t>
                       </a:r>
                       <a:endParaRPr lang="en-US" sz="1100" dirty="0">
                         <a:latin typeface="Spoqa Han Sans Neo" charset="0"/>
@@ -8170,7 +8170,7 @@
                           <a:ea typeface="Spoqa Han Sans Neo" pitchFamily="34" charset="-122"/>
                           <a:cs typeface="Spoqa Han Sans Neo" pitchFamily="34" charset="-120"/>
                         </a:rPr>
-                        <a:t>142조원</a:t>
+                        <a:t>141조원</a:t>
                       </a:r>
                       <a:endParaRPr lang="en-US" sz="1100" dirty="0">
                         <a:latin typeface="Spoqa Han Sans Neo" charset="0"/>
@@ -8235,7 +8235,7 @@
                           <a:ea typeface="Spoqa Han Sans Neo" pitchFamily="34" charset="-122"/>
                           <a:cs typeface="Spoqa Han Sans Neo" pitchFamily="34" charset="-120"/>
                         </a:rPr>
-                        <a:t>622.2%</a:t>
+                        <a:t>601.6%</a:t>
                       </a:r>
                       <a:endParaRPr lang="en-US" sz="1100" dirty="0">
                         <a:latin typeface="Spoqa Han Sans Neo" charset="0"/>
@@ -8300,7 +8300,7 @@
                           <a:ea typeface="Spoqa Han Sans Neo" pitchFamily="34" charset="-122"/>
                           <a:cs typeface="Spoqa Han Sans Neo" pitchFamily="34" charset="-120"/>
                         </a:rPr>
-                        <a:t>80.8%</a:t>
+                        <a:t>80.5%</a:t>
                       </a:r>
                       <a:endParaRPr lang="en-US" sz="1100" dirty="0">
                         <a:latin typeface="Spoqa Han Sans Neo" charset="0"/>
@@ -8692,7 +8692,7 @@
                           <a:ea typeface="Spoqa Han Sans Neo" pitchFamily="34" charset="-122"/>
                           <a:cs typeface="Spoqa Han Sans Neo" pitchFamily="34" charset="-120"/>
                         </a:rPr>
-                        <a:t>678.0%</a:t>
+                        <a:t>678.9%</a:t>
                       </a:r>
                       <a:endParaRPr lang="en-US" sz="1100" dirty="0">
                         <a:latin typeface="Spoqa Han Sans Neo" charset="0"/>
@@ -8757,7 +8757,7 @@
                           <a:ea typeface="Spoqa Han Sans Neo" pitchFamily="34" charset="-122"/>
                           <a:cs typeface="Spoqa Han Sans Neo" pitchFamily="34" charset="-120"/>
                         </a:rPr>
-                        <a:t>71.1%</a:t>
+                        <a:t>70.6%</a:t>
                       </a:r>
                       <a:endParaRPr lang="en-US" sz="1100" dirty="0">
                         <a:latin typeface="Spoqa Han Sans Neo" charset="0"/>
@@ -9149,7 +9149,7 @@
                           <a:ea typeface="Spoqa Han Sans Neo" pitchFamily="34" charset="-122"/>
                           <a:cs typeface="Spoqa Han Sans Neo" pitchFamily="34" charset="-120"/>
                         </a:rPr>
-                        <a:t>64.8%</a:t>
+                        <a:t>66.6%</a:t>
                       </a:r>
                       <a:endParaRPr lang="en-US" sz="1100" dirty="0">
                         <a:latin typeface="Spoqa Han Sans Neo" charset="0"/>
@@ -9214,7 +9214,7 @@
                           <a:ea typeface="Spoqa Han Sans Neo" pitchFamily="34" charset="-122"/>
                           <a:cs typeface="Spoqa Han Sans Neo" pitchFamily="34" charset="-120"/>
                         </a:rPr>
-                        <a:t>53.4%</a:t>
+                        <a:t>53.2%</a:t>
                       </a:r>
                       <a:endParaRPr lang="en-US" sz="1100" dirty="0">
                         <a:latin typeface="Spoqa Han Sans Neo" charset="0"/>
@@ -15841,7 +15841,7 @@
                           <a:ea typeface="Spoqa Han Sans Neo" pitchFamily="34" charset="-122"/>
                           <a:cs typeface="Spoqa Han Sans Neo" pitchFamily="34" charset="-120"/>
                         </a:rPr>
-                        <a:t>equity</a:t>
+                        <a:t>주식</a:t>
                       </a:r>
                       <a:endParaRPr lang="en-US" sz="1100" dirty="0">
                         <a:latin typeface="Spoqa Han Sans Neo" charset="0"/>
@@ -16298,7 +16298,7 @@
                           <a:ea typeface="Spoqa Han Sans Neo" pitchFamily="34" charset="-122"/>
                           <a:cs typeface="Spoqa Han Sans Neo" pitchFamily="34" charset="-120"/>
                         </a:rPr>
-                        <a:t>equity</a:t>
+                        <a:t>주식</a:t>
                       </a:r>
                       <a:endParaRPr lang="en-US" sz="1100" dirty="0">
                         <a:latin typeface="Spoqa Han Sans Neo" charset="0"/>
@@ -16755,7 +16755,7 @@
                           <a:ea typeface="Spoqa Han Sans Neo" pitchFamily="34" charset="-122"/>
                           <a:cs typeface="Spoqa Han Sans Neo" pitchFamily="34" charset="-120"/>
                         </a:rPr>
-                        <a:t>equity</a:t>
+                        <a:t>주식</a:t>
                       </a:r>
                       <a:endParaRPr lang="en-US" sz="1100" dirty="0">
                         <a:latin typeface="Spoqa Han Sans Neo" charset="0"/>
@@ -17212,7 +17212,7 @@
                           <a:ea typeface="Spoqa Han Sans Neo" pitchFamily="34" charset="-122"/>
                           <a:cs typeface="Spoqa Han Sans Neo" pitchFamily="34" charset="-120"/>
                         </a:rPr>
-                        <a:t>equity</a:t>
+                        <a:t>주식</a:t>
                       </a:r>
                       <a:endParaRPr lang="en-US" sz="1100" dirty="0">
                         <a:latin typeface="Spoqa Han Sans Neo" charset="0"/>
@@ -17669,7 +17669,7 @@
                           <a:ea typeface="Spoqa Han Sans Neo" pitchFamily="34" charset="-122"/>
                           <a:cs typeface="Spoqa Han Sans Neo" pitchFamily="34" charset="-120"/>
                         </a:rPr>
-                        <a:t>equity</a:t>
+                        <a:t>주식</a:t>
                       </a:r>
                       <a:endParaRPr lang="en-US" sz="1100" dirty="0">
                         <a:latin typeface="Spoqa Han Sans Neo" charset="0"/>
@@ -24659,7 +24659,7 @@
                           <a:ea typeface="Spoqa Han Sans Neo" pitchFamily="34" charset="-122"/>
                           <a:cs typeface="Spoqa Han Sans Neo" pitchFamily="34" charset="-120"/>
                         </a:rPr>
-                        <a:t>야후 파이낸스 일봉 (자료 가지 kr100-data)</a:t>
+                        <a:t>한국투자증권 오픈API (모의투자) — 100 종 (나머지 0 종은 야후 파이낸스)</a:t>
                       </a:r>
                       <a:endParaRPr lang="en-US" sz="1100" dirty="0">
                         <a:latin typeface="Spoqa Han Sans Neo" charset="0"/>
@@ -25830,7 +25830,7 @@
                 <a:ea typeface="Spoqa Han Sans Neo" pitchFamily="34" charset="-122"/>
                 <a:cs typeface="Spoqa Han Sans Neo" pitchFamily="34" charset="-120"/>
               </a:rPr>
-              <a:t>유니버스 2026-09-19 10:13:47 · 문서 2026-09-19 10:36 (KST)</a:t>
+              <a:t>유니버스 2026-09-19 10:59:20 · 문서 2026-09-19 11:00 (KST)</a:t>
             </a:r>
             <a:endParaRPr lang="en-US" sz="900" dirty="0"/>
           </a:p>
